--- a/docs/student-projects/grassroots-nat-project.pptx
+++ b/docs/student-projects/grassroots-nat-project.pptx
@@ -13,12 +13,7 @@
     <p:sldId id="261" r:id="rId7"/>
     <p:sldId id="262" r:id="rId8"/>
     <p:sldId id="263" r:id="rId9"/>
-    <p:sldId id="264" r:id="rId10"/>
-    <p:sldId id="265" r:id="rId11"/>
   </p:sldIdLst>
-  <p:notesMasterIdLst>
-    <p:notesMasterId r:id="rId12"/>
-  </p:notesMasterIdLst>
   <p:sldSz cx="12192000" cy="6858000"/>
   <p:notesSz cx="6858000" cy="12192000"/>
   <p:defaultTextStyle>
@@ -116,1235 +111,6 @@
 </p:presentation>
 </file>
 
-<file path=ppt/notesMasters/notesMaster1.xml><?xml version="1.0" encoding="utf-8"?>
-<p:notesMaster xmlns:a="http://schemas.openxmlformats.org/drawingml/2006/main" xmlns:r="http://schemas.openxmlformats.org/officeDocument/2006/relationships" xmlns:p="http://schemas.openxmlformats.org/presentationml/2006/main">
-  <p:cSld>
-    <p:bg>
-      <p:bgRef idx="1001">
-        <a:schemeClr val="bg1"/>
-      </p:bgRef>
-    </p:bg>
-    <p:spTree>
-      <p:nvGrpSpPr>
-        <p:cNvPr id="1" name=""/>
-        <p:cNvGrpSpPr/>
-        <p:nvPr/>
-      </p:nvGrpSpPr>
-      <p:grpSpPr>
-        <a:xfrm>
-          <a:off x="0" y="0"/>
-          <a:ext cx="0" cy="0"/>
-          <a:chOff x="0" y="0"/>
-          <a:chExt cx="0" cy="0"/>
-        </a:xfrm>
-      </p:grpSpPr>
-      <p:sp>
-        <p:nvSpPr>
-          <p:cNvPr id="2" name="Header Placeholder 1"/>
-          <p:cNvSpPr>
-            <a:spLocks noGrp="1"/>
-          </p:cNvSpPr>
-          <p:nvPr>
-            <p:ph type="hdr" sz="quarter"/>
-          </p:nvPr>
-        </p:nvSpPr>
-        <p:spPr>
-          <a:xfrm>
-            <a:off x="0" y="0"/>
-            <a:ext cx="2971800" cy="458788"/>
-          </a:xfrm>
-          <a:prstGeom prst="rect">
-            <a:avLst/>
-          </a:prstGeom>
-        </p:spPr>
-        <p:txBody>
-          <a:bodyPr vert="horz" lIns="91440" tIns="45720" rIns="91440" bIns="45720" rtlCol="0"/>
-          <a:lstStyle>
-            <a:lvl1pPr algn="l">
-              <a:defRPr sz="1200"/>
-            </a:lvl1pPr>
-          </a:lstStyle>
-          <a:p>
-            <a:endParaRPr lang="en-US"/>
-          </a:p>
-        </p:txBody>
-      </p:sp>
-      <p:sp>
-        <p:nvSpPr>
-          <p:cNvPr id="3" name="Date Placeholder 2"/>
-          <p:cNvSpPr>
-            <a:spLocks noGrp="1"/>
-          </p:cNvSpPr>
-          <p:nvPr>
-            <p:ph type="dt" idx="1"/>
-          </p:nvPr>
-        </p:nvSpPr>
-        <p:spPr>
-          <a:xfrm>
-            <a:off x="3884613" y="0"/>
-            <a:ext cx="2971800" cy="458788"/>
-          </a:xfrm>
-          <a:prstGeom prst="rect">
-            <a:avLst/>
-          </a:prstGeom>
-        </p:spPr>
-        <p:txBody>
-          <a:bodyPr vert="horz" lIns="91440" tIns="45720" rIns="91440" bIns="45720" rtlCol="0"/>
-          <a:lstStyle>
-            <a:lvl1pPr algn="r">
-              <a:defRPr sz="1200"/>
-            </a:lvl1pPr>
-          </a:lstStyle>
-          <a:p>
-            <a:fld id="{5282F153-3F37-0F45-9E97-73ACFA13230C}" type="datetimeFigureOut">
-              <a:rPr lang="en-US"/>
-              <a:t>7/23/19</a:t>
-            </a:fld>
-            <a:endParaRPr lang="en-US"/>
-          </a:p>
-        </p:txBody>
-      </p:sp>
-      <p:sp>
-        <p:nvSpPr>
-          <p:cNvPr id="4" name="Slide Image Placeholder 3"/>
-          <p:cNvSpPr>
-            <a:spLocks noGrp="1" noRot="1" noChangeAspect="1"/>
-          </p:cNvSpPr>
-          <p:nvPr>
-            <p:ph type="sldImg" idx="2"/>
-          </p:nvPr>
-        </p:nvSpPr>
-        <p:spPr>
-          <a:xfrm>
-            <a:off x="685800" y="1143000"/>
-            <a:ext cx="5486400" cy="3086100"/>
-          </a:xfrm>
-          <a:prstGeom prst="rect">
-            <a:avLst/>
-          </a:prstGeom>
-          <a:noFill/>
-          <a:ln w="12700">
-            <a:solidFill>
-              <a:prstClr val="black"/>
-            </a:solidFill>
-          </a:ln>
-        </p:spPr>
-        <p:txBody>
-          <a:bodyPr vert="horz" lIns="91440" tIns="45720" rIns="91440" bIns="45720" rtlCol="0" anchor="ctr"/>
-          <a:lstStyle/>
-          <a:p>
-            <a:endParaRPr lang="en-US"/>
-          </a:p>
-        </p:txBody>
-      </p:sp>
-      <p:sp>
-        <p:nvSpPr>
-          <p:cNvPr id="5" name="Notes Placeholder 4"/>
-          <p:cNvSpPr>
-            <a:spLocks noGrp="1"/>
-          </p:cNvSpPr>
-          <p:nvPr>
-            <p:ph type="body" sz="quarter" idx="3"/>
-          </p:nvPr>
-        </p:nvSpPr>
-        <p:spPr>
-          <a:xfrm>
-            <a:off x="685800" y="4400550"/>
-            <a:ext cx="5486400" cy="3600450"/>
-          </a:xfrm>
-          <a:prstGeom prst="rect">
-            <a:avLst/>
-          </a:prstGeom>
-        </p:spPr>
-        <p:txBody>
-          <a:bodyPr vert="horz" lIns="91440" tIns="45720" rIns="91440" bIns="45720" rtlCol="0"/>
-          <a:lstStyle/>
-          <a:p>
-            <a:pPr lvl="0"/>
-            <a:r>
-              <a:rPr lang="en-US"/>
-              <a:t>Click to edit Master text styles</a:t>
-            </a:r>
-          </a:p>
-          <a:p>
-            <a:pPr lvl="1"/>
-            <a:r>
-              <a:rPr lang="en-US"/>
-              <a:t>Second level</a:t>
-            </a:r>
-          </a:p>
-          <a:p>
-            <a:pPr lvl="2"/>
-            <a:r>
-              <a:rPr lang="en-US"/>
-              <a:t>Third level</a:t>
-            </a:r>
-          </a:p>
-          <a:p>
-            <a:pPr lvl="3"/>
-            <a:r>
-              <a:rPr lang="en-US"/>
-              <a:t>Fourth level</a:t>
-            </a:r>
-          </a:p>
-          <a:p>
-            <a:pPr lvl="4"/>
-            <a:r>
-              <a:rPr lang="en-US"/>
-              <a:t>Fifth level</a:t>
-            </a:r>
-          </a:p>
-        </p:txBody>
-      </p:sp>
-      <p:sp>
-        <p:nvSpPr>
-          <p:cNvPr id="6" name="Footer Placeholder 5"/>
-          <p:cNvSpPr>
-            <a:spLocks noGrp="1"/>
-          </p:cNvSpPr>
-          <p:nvPr>
-            <p:ph type="ftr" sz="quarter" idx="4"/>
-          </p:nvPr>
-        </p:nvSpPr>
-        <p:spPr>
-          <a:xfrm>
-            <a:off x="0" y="8685213"/>
-            <a:ext cx="2971800" cy="458787"/>
-          </a:xfrm>
-          <a:prstGeom prst="rect">
-            <a:avLst/>
-          </a:prstGeom>
-        </p:spPr>
-        <p:txBody>
-          <a:bodyPr vert="horz" lIns="91440" tIns="45720" rIns="91440" bIns="45720" rtlCol="0" anchor="b"/>
-          <a:lstStyle>
-            <a:lvl1pPr algn="l">
-              <a:defRPr sz="1200"/>
-            </a:lvl1pPr>
-          </a:lstStyle>
-          <a:p>
-            <a:endParaRPr lang="en-US"/>
-          </a:p>
-        </p:txBody>
-      </p:sp>
-      <p:sp>
-        <p:nvSpPr>
-          <p:cNvPr id="7" name="Slide Number Placeholder 6"/>
-          <p:cNvSpPr>
-            <a:spLocks noGrp="1"/>
-          </p:cNvSpPr>
-          <p:nvPr>
-            <p:ph type="sldNum" sz="quarter" idx="5"/>
-          </p:nvPr>
-        </p:nvSpPr>
-        <p:spPr>
-          <a:xfrm>
-            <a:off x="3884613" y="8685213"/>
-            <a:ext cx="2971800" cy="458787"/>
-          </a:xfrm>
-          <a:prstGeom prst="rect">
-            <a:avLst/>
-          </a:prstGeom>
-        </p:spPr>
-        <p:txBody>
-          <a:bodyPr vert="horz" lIns="91440" tIns="45720" rIns="91440" bIns="45720" rtlCol="0" anchor="b"/>
-          <a:lstStyle>
-            <a:lvl1pPr algn="r">
-              <a:defRPr sz="1200"/>
-            </a:lvl1pPr>
-          </a:lstStyle>
-          <a:p>
-            <a:fld id="{CE5E9CC1-C706-0F49-92D6-E571CC5EEA8F}" type="slidenum">
-              <a:rPr lang="en-US"/>
-              <a:t>‹#›</a:t>
-            </a:fld>
-            <a:endParaRPr lang="en-US"/>
-          </a:p>
-        </p:txBody>
-      </p:sp>
-    </p:spTree>
-    <p:extLst>
-      <p:ext uri="{BB962C8B-B14F-4D97-AF65-F5344CB8AC3E}">
-        <p14:creationId xmlns:p14="http://schemas.microsoft.com/office/powerpoint/2010/main" val="1024086991"/>
-      </p:ext>
-    </p:extLst>
-  </p:cSld>
-  <p:clrMap bg1="lt1" tx1="dk1" bg2="lt2" tx2="dk2" accent1="accent1" accent2="accent2" accent3="accent3" accent4="accent4" accent5="accent5" accent6="accent6" hlink="hlink" folHlink="folHlink"/>
-  <p:notesStyle>
-    <a:lvl1pPr marL="0" algn="l" defTabSz="914400" rtl="0" eaLnBrk="1" latinLnBrk="0" hangingPunct="1">
-      <a:defRPr sz="1200" kern="1200">
-        <a:solidFill>
-          <a:schemeClr val="tx1"/>
-        </a:solidFill>
-        <a:latin typeface="+mn-lt"/>
-        <a:ea typeface="+mn-ea"/>
-        <a:cs typeface="+mn-cs"/>
-      </a:defRPr>
-    </a:lvl1pPr>
-    <a:lvl2pPr marL="457200" algn="l" defTabSz="914400" rtl="0" eaLnBrk="1" latinLnBrk="0" hangingPunct="1">
-      <a:defRPr sz="1200" kern="1200">
-        <a:solidFill>
-          <a:schemeClr val="tx1"/>
-        </a:solidFill>
-        <a:latin typeface="+mn-lt"/>
-        <a:ea typeface="+mn-ea"/>
-        <a:cs typeface="+mn-cs"/>
-      </a:defRPr>
-    </a:lvl2pPr>
-    <a:lvl3pPr marL="914400" algn="l" defTabSz="914400" rtl="0" eaLnBrk="1" latinLnBrk="0" hangingPunct="1">
-      <a:defRPr sz="1200" kern="1200">
-        <a:solidFill>
-          <a:schemeClr val="tx1"/>
-        </a:solidFill>
-        <a:latin typeface="+mn-lt"/>
-        <a:ea typeface="+mn-ea"/>
-        <a:cs typeface="+mn-cs"/>
-      </a:defRPr>
-    </a:lvl3pPr>
-    <a:lvl4pPr marL="1371600" algn="l" defTabSz="914400" rtl="0" eaLnBrk="1" latinLnBrk="0" hangingPunct="1">
-      <a:defRPr sz="1200" kern="1200">
-        <a:solidFill>
-          <a:schemeClr val="tx1"/>
-        </a:solidFill>
-        <a:latin typeface="+mn-lt"/>
-        <a:ea typeface="+mn-ea"/>
-        <a:cs typeface="+mn-cs"/>
-      </a:defRPr>
-    </a:lvl4pPr>
-    <a:lvl5pPr marL="1828800" algn="l" defTabSz="914400" rtl="0" eaLnBrk="1" latinLnBrk="0" hangingPunct="1">
-      <a:defRPr sz="1200" kern="1200">
-        <a:solidFill>
-          <a:schemeClr val="tx1"/>
-        </a:solidFill>
-        <a:latin typeface="+mn-lt"/>
-        <a:ea typeface="+mn-ea"/>
-        <a:cs typeface="+mn-cs"/>
-      </a:defRPr>
-    </a:lvl5pPr>
-    <a:lvl6pPr marL="2286000" algn="l" defTabSz="914400" rtl="0" eaLnBrk="1" latinLnBrk="0" hangingPunct="1">
-      <a:defRPr sz="1200" kern="1200">
-        <a:solidFill>
-          <a:schemeClr val="tx1"/>
-        </a:solidFill>
-        <a:latin typeface="+mn-lt"/>
-        <a:ea typeface="+mn-ea"/>
-        <a:cs typeface="+mn-cs"/>
-      </a:defRPr>
-    </a:lvl6pPr>
-    <a:lvl7pPr marL="2743200" algn="l" defTabSz="914400" rtl="0" eaLnBrk="1" latinLnBrk="0" hangingPunct="1">
-      <a:defRPr sz="1200" kern="1200">
-        <a:solidFill>
-          <a:schemeClr val="tx1"/>
-        </a:solidFill>
-        <a:latin typeface="+mn-lt"/>
-        <a:ea typeface="+mn-ea"/>
-        <a:cs typeface="+mn-cs"/>
-      </a:defRPr>
-    </a:lvl7pPr>
-    <a:lvl8pPr marL="3200400" algn="l" defTabSz="914400" rtl="0" eaLnBrk="1" latinLnBrk="0" hangingPunct="1">
-      <a:defRPr sz="1200" kern="1200">
-        <a:solidFill>
-          <a:schemeClr val="tx1"/>
-        </a:solidFill>
-        <a:latin typeface="+mn-lt"/>
-        <a:ea typeface="+mn-ea"/>
-        <a:cs typeface="+mn-cs"/>
-      </a:defRPr>
-    </a:lvl8pPr>
-    <a:lvl9pPr marL="3657600" algn="l" defTabSz="914400" rtl="0" eaLnBrk="1" latinLnBrk="0" hangingPunct="1">
-      <a:defRPr sz="1200" kern="1200">
-        <a:solidFill>
-          <a:schemeClr val="tx1"/>
-        </a:solidFill>
-        <a:latin typeface="+mn-lt"/>
-        <a:ea typeface="+mn-ea"/>
-        <a:cs typeface="+mn-cs"/>
-      </a:defRPr>
-    </a:lvl9pPr>
-  </p:notesStyle>
-</p:notesMaster>
-</file>
-
-<file path=ppt/notesSlides/notesSlide1.xml><?xml version="1.0" encoding="utf-8"?>
-<p:notes xmlns:a="http://schemas.openxmlformats.org/drawingml/2006/main" xmlns:r="http://schemas.openxmlformats.org/officeDocument/2006/relationships" xmlns:p="http://schemas.openxmlformats.org/presentationml/2006/main">
-  <p:cSld>
-    <p:spTree>
-      <p:nvGrpSpPr>
-        <p:cNvPr id="1" name=""/>
-        <p:cNvGrpSpPr/>
-        <p:nvPr/>
-      </p:nvGrpSpPr>
-      <p:grpSpPr>
-        <a:xfrm>
-          <a:off x="0" y="0"/>
-          <a:ext cx="0" cy="0"/>
-          <a:chOff x="0" y="0"/>
-          <a:chExt cx="0" cy="0"/>
-        </a:xfrm>
-      </p:grpSpPr>
-      <p:sp>
-        <p:nvSpPr>
-          <p:cNvPr id="2" name="Slide Image Placeholder 1"/>
-          <p:cNvSpPr>
-            <a:spLocks noGrp="1" noRot="1" noChangeAspect="1"/>
-          </p:cNvSpPr>
-          <p:nvPr>
-            <p:ph type="sldImg"/>
-          </p:nvPr>
-        </p:nvSpPr>
-        <p:spPr/>
-      </p:sp>
-      <p:sp>
-        <p:nvSpPr>
-          <p:cNvPr id="3" name="Notes Placeholder 2"/>
-          <p:cNvSpPr>
-            <a:spLocks noGrp="1"/>
-          </p:cNvSpPr>
-          <p:nvPr>
-            <p:ph type="body" idx="1"/>
-          </p:nvPr>
-        </p:nvSpPr>
-        <p:spPr/>
-        <p:txBody>
-          <a:bodyPr/>
-          <a:lstStyle/>
-          <a:p>
-            <a:r>
-              <a:rPr lang="en-US" dirty="0"/>
-              <a:t>Six months, one student, inside grassroots_networking. The deliverable is the detection algorithm, validated on a testbed we control; the prevalence measurement follows from the same campaign.</a:t>
-            </a:r>
-            <a:endParaRPr lang="en-US" dirty="0"/>
-          </a:p>
-        </p:txBody>
-      </p:sp>
-      <p:sp>
-        <p:nvSpPr>
-          <p:cNvPr id="4" name="Slide Number Placeholder 3"/>
-          <p:cNvSpPr>
-            <a:spLocks noGrp="1"/>
-          </p:cNvSpPr>
-          <p:nvPr>
-            <p:ph type="sldNum" sz="quarter" idx="10"/>
-          </p:nvPr>
-        </p:nvSpPr>
-        <p:spPr/>
-        <p:txBody>
-          <a:bodyPr/>
-          <a:lstStyle/>
-          <a:p>
-            <a:fld id="{F7021451-1387-4CA6-816F-3879F97B5CBC}" type="slidenum">
-              <a:rPr lang="en-US"/>
-              <a:t>1</a:t>
-            </a:fld>
-            <a:endParaRPr lang="en-US"/>
-          </a:p>
-        </p:txBody>
-      </p:sp>
-    </p:spTree>
-    <p:extLst>
-      <p:ext uri="{BB962C8B-B14F-4D97-AF65-F5344CB8AC3E}">
-        <p14:creationId xmlns:p14="http://schemas.microsoft.com/office/powerpoint/2010/main" val="1024086991"/>
-      </p:ext>
-    </p:extLst>
-  </p:cSld>
-  <p:clrMapOvr>
-    <a:masterClrMapping/>
-  </p:clrMapOvr>
-</p:notes>
-</file>
-
-<file path=ppt/notesSlides/notesSlide10.xml><?xml version="1.0" encoding="utf-8"?>
-<p:notes xmlns:a="http://schemas.openxmlformats.org/drawingml/2006/main" xmlns:r="http://schemas.openxmlformats.org/officeDocument/2006/relationships" xmlns:p="http://schemas.openxmlformats.org/presentationml/2006/main">
-  <p:cSld>
-    <p:spTree>
-      <p:nvGrpSpPr>
-        <p:cNvPr id="1" name=""/>
-        <p:cNvGrpSpPr/>
-        <p:nvPr/>
-      </p:nvGrpSpPr>
-      <p:grpSpPr>
-        <a:xfrm>
-          <a:off x="0" y="0"/>
-          <a:ext cx="0" cy="0"/>
-          <a:chOff x="0" y="0"/>
-          <a:chExt cx="0" cy="0"/>
-        </a:xfrm>
-      </p:grpSpPr>
-      <p:sp>
-        <p:nvSpPr>
-          <p:cNvPr id="2" name="Slide Image Placeholder 1"/>
-          <p:cNvSpPr>
-            <a:spLocks noGrp="1" noRot="1" noChangeAspect="1"/>
-          </p:cNvSpPr>
-          <p:nvPr>
-            <p:ph type="sldImg"/>
-          </p:nvPr>
-        </p:nvSpPr>
-        <p:spPr/>
-      </p:sp>
-      <p:sp>
-        <p:nvSpPr>
-          <p:cNvPr id="3" name="Notes Placeholder 2"/>
-          <p:cNvSpPr>
-            <a:spLocks noGrp="1"/>
-          </p:cNvSpPr>
-          <p:nvPr>
-            <p:ph type="body" idx="1"/>
-          </p:nvPr>
-        </p:nvSpPr>
-        <p:spPr/>
-        <p:txBody>
-          <a:bodyPr/>
-          <a:lstStyle/>
-          <a:p>
-            <a:r>
-              <a:rPr lang="en-US" dirty="0"/>
-              <a:t>The anchor is IPv6-only in its data plane, which excludes the IPv4-only CGNAT population the study targets; that is a fifth decision and it also affects the product. Three unrelated defects found while surveying the transport are listed in the brief.</a:t>
-            </a:r>
-            <a:endParaRPr lang="en-US" dirty="0"/>
-          </a:p>
-        </p:txBody>
-      </p:sp>
-      <p:sp>
-        <p:nvSpPr>
-          <p:cNvPr id="4" name="Slide Number Placeholder 3"/>
-          <p:cNvSpPr>
-            <a:spLocks noGrp="1"/>
-          </p:cNvSpPr>
-          <p:nvPr>
-            <p:ph type="sldNum" sz="quarter" idx="10"/>
-          </p:nvPr>
-        </p:nvSpPr>
-        <p:spPr/>
-        <p:txBody>
-          <a:bodyPr/>
-          <a:lstStyle/>
-          <a:p>
-            <a:fld id="{F7021451-1387-4CA6-816F-3879F97B5CBC}" type="slidenum">
-              <a:rPr lang="en-US"/>
-              <a:t>10</a:t>
-            </a:fld>
-            <a:endParaRPr lang="en-US"/>
-          </a:p>
-        </p:txBody>
-      </p:sp>
-    </p:spTree>
-    <p:extLst>
-      <p:ext uri="{BB962C8B-B14F-4D97-AF65-F5344CB8AC3E}">
-        <p14:creationId xmlns:p14="http://schemas.microsoft.com/office/powerpoint/2010/main" val="1024086991"/>
-      </p:ext>
-    </p:extLst>
-  </p:cSld>
-  <p:clrMapOvr>
-    <a:masterClrMapping/>
-  </p:clrMapOvr>
-</p:notes>
-</file>
-
-<file path=ppt/notesSlides/notesSlide2.xml><?xml version="1.0" encoding="utf-8"?>
-<p:notes xmlns:a="http://schemas.openxmlformats.org/drawingml/2006/main" xmlns:r="http://schemas.openxmlformats.org/officeDocument/2006/relationships" xmlns:p="http://schemas.openxmlformats.org/presentationml/2006/main">
-  <p:cSld>
-    <p:spTree>
-      <p:nvGrpSpPr>
-        <p:cNvPr id="1" name=""/>
-        <p:cNvGrpSpPr/>
-        <p:nvPr/>
-      </p:nvGrpSpPr>
-      <p:grpSpPr>
-        <a:xfrm>
-          <a:off x="0" y="0"/>
-          <a:ext cx="0" cy="0"/>
-          <a:chOff x="0" y="0"/>
-          <a:chExt cx="0" cy="0"/>
-        </a:xfrm>
-      </p:grpSpPr>
-      <p:sp>
-        <p:nvSpPr>
-          <p:cNvPr id="2" name="Slide Image Placeholder 1"/>
-          <p:cNvSpPr>
-            <a:spLocks noGrp="1" noRot="1" noChangeAspect="1"/>
-          </p:cNvSpPr>
-          <p:nvPr>
-            <p:ph type="sldImg"/>
-          </p:nvPr>
-        </p:nvSpPr>
-        <p:spPr/>
-      </p:sp>
-      <p:sp>
-        <p:nvSpPr>
-          <p:cNvPr id="3" name="Notes Placeholder 2"/>
-          <p:cNvSpPr>
-            <a:spLocks noGrp="1"/>
-          </p:cNvSpPr>
-          <p:nvPr>
-            <p:ph type="body" idx="1"/>
-          </p:nvPr>
-        </p:nvSpPr>
-        <p:spPr/>
-        <p:txBody>
-          <a:bodyPr/>
-          <a:lstStyle/>
-          <a:p>
-            <a:r>
-              <a:rPr lang="en-US" dirty="0"/>
-              <a:t>Two wildcard sockets on port 0, so the port changes on every rebind. The mapped port is only ever learned from ADDR_REFLECT, which needs a session that already works — no use for a first contact. The ten-second announce doubles as the de facto NAT keepalive.</a:t>
-            </a:r>
-            <a:endParaRPr lang="en-US" dirty="0"/>
-          </a:p>
-        </p:txBody>
-      </p:sp>
-      <p:sp>
-        <p:nvSpPr>
-          <p:cNvPr id="4" name="Slide Number Placeholder 3"/>
-          <p:cNvSpPr>
-            <a:spLocks noGrp="1"/>
-          </p:cNvSpPr>
-          <p:nvPr>
-            <p:ph type="sldNum" sz="quarter" idx="10"/>
-          </p:nvPr>
-        </p:nvSpPr>
-        <p:spPr/>
-        <p:txBody>
-          <a:bodyPr/>
-          <a:lstStyle/>
-          <a:p>
-            <a:fld id="{F7021451-1387-4CA6-816F-3879F97B5CBC}" type="slidenum">
-              <a:rPr lang="en-US"/>
-              <a:t>2</a:t>
-            </a:fld>
-            <a:endParaRPr lang="en-US"/>
-          </a:p>
-        </p:txBody>
-      </p:sp>
-    </p:spTree>
-    <p:extLst>
-      <p:ext uri="{BB962C8B-B14F-4D97-AF65-F5344CB8AC3E}">
-        <p14:creationId xmlns:p14="http://schemas.microsoft.com/office/powerpoint/2010/main" val="1024086991"/>
-      </p:ext>
-    </p:extLst>
-  </p:cSld>
-  <p:clrMapOvr>
-    <a:masterClrMapping/>
-  </p:clrMapOvr>
-</p:notes>
-</file>
-
-<file path=ppt/notesSlides/notesSlide3.xml><?xml version="1.0" encoding="utf-8"?>
-<p:notes xmlns:a="http://schemas.openxmlformats.org/drawingml/2006/main" xmlns:r="http://schemas.openxmlformats.org/officeDocument/2006/relationships" xmlns:p="http://schemas.openxmlformats.org/presentationml/2006/main">
-  <p:cSld>
-    <p:spTree>
-      <p:nvGrpSpPr>
-        <p:cNvPr id="1" name=""/>
-        <p:cNvGrpSpPr/>
-        <p:nvPr/>
-      </p:nvGrpSpPr>
-      <p:grpSpPr>
-        <a:xfrm>
-          <a:off x="0" y="0"/>
-          <a:ext cx="0" cy="0"/>
-          <a:chOff x="0" y="0"/>
-          <a:chExt cx="0" cy="0"/>
-        </a:xfrm>
-      </p:grpSpPr>
-      <p:sp>
-        <p:nvSpPr>
-          <p:cNvPr id="2" name="Slide Image Placeholder 1"/>
-          <p:cNvSpPr>
-            <a:spLocks noGrp="1" noRot="1" noChangeAspect="1"/>
-          </p:cNvSpPr>
-          <p:nvPr>
-            <p:ph type="sldImg"/>
-          </p:nvPr>
-        </p:nvSpPr>
-        <p:spPr/>
-      </p:sp>
-      <p:sp>
-        <p:nvSpPr>
-          <p:cNvPr id="3" name="Notes Placeholder 2"/>
-          <p:cNvSpPr>
-            <a:spLocks noGrp="1"/>
-          </p:cNvSpPr>
-          <p:nvPr>
-            <p:ph type="body" idx="1"/>
-          </p:nvPr>
-        </p:nvSpPr>
-        <p:spPr/>
-        <p:txBody>
-          <a:bodyPr/>
-          <a:lstStyle/>
-          <a:p>
-            <a:r>
-              <a:rPr lang="en-US" dirty="0"/>
-              <a:t>Filtering is the second axis: which inbound traffic is admitted on an existing mapping, endpoint-independent through address-and-port-dependent. Mapping decides whether a port can be predicted at all; filtering decides whether the arriving packet is let through. Port preservation is why the current code sometimes works by accident, and mapping lifetime sets the keepalive interval.</a:t>
-            </a:r>
-            <a:endParaRPr lang="en-US" dirty="0"/>
-          </a:p>
-        </p:txBody>
-      </p:sp>
-      <p:sp>
-        <p:nvSpPr>
-          <p:cNvPr id="4" name="Slide Number Placeholder 3"/>
-          <p:cNvSpPr>
-            <a:spLocks noGrp="1"/>
-          </p:cNvSpPr>
-          <p:nvPr>
-            <p:ph type="sldNum" sz="quarter" idx="10"/>
-          </p:nvPr>
-        </p:nvSpPr>
-        <p:spPr/>
-        <p:txBody>
-          <a:bodyPr/>
-          <a:lstStyle/>
-          <a:p>
-            <a:fld id="{F7021451-1387-4CA6-816F-3879F97B5CBC}" type="slidenum">
-              <a:rPr lang="en-US"/>
-              <a:t>3</a:t>
-            </a:fld>
-            <a:endParaRPr lang="en-US"/>
-          </a:p>
-        </p:txBody>
-      </p:sp>
-    </p:spTree>
-    <p:extLst>
-      <p:ext uri="{BB962C8B-B14F-4D97-AF65-F5344CB8AC3E}">
-        <p14:creationId xmlns:p14="http://schemas.microsoft.com/office/powerpoint/2010/main" val="1024086991"/>
-      </p:ext>
-    </p:extLst>
-  </p:cSld>
-  <p:clrMapOvr>
-    <a:masterClrMapping/>
-  </p:clrMapOvr>
-</p:notes>
-</file>
-
-<file path=ppt/notesSlides/notesSlide4.xml><?xml version="1.0" encoding="utf-8"?>
-<p:notes xmlns:a="http://schemas.openxmlformats.org/drawingml/2006/main" xmlns:r="http://schemas.openxmlformats.org/officeDocument/2006/relationships" xmlns:p="http://schemas.openxmlformats.org/presentationml/2006/main">
-  <p:cSld>
-    <p:spTree>
-      <p:nvGrpSpPr>
-        <p:cNvPr id="1" name=""/>
-        <p:cNvGrpSpPr/>
-        <p:nvPr/>
-      </p:nvGrpSpPr>
-      <p:grpSpPr>
-        <a:xfrm>
-          <a:off x="0" y="0"/>
-          <a:ext cx="0" cy="0"/>
-          <a:chOff x="0" y="0"/>
-          <a:chExt cx="0" cy="0"/>
-        </a:xfrm>
-      </p:grpSpPr>
-      <p:sp>
-        <p:nvSpPr>
-          <p:cNvPr id="2" name="Slide Image Placeholder 1"/>
-          <p:cNvSpPr>
-            <a:spLocks noGrp="1" noRot="1" noChangeAspect="1"/>
-          </p:cNvSpPr>
-          <p:nvPr>
-            <p:ph type="sldImg"/>
-          </p:nvPr>
-        </p:nvSpPr>
-        <p:spPr/>
-      </p:sp>
-      <p:sp>
-        <p:nvSpPr>
-          <p:cNvPr id="3" name="Notes Placeholder 2"/>
-          <p:cNvSpPr>
-            <a:spLocks noGrp="1"/>
-          </p:cNvSpPr>
-          <p:nvPr>
-            <p:ph type="body" idx="1"/>
-          </p:nvPr>
-        </p:nvSpPr>
-        <p:spPr/>
-        <p:txBody>
-          <a:bodyPr/>
-          <a:lstStyle/>
-          <a:p>
-            <a:r>
-              <a:rPr lang="en-US" dirty="0"/>
-              <a:t>Confirmed in source at grassroots_network.dart:3369. This is the clearest motivation for the project: the system cannot distinguish a public address from a reachable one, and every consequence follows from that.</a:t>
-            </a:r>
-            <a:endParaRPr lang="en-US" dirty="0"/>
-          </a:p>
-        </p:txBody>
-      </p:sp>
-      <p:sp>
-        <p:nvSpPr>
-          <p:cNvPr id="4" name="Slide Number Placeholder 3"/>
-          <p:cNvSpPr>
-            <a:spLocks noGrp="1"/>
-          </p:cNvSpPr>
-          <p:nvPr>
-            <p:ph type="sldNum" sz="quarter" idx="10"/>
-          </p:nvPr>
-        </p:nvSpPr>
-        <p:spPr/>
-        <p:txBody>
-          <a:bodyPr/>
-          <a:lstStyle/>
-          <a:p>
-            <a:fld id="{F7021451-1387-4CA6-816F-3879F97B5CBC}" type="slidenum">
-              <a:rPr lang="en-US"/>
-              <a:t>4</a:t>
-            </a:fld>
-            <a:endParaRPr lang="en-US"/>
-          </a:p>
-        </p:txBody>
-      </p:sp>
-    </p:spTree>
-    <p:extLst>
-      <p:ext uri="{BB962C8B-B14F-4D97-AF65-F5344CB8AC3E}">
-        <p14:creationId xmlns:p14="http://schemas.microsoft.com/office/powerpoint/2010/main" val="1024086991"/>
-      </p:ext>
-    </p:extLst>
-  </p:cSld>
-  <p:clrMapOvr>
-    <a:masterClrMapping/>
-  </p:clrMapOvr>
-</p:notes>
-</file>
-
-<file path=ppt/notesSlides/notesSlide5.xml><?xml version="1.0" encoding="utf-8"?>
-<p:notes xmlns:a="http://schemas.openxmlformats.org/drawingml/2006/main" xmlns:r="http://schemas.openxmlformats.org/officeDocument/2006/relationships" xmlns:p="http://schemas.openxmlformats.org/presentationml/2006/main">
-  <p:cSld>
-    <p:spTree>
-      <p:nvGrpSpPr>
-        <p:cNvPr id="1" name=""/>
-        <p:cNvGrpSpPr/>
-        <p:nvPr/>
-      </p:nvGrpSpPr>
-      <p:grpSpPr>
-        <a:xfrm>
-          <a:off x="0" y="0"/>
-          <a:ext cx="0" cy="0"/>
-          <a:chOff x="0" y="0"/>
-          <a:chExt cx="0" cy="0"/>
-        </a:xfrm>
-      </p:grpSpPr>
-      <p:sp>
-        <p:nvSpPr>
-          <p:cNvPr id="2" name="Slide Image Placeholder 1"/>
-          <p:cNvSpPr>
-            <a:spLocks noGrp="1" noRot="1" noChangeAspect="1"/>
-          </p:cNvSpPr>
-          <p:nvPr>
-            <p:ph type="sldImg"/>
-          </p:nvPr>
-        </p:nvSpPr>
-        <p:spPr/>
-      </p:sp>
-      <p:sp>
-        <p:nvSpPr>
-          <p:cNvPr id="3" name="Notes Placeholder 2"/>
-          <p:cNvSpPr>
-            <a:spLocks noGrp="1"/>
-          </p:cNvSpPr>
-          <p:nvPr>
-            <p:ph type="body" idx="1"/>
-          </p:nvPr>
-        </p:nvSpPr>
-        <p:spPr/>
-        <p:txBody>
-          <a:bodyPr/>
-          <a:lstStyle/>
-          <a:p>
-            <a:r>
-              <a:rPr lang="en-US" dirty="0"/>
-              <a:t>Reflections from friends at distinct addresses give mapping behavior. Filtering follows from where the dial-backs come from, classified against our own send history: a friend we have a session with, the same friend on a fresh source port, and a friend we have never transmitted to. No friend is ever asked to dial anyone but us, so there is no amplification vector and no relaying for non-friends, which the signaling design forbids anyway.</a:t>
-            </a:r>
-            <a:endParaRPr lang="en-US" dirty="0"/>
-          </a:p>
-        </p:txBody>
-      </p:sp>
-      <p:sp>
-        <p:nvSpPr>
-          <p:cNvPr id="4" name="Slide Number Placeholder 3"/>
-          <p:cNvSpPr>
-            <a:spLocks noGrp="1"/>
-          </p:cNvSpPr>
-          <p:nvPr>
-            <p:ph type="sldNum" sz="quarter" idx="10"/>
-          </p:nvPr>
-        </p:nvSpPr>
-        <p:spPr/>
-        <p:txBody>
-          <a:bodyPr/>
-          <a:lstStyle/>
-          <a:p>
-            <a:fld id="{F7021451-1387-4CA6-816F-3879F97B5CBC}" type="slidenum">
-              <a:rPr lang="en-US"/>
-              <a:t>5</a:t>
-            </a:fld>
-            <a:endParaRPr lang="en-US"/>
-          </a:p>
-        </p:txBody>
-      </p:sp>
-    </p:spTree>
-    <p:extLst>
-      <p:ext uri="{BB962C8B-B14F-4D97-AF65-F5344CB8AC3E}">
-        <p14:creationId xmlns:p14="http://schemas.microsoft.com/office/powerpoint/2010/main" val="1024086991"/>
-      </p:ext>
-    </p:extLst>
-  </p:cSld>
-  <p:clrMapOvr>
-    <a:masterClrMapping/>
-  </p:clrMapOvr>
-</p:notes>
-</file>
-
-<file path=ppt/notesSlides/notesSlide6.xml><?xml version="1.0" encoding="utf-8"?>
-<p:notes xmlns:a="http://schemas.openxmlformats.org/drawingml/2006/main" xmlns:r="http://schemas.openxmlformats.org/officeDocument/2006/relationships" xmlns:p="http://schemas.openxmlformats.org/presentationml/2006/main">
-  <p:cSld>
-    <p:spTree>
-      <p:nvGrpSpPr>
-        <p:cNvPr id="1" name=""/>
-        <p:cNvGrpSpPr/>
-        <p:nvPr/>
-      </p:nvGrpSpPr>
-      <p:grpSpPr>
-        <a:xfrm>
-          <a:off x="0" y="0"/>
-          <a:ext cx="0" cy="0"/>
-          <a:chOff x="0" y="0"/>
-          <a:chExt cx="0" cy="0"/>
-        </a:xfrm>
-      </p:grpSpPr>
-      <p:sp>
-        <p:nvSpPr>
-          <p:cNvPr id="2" name="Slide Image Placeholder 1"/>
-          <p:cNvSpPr>
-            <a:spLocks noGrp="1" noRot="1" noChangeAspect="1"/>
-          </p:cNvSpPr>
-          <p:nvPr>
-            <p:ph type="sldImg"/>
-          </p:nvPr>
-        </p:nvSpPr>
-        <p:spPr/>
-      </p:sp>
-      <p:sp>
-        <p:nvSpPr>
-          <p:cNvPr id="3" name="Notes Placeholder 2"/>
-          <p:cNvSpPr>
-            <a:spLocks noGrp="1"/>
-          </p:cNvSpPr>
-          <p:nvPr>
-            <p:ph type="body" idx="1"/>
-          </p:nvPr>
-        </p:nvSpPr>
-        <p:spPr/>
-        <p:txBody>
-          <a:bodyPr/>
-          <a:lstStyle/>
-          <a:p>
-            <a:r>
-              <a:rPr lang="en-US" dirty="0"/>
-              <a:t>Left column is mapping, right is filtering. An arrival is definitive and ends that arm; an absence is retried before it is recorded, because under honest peers an absent dial-back is equally consistent with filtering and with loss. The minimum witness set is combinatorial: two friends at distinct addresses separate endpoint-independent from address-dependent mapping, one friend reachable on two ports separates address-and-port-dependent, and one friend never transmitted to gives the endpoint-independent filtering test. The measurand and the procedure are RFC 4787 and 5780; the dial-back is from autoNAT, which is a libp2p spec and not an RFC; the friends are ours.</a:t>
-            </a:r>
-            <a:endParaRPr lang="en-US" dirty="0"/>
-          </a:p>
-        </p:txBody>
-      </p:sp>
-      <p:sp>
-        <p:nvSpPr>
-          <p:cNvPr id="4" name="Slide Number Placeholder 3"/>
-          <p:cNvSpPr>
-            <a:spLocks noGrp="1"/>
-          </p:cNvSpPr>
-          <p:nvPr>
-            <p:ph type="sldNum" sz="quarter" idx="10"/>
-          </p:nvPr>
-        </p:nvSpPr>
-        <p:spPr/>
-        <p:txBody>
-          <a:bodyPr/>
-          <a:lstStyle/>
-          <a:p>
-            <a:fld id="{F7021451-1387-4CA6-816F-3879F97B5CBC}" type="slidenum">
-              <a:rPr lang="en-US"/>
-              <a:t>6</a:t>
-            </a:fld>
-            <a:endParaRPr lang="en-US"/>
-          </a:p>
-        </p:txBody>
-      </p:sp>
-    </p:spTree>
-    <p:extLst>
-      <p:ext uri="{BB962C8B-B14F-4D97-AF65-F5344CB8AC3E}">
-        <p14:creationId xmlns:p14="http://schemas.microsoft.com/office/powerpoint/2010/main" val="1024086991"/>
-      </p:ext>
-    </p:extLst>
-  </p:cSld>
-  <p:clrMapOvr>
-    <a:masterClrMapping/>
-  </p:clrMapOvr>
-</p:notes>
-</file>
-
-<file path=ppt/notesSlides/notesSlide7.xml><?xml version="1.0" encoding="utf-8"?>
-<p:notes xmlns:a="http://schemas.openxmlformats.org/drawingml/2006/main" xmlns:r="http://schemas.openxmlformats.org/officeDocument/2006/relationships" xmlns:p="http://schemas.openxmlformats.org/presentationml/2006/main">
-  <p:cSld>
-    <p:spTree>
-      <p:nvGrpSpPr>
-        <p:cNvPr id="1" name=""/>
-        <p:cNvGrpSpPr/>
-        <p:nvPr/>
-      </p:nvGrpSpPr>
-      <p:grpSpPr>
-        <a:xfrm>
-          <a:off x="0" y="0"/>
-          <a:ext cx="0" cy="0"/>
-          <a:chOff x="0" y="0"/>
-          <a:chExt cx="0" cy="0"/>
-        </a:xfrm>
-      </p:grpSpPr>
-      <p:sp>
-        <p:nvSpPr>
-          <p:cNvPr id="2" name="Slide Image Placeholder 1"/>
-          <p:cNvSpPr>
-            <a:spLocks noGrp="1" noRot="1" noChangeAspect="1"/>
-          </p:cNvSpPr>
-          <p:nvPr>
-            <p:ph type="sldImg"/>
-          </p:nvPr>
-        </p:nvSpPr>
-        <p:spPr/>
-      </p:sp>
-      <p:sp>
-        <p:nvSpPr>
-          <p:cNvPr id="3" name="Notes Placeholder 2"/>
-          <p:cNvSpPr>
-            <a:spLocks noGrp="1"/>
-          </p:cNvSpPr>
-          <p:nvPr>
-            <p:ph type="body" idx="1"/>
-          </p:nvPr>
-        </p:nvSpPr>
-        <p:spPr/>
-        <p:txBody>
-          <a:bodyPr/>
-          <a:lstStyle/>
-          <a:p>
-            <a:r>
-              <a:rPr lang="en-US" dirty="0"/>
-              <a:t>Contamination is the one that would quietly invalidate a field campaign: it biases in the direction that looks like good news. We publish the label difference between contaminated and clean runs as a result in its own right. The nonce survives the honesty assumption for a different reason: the peers are honest but the network is not, and an off-path party could otherwise inject something resembling a dial-back. Disagreement between witnesses is diagnostic here, not malicious: it usually means the behavior genuinely depends on the source address or port.</a:t>
-            </a:r>
-            <a:endParaRPr lang="en-US" dirty="0"/>
-          </a:p>
-        </p:txBody>
-      </p:sp>
-      <p:sp>
-        <p:nvSpPr>
-          <p:cNvPr id="4" name="Slide Number Placeholder 3"/>
-          <p:cNvSpPr>
-            <a:spLocks noGrp="1"/>
-          </p:cNvSpPr>
-          <p:nvPr>
-            <p:ph type="sldNum" sz="quarter" idx="10"/>
-          </p:nvPr>
-        </p:nvSpPr>
-        <p:spPr/>
-        <p:txBody>
-          <a:bodyPr/>
-          <a:lstStyle/>
-          <a:p>
-            <a:fld id="{F7021451-1387-4CA6-816F-3879F97B5CBC}" type="slidenum">
-              <a:rPr lang="en-US"/>
-              <a:t>7</a:t>
-            </a:fld>
-            <a:endParaRPr lang="en-US"/>
-          </a:p>
-        </p:txBody>
-      </p:sp>
-    </p:spTree>
-    <p:extLst>
-      <p:ext uri="{BB962C8B-B14F-4D97-AF65-F5344CB8AC3E}">
-        <p14:creationId xmlns:p14="http://schemas.microsoft.com/office/powerpoint/2010/main" val="1024086991"/>
-      </p:ext>
-    </p:extLst>
-  </p:cSld>
-  <p:clrMapOvr>
-    <a:masterClrMapping/>
-  </p:clrMapOvr>
-</p:notes>
-</file>
-
-<file path=ppt/notesSlides/notesSlide8.xml><?xml version="1.0" encoding="utf-8"?>
-<p:notes xmlns:a="http://schemas.openxmlformats.org/drawingml/2006/main" xmlns:r="http://schemas.openxmlformats.org/officeDocument/2006/relationships" xmlns:p="http://schemas.openxmlformats.org/presentationml/2006/main">
-  <p:cSld>
-    <p:spTree>
-      <p:nvGrpSpPr>
-        <p:cNvPr id="1" name=""/>
-        <p:cNvGrpSpPr/>
-        <p:nvPr/>
-      </p:nvGrpSpPr>
-      <p:grpSpPr>
-        <a:xfrm>
-          <a:off x="0" y="0"/>
-          <a:ext cx="0" cy="0"/>
-          <a:chOff x="0" y="0"/>
-          <a:chExt cx="0" cy="0"/>
-        </a:xfrm>
-      </p:grpSpPr>
-      <p:sp>
-        <p:nvSpPr>
-          <p:cNvPr id="2" name="Slide Image Placeholder 1"/>
-          <p:cNvSpPr>
-            <a:spLocks noGrp="1" noRot="1" noChangeAspect="1"/>
-          </p:cNvSpPr>
-          <p:nvPr>
-            <p:ph type="sldImg"/>
-          </p:nvPr>
-        </p:nvSpPr>
-        <p:spPr/>
-      </p:sp>
-      <p:sp>
-        <p:nvSpPr>
-          <p:cNvPr id="3" name="Notes Placeholder 2"/>
-          <p:cNvSpPr>
-            <a:spLocks noGrp="1"/>
-          </p:cNvSpPr>
-          <p:nvPr>
-            <p:ph type="body" idx="1"/>
-          </p:nvPr>
-        </p:nvSpPr>
-        <p:spPr/>
-        <p:txBody>
-          <a:bodyPr/>
-          <a:lstStyle/>
-          <a:p>
-            <a:r>
-              <a:rPr lang="en-US" dirty="0"/>
-              <a:t>The requirement that decides whether a host can serve is whether it may receive unsolicited inbound UDP on those ports; a border firewall that drops them makes the host unusable however many addresses it has, so it is a week-one question for IT. University wired hosts are usually publicly addressed rather than translated, which is why the campus supplies the vantage points while the handsets remain the subjects. Campus wireless, guest and VPN are separate access networks, worth characterizing on their own terms.</a:t>
-            </a:r>
-            <a:endParaRPr lang="en-US" dirty="0"/>
-          </a:p>
-        </p:txBody>
-      </p:sp>
-      <p:sp>
-        <p:nvSpPr>
-          <p:cNvPr id="4" name="Slide Number Placeholder 3"/>
-          <p:cNvSpPr>
-            <a:spLocks noGrp="1"/>
-          </p:cNvSpPr>
-          <p:nvPr>
-            <p:ph type="sldNum" sz="quarter" idx="10"/>
-          </p:nvPr>
-        </p:nvSpPr>
-        <p:spPr/>
-        <p:txBody>
-          <a:bodyPr/>
-          <a:lstStyle/>
-          <a:p>
-            <a:fld id="{F7021451-1387-4CA6-816F-3879F97B5CBC}" type="slidenum">
-              <a:rPr lang="en-US"/>
-              <a:t>8</a:t>
-            </a:fld>
-            <a:endParaRPr lang="en-US"/>
-          </a:p>
-        </p:txBody>
-      </p:sp>
-    </p:spTree>
-    <p:extLst>
-      <p:ext uri="{BB962C8B-B14F-4D97-AF65-F5344CB8AC3E}">
-        <p14:creationId xmlns:p14="http://schemas.microsoft.com/office/powerpoint/2010/main" val="1024086991"/>
-      </p:ext>
-    </p:extLst>
-  </p:cSld>
-  <p:clrMapOvr>
-    <a:masterClrMapping/>
-  </p:clrMapOvr>
-</p:notes>
-</file>
-
-<file path=ppt/notesSlides/notesSlide9.xml><?xml version="1.0" encoding="utf-8"?>
-<p:notes xmlns:a="http://schemas.openxmlformats.org/drawingml/2006/main" xmlns:r="http://schemas.openxmlformats.org/officeDocument/2006/relationships" xmlns:p="http://schemas.openxmlformats.org/presentationml/2006/main">
-  <p:cSld>
-    <p:spTree>
-      <p:nvGrpSpPr>
-        <p:cNvPr id="1" name=""/>
-        <p:cNvGrpSpPr/>
-        <p:nvPr/>
-      </p:nvGrpSpPr>
-      <p:grpSpPr>
-        <a:xfrm>
-          <a:off x="0" y="0"/>
-          <a:ext cx="0" cy="0"/>
-          <a:chOff x="0" y="0"/>
-          <a:chExt cx="0" cy="0"/>
-        </a:xfrm>
-      </p:grpSpPr>
-      <p:sp>
-        <p:nvSpPr>
-          <p:cNvPr id="2" name="Slide Image Placeholder 1"/>
-          <p:cNvSpPr>
-            <a:spLocks noGrp="1" noRot="1" noChangeAspect="1"/>
-          </p:cNvSpPr>
-          <p:nvPr>
-            <p:ph type="sldImg"/>
-          </p:nvPr>
-        </p:nvSpPr>
-        <p:spPr/>
-      </p:sp>
-      <p:sp>
-        <p:nvSpPr>
-          <p:cNvPr id="3" name="Notes Placeholder 2"/>
-          <p:cNvSpPr>
-            <a:spLocks noGrp="1"/>
-          </p:cNvSpPr>
-          <p:nvPr>
-            <p:ph type="body" idx="1"/>
-          </p:nvPr>
-        </p:nvSpPr>
-        <p:spPr/>
-        <p:txBody>
-          <a:bodyPr/>
-          <a:lstStyle/>
-          <a:p>
-            <a:r>
-              <a:rPr lang="en-US" dirty="0"/>
-              <a:t>Every phase carries an exit criterion in the written brief. The week-3 checkpoint is code rather than a document: a reflexive address obtained over the transport’s own socket, which forces the demultiplexer change early and tells us whether the socket can be shared at all. Excluded by design and named as such: the autoNAT sidecar, the byzantine analysis, the weighted prevalence estimate and the decision-rule fit.</a:t>
-            </a:r>
-            <a:endParaRPr lang="en-US" dirty="0"/>
-          </a:p>
-        </p:txBody>
-      </p:sp>
-      <p:sp>
-        <p:nvSpPr>
-          <p:cNvPr id="4" name="Slide Number Placeholder 3"/>
-          <p:cNvSpPr>
-            <a:spLocks noGrp="1"/>
-          </p:cNvSpPr>
-          <p:nvPr>
-            <p:ph type="sldNum" sz="quarter" idx="10"/>
-          </p:nvPr>
-        </p:nvSpPr>
-        <p:spPr/>
-        <p:txBody>
-          <a:bodyPr/>
-          <a:lstStyle/>
-          <a:p>
-            <a:fld id="{F7021451-1387-4CA6-816F-3879F97B5CBC}" type="slidenum">
-              <a:rPr lang="en-US"/>
-              <a:t>9</a:t>
-            </a:fld>
-            <a:endParaRPr lang="en-US"/>
-          </a:p>
-        </p:txBody>
-      </p:sp>
-    </p:spTree>
-    <p:extLst>
-      <p:ext uri="{BB962C8B-B14F-4D97-AF65-F5344CB8AC3E}">
-        <p14:creationId xmlns:p14="http://schemas.microsoft.com/office/powerpoint/2010/main" val="1024086991"/>
-      </p:ext>
-    </p:extLst>
-  </p:cSld>
-  <p:clrMapOvr>
-    <a:masterClrMapping/>
-  </p:clrMapOvr>
-</p:notes>
-</file>
-
 <file path=ppt/slideLayouts/slideLayout1.xml><?xml version="1.0" encoding="utf-8"?>
 <p:sldLayout xmlns:a="http://schemas.openxmlformats.org/drawingml/2006/main" xmlns:r="http://schemas.openxmlformats.org/officeDocument/2006/relationships" xmlns:p="http://schemas.openxmlformats.org/presentationml/2006/main" preserve="1">
   <p:cSld name="DEFAULT">
@@ -2041,27 +807,7 @@
                 <a:ea typeface="Cambria" pitchFamily="34" charset="-122"/>
                 <a:cs typeface="Cambria" pitchFamily="34" charset="-120"/>
               </a:rPr>
-              <a:t>NAT detection and</a:t>
-            </a:r>
-            <a:endParaRPr lang="en-US" sz="4400" dirty="0"/>
-          </a:p>
-          <a:p>
-            <a:pPr indent="0" marL="0">
-              <a:lnSpc>
-                <a:spcPct val="95000"/>
-              </a:lnSpc>
-              <a:buNone/>
-            </a:pPr>
-            <a:r>
-              <a:rPr lang="en-US" sz="4400" b="1" dirty="0">
-                <a:solidFill>
-                  <a:srgbClr val="FFFFFF"/>
-                </a:solidFill>
-                <a:latin typeface="Cambria" pitchFamily="34" charset="0"/>
-                <a:ea typeface="Cambria" pitchFamily="34" charset="-122"/>
-                <a:cs typeface="Cambria" pitchFamily="34" charset="-120"/>
-              </a:rPr>
-              <a:t>hole punching</a:t>
+              <a:t>NAT Topology and Hole-Punching Survey</a:t>
             </a:r>
             <a:endParaRPr lang="en-US" sz="4400" dirty="0"/>
           </a:p>
@@ -2100,7 +846,7 @@
                 <a:ea typeface="Calibri" pitchFamily="34" charset="-122"/>
                 <a:cs typeface="Calibri" pitchFamily="34" charset="-120"/>
               </a:rPr>
-              <a:t>Determining NAT behavior from the social graph, without designated servers</a:t>
+              <a:t>Grassroots approach to classifying NATs</a:t>
             </a:r>
             <a:endParaRPr lang="en-US" sz="1600" dirty="0"/>
           </a:p>
@@ -2156,467 +902,6 @@
               <a:t>   ·   dan.bachar@campus.technion.ac.il</a:t>
             </a:r>
             <a:endParaRPr lang="en-US" sz="1300" dirty="0"/>
-          </a:p>
-        </p:txBody>
-      </p:sp>
-    </p:spTree>
-  </p:cSld>
-  <p:clrMapOvr>
-    <a:masterClrMapping/>
-  </p:clrMapOvr>
-</p:sld>
-</file>
-
-<file path=ppt/slides/slide10.xml><?xml version="1.0" encoding="utf-8"?>
-<p:sld xmlns:a="http://schemas.openxmlformats.org/drawingml/2006/main" xmlns:r="http://schemas.openxmlformats.org/officeDocument/2006/relationships" xmlns:p="http://schemas.openxmlformats.org/presentationml/2006/main">
-  <p:cSld name="Slide 10">
-    <p:bg>
-      <p:bgPr>
-        <a:solidFill>
-          <a:srgbClr val="16202A"/>
-        </a:solidFill>
-      </p:bgPr>
-    </p:bg>
-    <p:spTree>
-      <p:nvGrpSpPr>
-        <p:cNvPr id="1" name=""/>
-        <p:cNvGrpSpPr/>
-        <p:nvPr/>
-      </p:nvGrpSpPr>
-      <p:grpSpPr>
-        <a:xfrm>
-          <a:off x="0" y="0"/>
-          <a:ext cx="0" cy="0"/>
-          <a:chOff x="0" y="0"/>
-          <a:chExt cx="0" cy="0"/>
-        </a:xfrm>
-      </p:grpSpPr>
-      <p:sp>
-        <p:nvSpPr>
-          <p:cNvPr id="2" name="Text 0"/>
-          <p:cNvSpPr/>
-          <p:nvPr/>
-        </p:nvSpPr>
-        <p:spPr>
-          <a:xfrm>
-            <a:off x="685800" y="502920"/>
-            <a:ext cx="10789920" cy="274320"/>
-          </a:xfrm>
-          <a:prstGeom prst="rect">
-            <a:avLst/>
-          </a:prstGeom>
-          <a:noFill/>
-          <a:ln/>
-        </p:spPr>
-        <p:txBody>
-          <a:bodyPr wrap="square" lIns="0" tIns="0" rIns="0" bIns="0" rtlCol="0" anchor="ctr"/>
-          <a:lstStyle/>
-          <a:p>
-            <a:pPr indent="0" marL="0">
-              <a:buNone/>
-            </a:pPr>
-            <a:r>
-              <a:rPr lang="en-US" sz="1100" b="1" spc="200" kern="0" dirty="0">
-                <a:solidFill>
-                  <a:srgbClr val="0E7C86"/>
-                </a:solidFill>
-                <a:latin typeface="Calibri" pitchFamily="34" charset="0"/>
-                <a:ea typeface="Calibri" pitchFamily="34" charset="-122"/>
-                <a:cs typeface="Calibri" pitchFamily="34" charset="-120"/>
-              </a:rPr>
-              <a:t>BEFORE THE WORK BEGINS</a:t>
-            </a:r>
-            <a:endParaRPr lang="en-US" sz="1100" dirty="0"/>
-          </a:p>
-        </p:txBody>
-      </p:sp>
-      <p:sp>
-        <p:nvSpPr>
-          <p:cNvPr id="3" name="Text 1"/>
-          <p:cNvSpPr/>
-          <p:nvPr/>
-        </p:nvSpPr>
-        <p:spPr>
-          <a:xfrm>
-            <a:off x="685800" y="804672"/>
-            <a:ext cx="10789920" cy="822960"/>
-          </a:xfrm>
-          <a:prstGeom prst="rect">
-            <a:avLst/>
-          </a:prstGeom>
-          <a:noFill/>
-          <a:ln/>
-        </p:spPr>
-        <p:txBody>
-          <a:bodyPr wrap="square" lIns="0" tIns="0" rIns="0" bIns="0" rtlCol="0" anchor="ctr"/>
-          <a:lstStyle/>
-          <a:p>
-            <a:pPr indent="0" marL="0">
-              <a:buNone/>
-            </a:pPr>
-            <a:r>
-              <a:rPr lang="en-US" sz="3600" b="1" dirty="0">
-                <a:solidFill>
-                  <a:srgbClr val="FFFFFF"/>
-                </a:solidFill>
-                <a:latin typeface="Cambria" pitchFamily="34" charset="0"/>
-                <a:ea typeface="Cambria" pitchFamily="34" charset="-122"/>
-                <a:cs typeface="Cambria" pitchFamily="34" charset="-120"/>
-              </a:rPr>
-              <a:t>Open decisions</a:t>
-            </a:r>
-            <a:endParaRPr lang="en-US" sz="3600" dirty="0"/>
-          </a:p>
-        </p:txBody>
-      </p:sp>
-      <p:sp>
-        <p:nvSpPr>
-          <p:cNvPr id="4" name="Text 2"/>
-          <p:cNvSpPr/>
-          <p:nvPr/>
-        </p:nvSpPr>
-        <p:spPr>
-          <a:xfrm>
-            <a:off x="685800" y="2286000"/>
-            <a:ext cx="5212080" cy="365760"/>
-          </a:xfrm>
-          <a:prstGeom prst="rect">
-            <a:avLst/>
-          </a:prstGeom>
-          <a:noFill/>
-          <a:ln/>
-        </p:spPr>
-        <p:txBody>
-          <a:bodyPr wrap="square" lIns="0" tIns="0" rIns="0" bIns="0" rtlCol="0" anchor="ctr"/>
-          <a:lstStyle/>
-          <a:p>
-            <a:pPr indent="0" marL="0">
-              <a:buNone/>
-            </a:pPr>
-            <a:r>
-              <a:rPr lang="en-US" sz="1900" b="1" dirty="0">
-                <a:solidFill>
-                  <a:srgbClr val="0E7C86"/>
-                </a:solidFill>
-                <a:latin typeface="Cambria" pitchFamily="34" charset="0"/>
-                <a:ea typeface="Cambria" pitchFamily="34" charset="-122"/>
-                <a:cs typeface="Cambria" pitchFamily="34" charset="-120"/>
-              </a:rPr>
-              <a:t>Primary claim</a:t>
-            </a:r>
-            <a:endParaRPr lang="en-US" sz="1900" dirty="0"/>
-          </a:p>
-        </p:txBody>
-      </p:sp>
-      <p:sp>
-        <p:nvSpPr>
-          <p:cNvPr id="5" name="Text 3"/>
-          <p:cNvSpPr/>
-          <p:nvPr/>
-        </p:nvSpPr>
-        <p:spPr>
-          <a:xfrm>
-            <a:off x="685800" y="2724912"/>
-            <a:ext cx="5212080" cy="457200"/>
-          </a:xfrm>
-          <a:prstGeom prst="rect">
-            <a:avLst/>
-          </a:prstGeom>
-          <a:noFill/>
-          <a:ln/>
-        </p:spPr>
-        <p:txBody>
-          <a:bodyPr wrap="square" lIns="0" tIns="0" rIns="0" bIns="0" rtlCol="0" anchor="ctr"/>
-          <a:lstStyle/>
-          <a:p>
-            <a:pPr indent="0" marL="0">
-              <a:buNone/>
-            </a:pPr>
-            <a:r>
-              <a:rPr lang="en-US" sz="1500" dirty="0">
-                <a:solidFill>
-                  <a:srgbClr val="B7C4CC"/>
-                </a:solidFill>
-                <a:latin typeface="Calibri" pitchFamily="34" charset="0"/>
-                <a:ea typeface="Calibri" pitchFamily="34" charset="-122"/>
-                <a:cs typeface="Calibri" pitchFamily="34" charset="-120"/>
-              </a:rPr>
-              <a:t>The algorithm or the measurement, not both.</a:t>
-            </a:r>
-            <a:endParaRPr lang="en-US" sz="1500" dirty="0"/>
-          </a:p>
-        </p:txBody>
-      </p:sp>
-      <p:sp>
-        <p:nvSpPr>
-          <p:cNvPr id="6" name="Text 4"/>
-          <p:cNvSpPr/>
-          <p:nvPr/>
-        </p:nvSpPr>
-        <p:spPr>
-          <a:xfrm>
-            <a:off x="6263640" y="2286000"/>
-            <a:ext cx="5212080" cy="365760"/>
-          </a:xfrm>
-          <a:prstGeom prst="rect">
-            <a:avLst/>
-          </a:prstGeom>
-          <a:noFill/>
-          <a:ln/>
-        </p:spPr>
-        <p:txBody>
-          <a:bodyPr wrap="square" lIns="0" tIns="0" rIns="0" bIns="0" rtlCol="0" anchor="ctr"/>
-          <a:lstStyle/>
-          <a:p>
-            <a:pPr indent="0" marL="0">
-              <a:buNone/>
-            </a:pPr>
-            <a:r>
-              <a:rPr lang="en-US" sz="1900" b="1" dirty="0">
-                <a:solidFill>
-                  <a:srgbClr val="0E7C86"/>
-                </a:solidFill>
-                <a:latin typeface="Cambria" pitchFamily="34" charset="0"/>
-                <a:ea typeface="Cambria" pitchFamily="34" charset="-122"/>
-                <a:cs typeface="Cambria" pitchFamily="34" charset="-120"/>
-              </a:rPr>
-              <a:t>UDX fork</a:t>
-            </a:r>
-            <a:endParaRPr lang="en-US" sz="1900" dirty="0"/>
-          </a:p>
-        </p:txBody>
-      </p:sp>
-      <p:sp>
-        <p:nvSpPr>
-          <p:cNvPr id="7" name="Text 5"/>
-          <p:cNvSpPr/>
-          <p:nvPr/>
-        </p:nvSpPr>
-        <p:spPr>
-          <a:xfrm>
-            <a:off x="6263640" y="2724912"/>
-            <a:ext cx="5212080" cy="457200"/>
-          </a:xfrm>
-          <a:prstGeom prst="rect">
-            <a:avLst/>
-          </a:prstGeom>
-          <a:noFill/>
-          <a:ln/>
-        </p:spPr>
-        <p:txBody>
-          <a:bodyPr wrap="square" lIns="0" tIns="0" rIns="0" bIns="0" rtlCol="0" anchor="ctr"/>
-          <a:lstStyle/>
-          <a:p>
-            <a:pPr indent="0" marL="0">
-              <a:buNone/>
-            </a:pPr>
-            <a:r>
-              <a:rPr lang="en-US" sz="1500" dirty="0">
-                <a:solidFill>
-                  <a:srgbClr val="B7C4CC"/>
-                </a:solidFill>
-                <a:latin typeface="Calibri" pitchFamily="34" charset="0"/>
-                <a:ea typeface="Calibri" pitchFamily="34" charset="-122"/>
-                <a:cs typeface="Calibri" pitchFamily="34" charset="-120"/>
-              </a:rPr>
-              <a:t>The guard cannot see UDX’s own sends. Patch the fork, or report the residual.</a:t>
-            </a:r>
-            <a:endParaRPr lang="en-US" sz="1500" dirty="0"/>
-          </a:p>
-        </p:txBody>
-      </p:sp>
-      <p:sp>
-        <p:nvSpPr>
-          <p:cNvPr id="8" name="Text 6"/>
-          <p:cNvSpPr/>
-          <p:nvPr/>
-        </p:nvSpPr>
-        <p:spPr>
-          <a:xfrm>
-            <a:off x="685800" y="3749040"/>
-            <a:ext cx="5212080" cy="365760"/>
-          </a:xfrm>
-          <a:prstGeom prst="rect">
-            <a:avLst/>
-          </a:prstGeom>
-          <a:noFill/>
-          <a:ln/>
-        </p:spPr>
-        <p:txBody>
-          <a:bodyPr wrap="square" lIns="0" tIns="0" rIns="0" bIns="0" rtlCol="0" anchor="ctr"/>
-          <a:lstStyle/>
-          <a:p>
-            <a:pPr indent="0" marL="0">
-              <a:buNone/>
-            </a:pPr>
-            <a:r>
-              <a:rPr lang="en-US" sz="1900" b="1" dirty="0">
-                <a:solidFill>
-                  <a:srgbClr val="0E7C86"/>
-                </a:solidFill>
-                <a:latin typeface="Cambria" pitchFamily="34" charset="0"/>
-                <a:ea typeface="Cambria" pitchFamily="34" charset="-122"/>
-                <a:cs typeface="Cambria" pitchFamily="34" charset="-120"/>
-              </a:rPr>
-              <a:t>Inbound UDP</a:t>
-            </a:r>
-            <a:endParaRPr lang="en-US" sz="1900" dirty="0"/>
-          </a:p>
-        </p:txBody>
-      </p:sp>
-      <p:sp>
-        <p:nvSpPr>
-          <p:cNvPr id="9" name="Text 7"/>
-          <p:cNvSpPr/>
-          <p:nvPr/>
-        </p:nvSpPr>
-        <p:spPr>
-          <a:xfrm>
-            <a:off x="685800" y="4187952"/>
-            <a:ext cx="5212080" cy="457200"/>
-          </a:xfrm>
-          <a:prstGeom prst="rect">
-            <a:avLst/>
-          </a:prstGeom>
-          <a:noFill/>
-          <a:ln/>
-        </p:spPr>
-        <p:txBody>
-          <a:bodyPr wrap="square" lIns="0" tIns="0" rIns="0" bIns="0" rtlCol="0" anchor="ctr"/>
-          <a:lstStyle/>
-          <a:p>
-            <a:pPr indent="0" marL="0">
-              <a:buNone/>
-            </a:pPr>
-            <a:r>
-              <a:rPr lang="en-US" sz="1500" dirty="0">
-                <a:solidFill>
-                  <a:srgbClr val="B7C4CC"/>
-                </a:solidFill>
-                <a:latin typeface="Calibri" pitchFamily="34" charset="0"/>
-                <a:ea typeface="Calibri" pitchFamily="34" charset="-122"/>
-                <a:cs typeface="Calibri" pitchFamily="34" charset="-120"/>
-              </a:rPr>
-              <a:t>May the host receive unsolicited datagrams on two addresses, two ports?</a:t>
-            </a:r>
-            <a:endParaRPr lang="en-US" sz="1500" dirty="0"/>
-          </a:p>
-        </p:txBody>
-      </p:sp>
-      <p:sp>
-        <p:nvSpPr>
-          <p:cNvPr id="10" name="Text 8"/>
-          <p:cNvSpPr/>
-          <p:nvPr/>
-        </p:nvSpPr>
-        <p:spPr>
-          <a:xfrm>
-            <a:off x="6263640" y="3749040"/>
-            <a:ext cx="5212080" cy="365760"/>
-          </a:xfrm>
-          <a:prstGeom prst="rect">
-            <a:avLst/>
-          </a:prstGeom>
-          <a:noFill/>
-          <a:ln/>
-        </p:spPr>
-        <p:txBody>
-          <a:bodyPr wrap="square" lIns="0" tIns="0" rIns="0" bIns="0" rtlCol="0" anchor="ctr"/>
-          <a:lstStyle/>
-          <a:p>
-            <a:pPr indent="0" marL="0">
-              <a:buNone/>
-            </a:pPr>
-            <a:r>
-              <a:rPr lang="en-US" sz="1900" b="1" dirty="0">
-                <a:solidFill>
-                  <a:srgbClr val="0E7C86"/>
-                </a:solidFill>
-                <a:latin typeface="Cambria" pitchFamily="34" charset="0"/>
-                <a:ea typeface="Cambria" pitchFamily="34" charset="-122"/>
-                <a:cs typeface="Cambria" pitchFamily="34" charset="-120"/>
-              </a:rPr>
-              <a:t>Testbed budget</a:t>
-            </a:r>
-            <a:endParaRPr lang="en-US" sz="1900" dirty="0"/>
-          </a:p>
-        </p:txBody>
-      </p:sp>
-      <p:sp>
-        <p:nvSpPr>
-          <p:cNvPr id="11" name="Text 9"/>
-          <p:cNvSpPr/>
-          <p:nvPr/>
-        </p:nvSpPr>
-        <p:spPr>
-          <a:xfrm>
-            <a:off x="6263640" y="4187952"/>
-            <a:ext cx="5212080" cy="457200"/>
-          </a:xfrm>
-          <a:prstGeom prst="rect">
-            <a:avLst/>
-          </a:prstGeom>
-          <a:noFill/>
-          <a:ln/>
-        </p:spPr>
-        <p:txBody>
-          <a:bodyPr wrap="square" lIns="0" tIns="0" rIns="0" bIns="0" rtlCol="0" anchor="ctr"/>
-          <a:lstStyle/>
-          <a:p>
-            <a:pPr indent="0" marL="0">
-              <a:buNone/>
-            </a:pPr>
-            <a:r>
-              <a:rPr lang="en-US" sz="1500" dirty="0">
-                <a:solidFill>
-                  <a:srgbClr val="B7C4CC"/>
-                </a:solidFill>
-                <a:latin typeface="Calibri" pitchFamily="34" charset="0"/>
-                <a:ea typeface="Calibri" pitchFamily="34" charset="-122"/>
-                <a:cs typeface="Calibri" pitchFamily="34" charset="-120"/>
-              </a:rPr>
-              <a:t>Each SIM covers one carrier, APN and plan.</a:t>
-            </a:r>
-            <a:endParaRPr lang="en-US" sz="1500" dirty="0"/>
-          </a:p>
-        </p:txBody>
-      </p:sp>
-      <p:sp>
-        <p:nvSpPr>
-          <p:cNvPr id="12" name="Text 10"/>
-          <p:cNvSpPr/>
-          <p:nvPr/>
-        </p:nvSpPr>
-        <p:spPr>
-          <a:xfrm>
-            <a:off x="685800" y="5577840"/>
-            <a:ext cx="10789920" cy="365760"/>
-          </a:xfrm>
-          <a:prstGeom prst="rect">
-            <a:avLst/>
-          </a:prstGeom>
-          <a:noFill/>
-          <a:ln/>
-        </p:spPr>
-        <p:txBody>
-          <a:bodyPr wrap="square" lIns="0" tIns="0" rIns="0" bIns="0" rtlCol="0" anchor="ctr"/>
-          <a:lstStyle/>
-          <a:p>
-            <a:pPr indent="0" marL="0">
-              <a:buNone/>
-            </a:pPr>
-            <a:r>
-              <a:rPr lang="en-US" sz="1400" i="1" dirty="0">
-                <a:solidFill>
-                  <a:srgbClr val="6E7F8B"/>
-                </a:solidFill>
-                <a:latin typeface="Calibri" pitchFamily="34" charset="0"/>
-                <a:ea typeface="Calibri" pitchFamily="34" charset="-122"/>
-                <a:cs typeface="Calibri" pitchFamily="34" charset="-120"/>
-              </a:rPr>
-              <a:t>The written brief carries the detail: measurand, threat model, milestones, exit criteria.</a:t>
-            </a:r>
-            <a:endParaRPr lang="en-US" sz="1400" dirty="0"/>
           </a:p>
         </p:txBody>
       </p:sp>
@@ -2678,7 +963,7 @@
                 <a:ea typeface="Calibri" pitchFamily="34" charset="-122"/>
                 <a:cs typeface="Calibri" pitchFamily="34" charset="-120"/>
               </a:rPr>
-              <a:t>IMPLEMENTATION TODAY</a:t>
+              <a:t>WHO CAN FACILITATE</a:t>
             </a:r>
             <a:endParaRPr lang="en-US" sz="1100" dirty="0"/>
           </a:p>
@@ -2717,7 +1002,7 @@
                 <a:ea typeface="Cambria" pitchFamily="34" charset="-122"/>
                 <a:cs typeface="Cambria" pitchFamily="34" charset="-120"/>
               </a:rPr>
-              <a:t>The current IP path</a:t>
+              <a:t>Well-connected devices</a:t>
             </a:r>
             <a:endParaRPr lang="en-US" sz="3600" dirty="0"/>
           </a:p>
@@ -2732,11 +1017,11 @@
         <p:spPr>
           <a:xfrm>
             <a:off x="685800" y="2148840"/>
-            <a:ext cx="1965960" cy="914400"/>
+            <a:ext cx="2423160" cy="1005840"/>
           </a:xfrm>
           <a:prstGeom prst="roundRect">
             <a:avLst>
-              <a:gd name="adj" fmla="val 6000"/>
+              <a:gd name="adj" fmla="val 5455"/>
             </a:avLst>
           </a:prstGeom>
           <a:solidFill>
@@ -2759,7 +1044,7 @@
         <p:spPr>
           <a:xfrm>
             <a:off x="795528" y="2148840"/>
-            <a:ext cx="1746504" cy="914400"/>
+            <a:ext cx="2203704" cy="1005840"/>
           </a:xfrm>
           <a:prstGeom prst="rect">
             <a:avLst/>
@@ -2783,7 +1068,7 @@
                 <a:ea typeface="Cambria" pitchFamily="34" charset="-122"/>
                 <a:cs typeface="Cambria" pitchFamily="34" charset="-120"/>
               </a:rPr>
-              <a:t>Learn address</a:t>
+              <a:t>Register address with a well-connected friend</a:t>
             </a:r>
             <a:endParaRPr lang="en-US" sz="1400" dirty="0"/>
           </a:p>
@@ -2797,8 +1082,8 @@
         </p:nvSpPr>
         <p:spPr>
           <a:xfrm>
-            <a:off x="2651760" y="2148840"/>
-            <a:ext cx="256032" cy="914400"/>
+            <a:off x="3108960" y="2148840"/>
+            <a:ext cx="365760" cy="1005840"/>
           </a:xfrm>
           <a:prstGeom prst="rect">
             <a:avLst/>
@@ -2836,12 +1121,12 @@
         </p:nvSpPr>
         <p:spPr>
           <a:xfrm>
-            <a:off x="2907792" y="2148840"/>
-            <a:ext cx="1965960" cy="914400"/>
+            <a:off x="3474720" y="2148840"/>
+            <a:ext cx="2423160" cy="1005840"/>
           </a:xfrm>
           <a:prstGeom prst="roundRect">
             <a:avLst>
-              <a:gd name="adj" fmla="val 6000"/>
+              <a:gd name="adj" fmla="val 5455"/>
             </a:avLst>
           </a:prstGeom>
           <a:solidFill>
@@ -2863,8 +1148,8 @@
         </p:nvSpPr>
         <p:spPr>
           <a:xfrm>
-            <a:off x="3017520" y="2148840"/>
-            <a:ext cx="1746504" cy="914400"/>
+            <a:off x="3584448" y="2148840"/>
+            <a:ext cx="2203704" cy="1005840"/>
           </a:xfrm>
           <a:prstGeom prst="rect">
             <a:avLst/>
@@ -2888,7 +1173,7 @@
                 <a:ea typeface="Cambria" pitchFamily="34" charset="-122"/>
                 <a:cs typeface="Cambria" pitchFamily="34" charset="-120"/>
               </a:rPr>
-              <a:t>Announce</a:t>
+              <a:t>Ask it for the other peer’s address</a:t>
             </a:r>
             <a:endParaRPr lang="en-US" sz="1400" dirty="0"/>
           </a:p>
@@ -2902,8 +1187,8 @@
         </p:nvSpPr>
         <p:spPr>
           <a:xfrm>
-            <a:off x="4873752" y="2148840"/>
-            <a:ext cx="256032" cy="914400"/>
+            <a:off x="5897880" y="2148840"/>
+            <a:ext cx="365760" cy="1005840"/>
           </a:xfrm>
           <a:prstGeom prst="rect">
             <a:avLst/>
@@ -2941,12 +1226,12 @@
         </p:nvSpPr>
         <p:spPr>
           <a:xfrm>
-            <a:off x="5129784" y="2148840"/>
-            <a:ext cx="1965960" cy="914400"/>
+            <a:off x="6263640" y="2148840"/>
+            <a:ext cx="2423160" cy="1005840"/>
           </a:xfrm>
           <a:prstGeom prst="roundRect">
             <a:avLst>
-              <a:gd name="adj" fmla="val 6000"/>
+              <a:gd name="adj" fmla="val 5455"/>
             </a:avLst>
           </a:prstGeom>
           <a:solidFill>
@@ -2968,8 +1253,8 @@
         </p:nvSpPr>
         <p:spPr>
           <a:xfrm>
-            <a:off x="5239512" y="2148840"/>
-            <a:ext cx="1746504" cy="914400"/>
+            <a:off x="6373368" y="2148840"/>
+            <a:ext cx="2203704" cy="1005840"/>
           </a:xfrm>
           <a:prstGeom prst="rect">
             <a:avLst/>
@@ -2993,7 +1278,7 @@
                 <a:ea typeface="Cambria" pitchFamily="34" charset="-122"/>
                 <a:cs typeface="Cambria" pitchFamily="34" charset="-120"/>
               </a:rPr>
-              <a:t>Pick one candidate</a:t>
+              <a:t>It tells both sides to punch at once</a:t>
             </a:r>
             <a:endParaRPr lang="en-US" sz="1400" dirty="0"/>
           </a:p>
@@ -3007,8 +1292,8 @@
         </p:nvSpPr>
         <p:spPr>
           <a:xfrm>
-            <a:off x="7095744" y="2148840"/>
-            <a:ext cx="256032" cy="914400"/>
+            <a:off x="8686800" y="2148840"/>
+            <a:ext cx="365760" cy="1005840"/>
           </a:xfrm>
           <a:prstGeom prst="rect">
             <a:avLst/>
@@ -3046,12 +1331,12 @@
         </p:nvSpPr>
         <p:spPr>
           <a:xfrm>
-            <a:off x="7351776" y="2148840"/>
-            <a:ext cx="1965960" cy="914400"/>
+            <a:off x="9052560" y="2148840"/>
+            <a:ext cx="2423160" cy="1005840"/>
           </a:xfrm>
           <a:prstGeom prst="roundRect">
             <a:avLst>
-              <a:gd name="adj" fmla="val 6000"/>
+              <a:gd name="adj" fmla="val 5455"/>
             </a:avLst>
           </a:prstGeom>
           <a:solidFill>
@@ -3073,8 +1358,8 @@
         </p:nvSpPr>
         <p:spPr>
           <a:xfrm>
-            <a:off x="7461504" y="2148840"/>
-            <a:ext cx="1746504" cy="914400"/>
+            <a:off x="9162288" y="2148840"/>
+            <a:ext cx="2203704" cy="1005840"/>
           </a:xfrm>
           <a:prstGeom prst="rect">
             <a:avLst/>
@@ -3098,7 +1383,7 @@
                 <a:ea typeface="Cambria" pitchFamily="34" charset="-122"/>
                 <a:cs typeface="Cambria" pitchFamily="34" charset="-120"/>
               </a:rPr>
-              <a:t>Punch</a:t>
+              <a:t>The peers talk directly</a:t>
             </a:r>
             <a:endParaRPr lang="en-US" sz="1400" dirty="0"/>
           </a:p>
@@ -3106,112 +1391,7 @@
       </p:sp>
       <p:sp>
         <p:nvSpPr>
-          <p:cNvPr id="15" name="Text 13"/>
-          <p:cNvSpPr/>
-          <p:nvPr/>
-        </p:nvSpPr>
-        <p:spPr>
-          <a:xfrm>
-            <a:off x="9317736" y="2148840"/>
-            <a:ext cx="256032" cy="914400"/>
-          </a:xfrm>
-          <a:prstGeom prst="rect">
-            <a:avLst/>
-          </a:prstGeom>
-          <a:noFill/>
-          <a:ln/>
-        </p:spPr>
-        <p:txBody>
-          <a:bodyPr wrap="square" lIns="0" tIns="0" rIns="0" bIns="0" rtlCol="0" anchor="ctr"/>
-          <a:lstStyle/>
-          <a:p>
-            <a:pPr algn="ctr" indent="0" marL="0">
-              <a:buNone/>
-            </a:pPr>
-            <a:r>
-              <a:rPr lang="en-US" sz="1600" b="1" dirty="0">
-                <a:solidFill>
-                  <a:srgbClr val="6E7F8B"/>
-                </a:solidFill>
-                <a:latin typeface="Calibri" pitchFamily="34" charset="0"/>
-                <a:ea typeface="Calibri" pitchFamily="34" charset="-122"/>
-                <a:cs typeface="Calibri" pitchFamily="34" charset="-120"/>
-              </a:rPr>
-              <a:t>→</a:t>
-            </a:r>
-            <a:endParaRPr lang="en-US" sz="1600" dirty="0"/>
-          </a:p>
-        </p:txBody>
-      </p:sp>
-      <p:sp>
-        <p:nvSpPr>
-          <p:cNvPr id="16" name="Shape 14"/>
-          <p:cNvSpPr/>
-          <p:nvPr/>
-        </p:nvSpPr>
-        <p:spPr>
-          <a:xfrm>
-            <a:off x="9573768" y="2148840"/>
-            <a:ext cx="1965960" cy="914400"/>
-          </a:xfrm>
-          <a:prstGeom prst="roundRect">
-            <a:avLst>
-              <a:gd name="adj" fmla="val 6000"/>
-            </a:avLst>
-          </a:prstGeom>
-          <a:solidFill>
-            <a:srgbClr val="EEF3F4"/>
-          </a:solidFill>
-          <a:ln w="6350">
-            <a:solidFill>
-              <a:srgbClr val="EEF3F4"/>
-            </a:solidFill>
-            <a:prstDash val="solid"/>
-          </a:ln>
-        </p:spPr>
-      </p:sp>
-      <p:sp>
-        <p:nvSpPr>
-          <p:cNvPr id="17" name="Text 15"/>
-          <p:cNvSpPr/>
-          <p:nvPr/>
-        </p:nvSpPr>
-        <p:spPr>
-          <a:xfrm>
-            <a:off x="9683496" y="2148840"/>
-            <a:ext cx="1746504" cy="914400"/>
-          </a:xfrm>
-          <a:prstGeom prst="rect">
-            <a:avLst/>
-          </a:prstGeom>
-          <a:noFill/>
-          <a:ln/>
-        </p:spPr>
-        <p:txBody>
-          <a:bodyPr wrap="square" lIns="0" tIns="0" rIns="0" bIns="0" rtlCol="0" anchor="ctr"/>
-          <a:lstStyle/>
-          <a:p>
-            <a:pPr algn="ctr" indent="0" marL="0">
-              <a:buNone/>
-            </a:pPr>
-            <a:r>
-              <a:rPr lang="en-US" sz="1400" b="1" dirty="0">
-                <a:solidFill>
-                  <a:srgbClr val="16202A"/>
-                </a:solidFill>
-                <a:latin typeface="Cambria" pitchFamily="34" charset="0"/>
-                <a:ea typeface="Cambria" pitchFamily="34" charset="-122"/>
-                <a:cs typeface="Cambria" pitchFamily="34" charset="-120"/>
-              </a:rPr>
-              <a:t>Dial UDX</a:t>
-            </a:r>
-            <a:endParaRPr lang="en-US" sz="1400" dirty="0"/>
-          </a:p>
-        </p:txBody>
-      </p:sp>
-      <p:sp>
-        <p:nvSpPr>
-          <p:cNvPr id="18" name="Shape 16"/>
+          <p:cNvPr id="15" name="Shape 13"/>
           <p:cNvSpPr/>
           <p:nvPr/>
         </p:nvSpPr>
@@ -3236,7 +1416,7 @@
       </p:sp>
       <p:sp>
         <p:nvSpPr>
-          <p:cNvPr id="19" name="Text 17"/>
+          <p:cNvPr id="16" name="Text 14"/>
           <p:cNvSpPr/>
           <p:nvPr/>
         </p:nvSpPr>
@@ -3267,7 +1447,7 @@
                 <a:ea typeface="Calibri" pitchFamily="34" charset="-122"/>
                 <a:cs typeface="Calibri" pitchFamily="34" charset="-120"/>
               </a:rPr>
-              <a:t>We advertise the discovered public IP with our own local port.</a:t>
+              <a:t>Well-connected: has a public address, so anyone can reach it.</a:t>
             </a:r>
             <a:endParaRPr lang="en-US" sz="1700" dirty="0"/>
           </a:p>
@@ -3275,7 +1455,7 @@
       </p:sp>
       <p:sp>
         <p:nvSpPr>
-          <p:cNvPr id="20" name="Shape 18"/>
+          <p:cNvPr id="17" name="Shape 15"/>
           <p:cNvSpPr/>
           <p:nvPr/>
         </p:nvSpPr>
@@ -3300,7 +1480,7 @@
       </p:sp>
       <p:sp>
         <p:nvSpPr>
-          <p:cNvPr id="21" name="Text 19"/>
+          <p:cNvPr id="18" name="Text 16"/>
           <p:cNvSpPr/>
           <p:nvPr/>
         </p:nvSpPr>
@@ -3331,7 +1511,7 @@
                 <a:ea typeface="Calibri" pitchFamily="34" charset="-122"/>
                 <a:cs typeface="Calibri" pitchFamily="34" charset="-120"/>
               </a:rPr>
-              <a:t>One candidate, one attempt, ten-second timeout, no fallback.</a:t>
+              <a:t>It facilitates between mutual friends by passing on addresses, as well as coordinating punching.</a:t>
             </a:r>
             <a:endParaRPr lang="en-US" sz="1700" dirty="0"/>
           </a:p>
@@ -3339,7 +1519,7 @@
       </p:sp>
       <p:sp>
         <p:nvSpPr>
-          <p:cNvPr id="22" name="Shape 20"/>
+          <p:cNvPr id="19" name="Shape 17"/>
           <p:cNvSpPr/>
           <p:nvPr/>
         </p:nvSpPr>
@@ -3364,7 +1544,7 @@
       </p:sp>
       <p:sp>
         <p:nvSpPr>
-          <p:cNvPr id="23" name="Text 21"/>
+          <p:cNvPr id="20" name="Text 18"/>
           <p:cNvSpPr/>
           <p:nvPr/>
         </p:nvSpPr>
@@ -3395,7 +1575,7 @@
                 <a:ea typeface="Calibri" pitchFamily="34" charset="-122"/>
                 <a:cs typeface="Calibri" pitchFamily="34" charset="-120"/>
               </a:rPr>
-              <a:t>No timestamps and no failure reason: neither outcome teaches us anything.</a:t>
+              <a:t>Today simple private address regex decides who qualifies: we replace it with an algorithmic test.</a:t>
             </a:r>
             <a:endParaRPr lang="en-US" sz="1700" dirty="0"/>
           </a:p>
@@ -3513,7 +1693,7 @@
         <p:spPr>
           <a:xfrm>
             <a:off x="685800" y="1965960"/>
-            <a:ext cx="3474720" cy="274320"/>
+            <a:ext cx="2377440" cy="274320"/>
           </a:xfrm>
           <a:prstGeom prst="rect">
             <a:avLst/>
@@ -3551,8 +1731,8 @@
         </p:nvSpPr>
         <p:spPr>
           <a:xfrm>
-            <a:off x="4343400" y="1965960"/>
-            <a:ext cx="2468880" cy="274320"/>
+            <a:off x="3200400" y="1965960"/>
+            <a:ext cx="1417320" cy="274320"/>
           </a:xfrm>
           <a:prstGeom prst="rect">
             <a:avLst/>
@@ -3590,8 +1770,8 @@
         </p:nvSpPr>
         <p:spPr>
           <a:xfrm>
-            <a:off x="6995160" y="1965960"/>
-            <a:ext cx="4480560" cy="274320"/>
+            <a:off x="4754880" y="1965960"/>
+            <a:ext cx="2788920" cy="274320"/>
           </a:xfrm>
           <a:prstGeom prst="rect">
             <a:avLst/>
@@ -3623,18 +1803,96 @@
       </p:sp>
       <p:sp>
         <p:nvSpPr>
-          <p:cNvPr id="7" name="Shape 5"/>
-          <p:cNvSpPr/>
-          <p:nvPr/>
-        </p:nvSpPr>
-        <p:spPr>
-          <a:xfrm>
-            <a:off x="548640" y="2276856"/>
-            <a:ext cx="11064240" cy="768096"/>
+          <p:cNvPr id="7" name="Text 5"/>
+          <p:cNvSpPr/>
+          <p:nvPr/>
+        </p:nvSpPr>
+        <p:spPr>
+          <a:xfrm>
+            <a:off x="7726680" y="1965960"/>
+            <a:ext cx="1783080" cy="274320"/>
+          </a:xfrm>
+          <a:prstGeom prst="rect">
+            <a:avLst/>
+          </a:prstGeom>
+          <a:noFill/>
+          <a:ln/>
+        </p:spPr>
+        <p:txBody>
+          <a:bodyPr wrap="square" lIns="0" tIns="0" rIns="0" bIns="0" rtlCol="0" anchor="ctr"/>
+          <a:lstStyle/>
+          <a:p>
+            <a:pPr indent="0" marL="0">
+              <a:buNone/>
+            </a:pPr>
+            <a:r>
+              <a:rPr lang="en-US" sz="1000" b="1" spc="150" kern="0" dirty="0">
+                <a:solidFill>
+                  <a:srgbClr val="6E7F8B"/>
+                </a:solidFill>
+                <a:latin typeface="Calibri" pitchFamily="34" charset="0"/>
+                <a:ea typeface="Calibri" pitchFamily="34" charset="-122"/>
+                <a:cs typeface="Calibri" pitchFamily="34" charset="-120"/>
+              </a:rPr>
+              <a:t>AUTONAT</a:t>
+            </a:r>
+            <a:endParaRPr lang="en-US" sz="1000" dirty="0"/>
+          </a:p>
+        </p:txBody>
+      </p:sp>
+      <p:sp>
+        <p:nvSpPr>
+          <p:cNvPr id="8" name="Text 6"/>
+          <p:cNvSpPr/>
+          <p:nvPr/>
+        </p:nvSpPr>
+        <p:spPr>
+          <a:xfrm>
+            <a:off x="9646920" y="1965960"/>
+            <a:ext cx="1828800" cy="274320"/>
+          </a:xfrm>
+          <a:prstGeom prst="rect">
+            <a:avLst/>
+          </a:prstGeom>
+          <a:noFill/>
+          <a:ln/>
+        </p:spPr>
+        <p:txBody>
+          <a:bodyPr wrap="square" lIns="0" tIns="0" rIns="0" bIns="0" rtlCol="0" anchor="ctr"/>
+          <a:lstStyle/>
+          <a:p>
+            <a:pPr indent="0" marL="0">
+              <a:buNone/>
+            </a:pPr>
+            <a:r>
+              <a:rPr lang="en-US" sz="1000" b="1" spc="150" kern="0" dirty="0">
+                <a:solidFill>
+                  <a:srgbClr val="6E7F8B"/>
+                </a:solidFill>
+                <a:latin typeface="Calibri" pitchFamily="34" charset="0"/>
+                <a:ea typeface="Calibri" pitchFamily="34" charset="-122"/>
+                <a:cs typeface="Calibri" pitchFamily="34" charset="-120"/>
+              </a:rPr>
+              <a:t>REACHABILITY</a:t>
+            </a:r>
+            <a:endParaRPr lang="en-US" sz="1000" dirty="0"/>
+          </a:p>
+        </p:txBody>
+      </p:sp>
+      <p:sp>
+        <p:nvSpPr>
+          <p:cNvPr id="9" name="Shape 7"/>
+          <p:cNvSpPr/>
+          <p:nvPr/>
+        </p:nvSpPr>
+        <p:spPr>
+          <a:xfrm>
+            <a:off x="548640" y="2286000"/>
+            <a:ext cx="11064240" cy="676656"/>
           </a:xfrm>
           <a:prstGeom prst="roundRect">
             <a:avLst>
-              <a:gd name="adj" fmla="val 7143"/>
+              <a:gd name="adj" fmla="val 8108"/>
             </a:avLst>
           </a:prstGeom>
           <a:solidFill>
@@ -3650,30 +1908,30 @@
       </p:sp>
       <p:sp>
         <p:nvSpPr>
-          <p:cNvPr id="8" name="Text 6"/>
+          <p:cNvPr id="10" name="Text 8"/>
           <p:cNvSpPr/>
           <p:nvPr/>
         </p:nvSpPr>
         <p:spPr>
           <a:xfrm>
             <a:off x="685800" y="2331720"/>
-            <a:ext cx="3474720" cy="658368"/>
-          </a:xfrm>
-          <a:prstGeom prst="rect">
-            <a:avLst/>
-          </a:prstGeom>
-          <a:noFill/>
-          <a:ln/>
-        </p:spPr>
-        <p:txBody>
-          <a:bodyPr wrap="square" lIns="0" tIns="0" rIns="0" bIns="0" rtlCol="0" anchor="ctr"/>
-          <a:lstStyle/>
-          <a:p>
-            <a:pPr indent="0" marL="0">
-              <a:buNone/>
-            </a:pPr>
-            <a:r>
-              <a:rPr lang="en-US" sz="1500" b="1" dirty="0">
+            <a:ext cx="2377440" cy="585216"/>
+          </a:xfrm>
+          <a:prstGeom prst="rect">
+            <a:avLst/>
+          </a:prstGeom>
+          <a:noFill/>
+          <a:ln/>
+        </p:spPr>
+        <p:txBody>
+          <a:bodyPr wrap="square" lIns="0" tIns="0" rIns="0" bIns="0" rtlCol="0" anchor="ctr"/>
+          <a:lstStyle/>
+          <a:p>
+            <a:pPr indent="0" marL="0">
+              <a:buNone/>
+            </a:pPr>
+            <a:r>
+              <a:rPr lang="en-US" sz="1300" b="1" dirty="0">
                 <a:solidFill>
                   <a:srgbClr val="0E7C86"/>
                 </a:solidFill>
@@ -3683,36 +1941,14 @@
               </a:rPr>
               <a:t>Endpoint-independent</a:t>
             </a:r>
-            <a:endParaRPr lang="en-US" sz="1500" dirty="0"/>
-          </a:p>
-        </p:txBody>
-      </p:sp>
-      <p:sp>
-        <p:nvSpPr>
-          <p:cNvPr id="9" name="Text 7"/>
-          <p:cNvSpPr/>
-          <p:nvPr/>
-        </p:nvSpPr>
-        <p:spPr>
-          <a:xfrm>
-            <a:off x="4343400" y="2331720"/>
-            <a:ext cx="2468880" cy="658368"/>
-          </a:xfrm>
-          <a:prstGeom prst="rect">
-            <a:avLst/>
-          </a:prstGeom>
-          <a:noFill/>
-          <a:ln/>
-        </p:spPr>
-        <p:txBody>
-          <a:bodyPr wrap="square" lIns="0" tIns="0" rIns="0" bIns="0" rtlCol="0" anchor="ctr"/>
-          <a:lstStyle/>
-          <a:p>
-            <a:pPr indent="0" marL="0">
-              <a:buNone/>
-            </a:pPr>
-            <a:r>
-              <a:rPr lang="en-US" sz="1300" i="1" dirty="0">
+            <a:endParaRPr lang="en-US" sz="1300" dirty="0"/>
+          </a:p>
+          <a:p>
+            <a:pPr indent="0" marL="0">
+              <a:buNone/>
+            </a:pPr>
+            <a:r>
+              <a:rPr lang="en-US" sz="1100" i="1" dirty="0">
                 <a:solidFill>
                   <a:srgbClr val="6E7F8B"/>
                 </a:solidFill>
@@ -3720,7 +1956,7 @@
                 <a:ea typeface="Calibri" pitchFamily="34" charset="-122"/>
                 <a:cs typeface="Calibri" pitchFamily="34" charset="-120"/>
               </a:rPr>
-              <a:t>most home routers</a:t>
+              <a:t>formerly: cone</a:t>
             </a:r>
             <a:endParaRPr lang="en-US" sz="1300" dirty="0"/>
           </a:p>
@@ -3728,30 +1964,69 @@
       </p:sp>
       <p:sp>
         <p:nvSpPr>
-          <p:cNvPr id="10" name="Text 8"/>
-          <p:cNvSpPr/>
-          <p:nvPr/>
-        </p:nvSpPr>
-        <p:spPr>
-          <a:xfrm>
-            <a:off x="6995160" y="2331720"/>
-            <a:ext cx="4480560" cy="658368"/>
-          </a:xfrm>
-          <a:prstGeom prst="rect">
-            <a:avLst/>
-          </a:prstGeom>
-          <a:noFill/>
-          <a:ln/>
-        </p:spPr>
-        <p:txBody>
-          <a:bodyPr wrap="square" lIns="0" tIns="0" rIns="0" bIns="0" rtlCol="0" anchor="ctr"/>
-          <a:lstStyle/>
-          <a:p>
-            <a:pPr indent="0" marL="0">
-              <a:buNone/>
-            </a:pPr>
-            <a:r>
-              <a:rPr lang="en-US" sz="1450" dirty="0">
+          <p:cNvPr id="11" name="Text 9"/>
+          <p:cNvSpPr/>
+          <p:nvPr/>
+        </p:nvSpPr>
+        <p:spPr>
+          <a:xfrm>
+            <a:off x="3200400" y="2331720"/>
+            <a:ext cx="1417320" cy="585216"/>
+          </a:xfrm>
+          <a:prstGeom prst="rect">
+            <a:avLst/>
+          </a:prstGeom>
+          <a:noFill/>
+          <a:ln/>
+        </p:spPr>
+        <p:txBody>
+          <a:bodyPr wrap="square" lIns="0" tIns="0" rIns="0" bIns="0" rtlCol="0" anchor="ctr"/>
+          <a:lstStyle/>
+          <a:p>
+            <a:pPr indent="0" marL="0">
+              <a:buNone/>
+            </a:pPr>
+            <a:r>
+              <a:rPr lang="en-US" sz="1200" i="1" dirty="0">
+                <a:solidFill>
+                  <a:srgbClr val="6E7F8B"/>
+                </a:solidFill>
+                <a:latin typeface="Calibri" pitchFamily="34" charset="0"/>
+                <a:ea typeface="Calibri" pitchFamily="34" charset="-122"/>
+                <a:cs typeface="Calibri" pitchFamily="34" charset="-120"/>
+              </a:rPr>
+              <a:t>home routers</a:t>
+            </a:r>
+            <a:endParaRPr lang="en-US" sz="1200" dirty="0"/>
+          </a:p>
+        </p:txBody>
+      </p:sp>
+      <p:sp>
+        <p:nvSpPr>
+          <p:cNvPr id="12" name="Text 10"/>
+          <p:cNvSpPr/>
+          <p:nvPr/>
+        </p:nvSpPr>
+        <p:spPr>
+          <a:xfrm>
+            <a:off x="4754880" y="2331720"/>
+            <a:ext cx="2788920" cy="585216"/>
+          </a:xfrm>
+          <a:prstGeom prst="rect">
+            <a:avLst/>
+          </a:prstGeom>
+          <a:noFill/>
+          <a:ln/>
+        </p:spPr>
+        <p:txBody>
+          <a:bodyPr wrap="square" lIns="0" tIns="0" rIns="0" bIns="0" rtlCol="0" anchor="ctr"/>
+          <a:lstStyle/>
+          <a:p>
+            <a:pPr indent="0" marL="0">
+              <a:buNone/>
+            </a:pPr>
+            <a:r>
+              <a:rPr lang="en-US" sz="1200" dirty="0">
                 <a:solidFill>
                   <a:srgbClr val="3E4C57"/>
                 </a:solidFill>
@@ -3761,36 +2036,114 @@
               </a:rPr>
               <a:t>One external port for every destination. Punching works.</a:t>
             </a:r>
-            <a:endParaRPr lang="en-US" sz="1450" dirty="0"/>
-          </a:p>
-        </p:txBody>
-      </p:sp>
-      <p:sp>
-        <p:nvSpPr>
-          <p:cNvPr id="11" name="Text 9"/>
-          <p:cNvSpPr/>
-          <p:nvPr/>
-        </p:nvSpPr>
-        <p:spPr>
-          <a:xfrm>
-            <a:off x="685800" y="3172968"/>
-            <a:ext cx="3474720" cy="658368"/>
-          </a:xfrm>
-          <a:prstGeom prst="rect">
-            <a:avLst/>
-          </a:prstGeom>
-          <a:noFill/>
-          <a:ln/>
-        </p:spPr>
-        <p:txBody>
-          <a:bodyPr wrap="square" lIns="0" tIns="0" rIns="0" bIns="0" rtlCol="0" anchor="ctr"/>
-          <a:lstStyle/>
-          <a:p>
-            <a:pPr indent="0" marL="0">
-              <a:buNone/>
-            </a:pPr>
-            <a:r>
-              <a:rPr lang="en-US" sz="1500" b="1" dirty="0">
+            <a:endParaRPr lang="en-US" sz="1200" dirty="0"/>
+          </a:p>
+        </p:txBody>
+      </p:sp>
+      <p:sp>
+        <p:nvSpPr>
+          <p:cNvPr id="13" name="Text 11"/>
+          <p:cNvSpPr/>
+          <p:nvPr/>
+        </p:nvSpPr>
+        <p:spPr>
+          <a:xfrm>
+            <a:off x="7726680" y="2331720"/>
+            <a:ext cx="1783080" cy="585216"/>
+          </a:xfrm>
+          <a:prstGeom prst="rect">
+            <a:avLst/>
+          </a:prstGeom>
+          <a:noFill/>
+          <a:ln/>
+        </p:spPr>
+        <p:txBody>
+          <a:bodyPr wrap="square" lIns="0" tIns="0" rIns="0" bIns="0" rtlCol="0" anchor="ctr"/>
+          <a:lstStyle/>
+          <a:p>
+            <a:pPr indent="0" marL="0">
+              <a:buNone/>
+            </a:pPr>
+            <a:r>
+              <a:rPr lang="en-US" sz="1100" b="1" dirty="0">
+                <a:solidFill>
+                  <a:srgbClr val="16202A"/>
+                </a:solidFill>
+                <a:latin typeface="Courier New" pitchFamily="34" charset="0"/>
+                <a:ea typeface="Courier New" pitchFamily="34" charset="-122"/>
+                <a:cs typeface="Courier New" pitchFamily="34" charset="-120"/>
+              </a:rPr>
+              <a:t>EndpointIndependent</a:t>
+            </a:r>
+            <a:endParaRPr lang="en-US" sz="1100" dirty="0"/>
+          </a:p>
+        </p:txBody>
+      </p:sp>
+      <p:sp>
+        <p:nvSpPr>
+          <p:cNvPr id="14" name="Text 12"/>
+          <p:cNvSpPr/>
+          <p:nvPr/>
+        </p:nvSpPr>
+        <p:spPr>
+          <a:xfrm>
+            <a:off x="9646920" y="2331720"/>
+            <a:ext cx="1828800" cy="585216"/>
+          </a:xfrm>
+          <a:prstGeom prst="rect">
+            <a:avLst/>
+          </a:prstGeom>
+          <a:noFill/>
+          <a:ln/>
+        </p:spPr>
+        <p:txBody>
+          <a:bodyPr wrap="square" lIns="0" tIns="0" rIns="0" bIns="0" rtlCol="0" anchor="ctr"/>
+          <a:lstStyle/>
+          <a:p>
+            <a:pPr indent="0" marL="0">
+              <a:buNone/>
+            </a:pPr>
+            <a:r>
+              <a:rPr lang="en-US" sz="1200" b="1" dirty="0">
+                <a:solidFill>
+                  <a:srgbClr val="16202A"/>
+                </a:solidFill>
+                <a:latin typeface="Calibri" pitchFamily="34" charset="0"/>
+                <a:ea typeface="Calibri" pitchFamily="34" charset="-122"/>
+                <a:cs typeface="Calibri" pitchFamily="34" charset="-120"/>
+              </a:rPr>
+              <a:t>Public if filtering is open, else Private</a:t>
+            </a:r>
+            <a:endParaRPr lang="en-US" sz="1200" dirty="0"/>
+          </a:p>
+        </p:txBody>
+      </p:sp>
+      <p:sp>
+        <p:nvSpPr>
+          <p:cNvPr id="15" name="Text 13"/>
+          <p:cNvSpPr/>
+          <p:nvPr/>
+        </p:nvSpPr>
+        <p:spPr>
+          <a:xfrm>
+            <a:off x="685800" y="3063240"/>
+            <a:ext cx="2377440" cy="585216"/>
+          </a:xfrm>
+          <a:prstGeom prst="rect">
+            <a:avLst/>
+          </a:prstGeom>
+          <a:noFill/>
+          <a:ln/>
+        </p:spPr>
+        <p:txBody>
+          <a:bodyPr wrap="square" lIns="0" tIns="0" rIns="0" bIns="0" rtlCol="0" anchor="ctr"/>
+          <a:lstStyle/>
+          <a:p>
+            <a:pPr indent="0" marL="0">
+              <a:buNone/>
+            </a:pPr>
+            <a:r>
+              <a:rPr lang="en-US" sz="1300" b="1" dirty="0">
                 <a:solidFill>
                   <a:srgbClr val="0E7C86"/>
                 </a:solidFill>
@@ -3800,36 +2153,14 @@
               </a:rPr>
               <a:t>Address-dependent</a:t>
             </a:r>
-            <a:endParaRPr lang="en-US" sz="1500" dirty="0"/>
-          </a:p>
-        </p:txBody>
-      </p:sp>
-      <p:sp>
-        <p:nvSpPr>
-          <p:cNvPr id="12" name="Text 10"/>
-          <p:cNvSpPr/>
-          <p:nvPr/>
-        </p:nvSpPr>
-        <p:spPr>
-          <a:xfrm>
-            <a:off x="4343400" y="3172968"/>
-            <a:ext cx="2468880" cy="658368"/>
-          </a:xfrm>
-          <a:prstGeom prst="rect">
-            <a:avLst/>
-          </a:prstGeom>
-          <a:noFill/>
-          <a:ln/>
-        </p:spPr>
-        <p:txBody>
-          <a:bodyPr wrap="square" lIns="0" tIns="0" rIns="0" bIns="0" rtlCol="0" anchor="ctr"/>
-          <a:lstStyle/>
-          <a:p>
-            <a:pPr indent="0" marL="0">
-              <a:buNone/>
-            </a:pPr>
-            <a:r>
-              <a:rPr lang="en-US" sz="1300" i="1" dirty="0">
+            <a:endParaRPr lang="en-US" sz="1300" dirty="0"/>
+          </a:p>
+          <a:p>
+            <a:pPr indent="0" marL="0">
+              <a:buNone/>
+            </a:pPr>
+            <a:r>
+              <a:rPr lang="en-US" sz="1100" i="1" dirty="0">
                 <a:solidFill>
                   <a:srgbClr val="6E7F8B"/>
                 </a:solidFill>
@@ -3837,7 +2168,7 @@
                 <a:ea typeface="Calibri" pitchFamily="34" charset="-122"/>
                 <a:cs typeface="Calibri" pitchFamily="34" charset="-120"/>
               </a:rPr>
-              <a:t>some enterprise NATs</a:t>
+              <a:t>formerly: no name</a:t>
             </a:r>
             <a:endParaRPr lang="en-US" sz="1300" dirty="0"/>
           </a:p>
@@ -3845,30 +2176,69 @@
       </p:sp>
       <p:sp>
         <p:nvSpPr>
-          <p:cNvPr id="13" name="Text 11"/>
-          <p:cNvSpPr/>
-          <p:nvPr/>
-        </p:nvSpPr>
-        <p:spPr>
-          <a:xfrm>
-            <a:off x="6995160" y="3172968"/>
-            <a:ext cx="4480560" cy="658368"/>
-          </a:xfrm>
-          <a:prstGeom prst="rect">
-            <a:avLst/>
-          </a:prstGeom>
-          <a:noFill/>
-          <a:ln/>
-        </p:spPr>
-        <p:txBody>
-          <a:bodyPr wrap="square" lIns="0" tIns="0" rIns="0" bIns="0" rtlCol="0" anchor="ctr"/>
-          <a:lstStyle/>
-          <a:p>
-            <a:pPr indent="0" marL="0">
-              <a:buNone/>
-            </a:pPr>
-            <a:r>
-              <a:rPr lang="en-US" sz="1450" dirty="0">
+          <p:cNvPr id="16" name="Text 14"/>
+          <p:cNvSpPr/>
+          <p:nvPr/>
+        </p:nvSpPr>
+        <p:spPr>
+          <a:xfrm>
+            <a:off x="3200400" y="3063240"/>
+            <a:ext cx="1417320" cy="585216"/>
+          </a:xfrm>
+          <a:prstGeom prst="rect">
+            <a:avLst/>
+          </a:prstGeom>
+          <a:noFill/>
+          <a:ln/>
+        </p:spPr>
+        <p:txBody>
+          <a:bodyPr wrap="square" lIns="0" tIns="0" rIns="0" bIns="0" rtlCol="0" anchor="ctr"/>
+          <a:lstStyle/>
+          <a:p>
+            <a:pPr indent="0" marL="0">
+              <a:buNone/>
+            </a:pPr>
+            <a:r>
+              <a:rPr lang="en-US" sz="1200" i="1" dirty="0">
+                <a:solidFill>
+                  <a:srgbClr val="6E7F8B"/>
+                </a:solidFill>
+                <a:latin typeface="Calibri" pitchFamily="34" charset="0"/>
+                <a:ea typeface="Calibri" pitchFamily="34" charset="-122"/>
+                <a:cs typeface="Calibri" pitchFamily="34" charset="-120"/>
+              </a:rPr>
+              <a:t>enterprise NATs</a:t>
+            </a:r>
+            <a:endParaRPr lang="en-US" sz="1200" dirty="0"/>
+          </a:p>
+        </p:txBody>
+      </p:sp>
+      <p:sp>
+        <p:nvSpPr>
+          <p:cNvPr id="17" name="Text 15"/>
+          <p:cNvSpPr/>
+          <p:nvPr/>
+        </p:nvSpPr>
+        <p:spPr>
+          <a:xfrm>
+            <a:off x="4754880" y="3063240"/>
+            <a:ext cx="2788920" cy="585216"/>
+          </a:xfrm>
+          <a:prstGeom prst="rect">
+            <a:avLst/>
+          </a:prstGeom>
+          <a:noFill/>
+          <a:ln/>
+        </p:spPr>
+        <p:txBody>
+          <a:bodyPr wrap="square" lIns="0" tIns="0" rIns="0" bIns="0" rtlCol="0" anchor="ctr"/>
+          <a:lstStyle/>
+          <a:p>
+            <a:pPr indent="0" marL="0">
+              <a:buNone/>
+            </a:pPr>
+            <a:r>
+              <a:rPr lang="en-US" sz="1200" dirty="0">
                 <a:solidFill>
                   <a:srgbClr val="3E4C57"/>
                 </a:solidFill>
@@ -3878,24 +2248,102 @@
               </a:rPr>
               <a:t>A new port per destination address. Both sides must punch.</a:t>
             </a:r>
-            <a:endParaRPr lang="en-US" sz="1450" dirty="0"/>
-          </a:p>
-        </p:txBody>
-      </p:sp>
-      <p:sp>
-        <p:nvSpPr>
-          <p:cNvPr id="14" name="Shape 12"/>
-          <p:cNvSpPr/>
-          <p:nvPr/>
-        </p:nvSpPr>
-        <p:spPr>
-          <a:xfrm>
-            <a:off x="548640" y="3959352"/>
-            <a:ext cx="11064240" cy="768096"/>
+            <a:endParaRPr lang="en-US" sz="1200" dirty="0"/>
+          </a:p>
+        </p:txBody>
+      </p:sp>
+      <p:sp>
+        <p:nvSpPr>
+          <p:cNvPr id="18" name="Text 16"/>
+          <p:cNvSpPr/>
+          <p:nvPr/>
+        </p:nvSpPr>
+        <p:spPr>
+          <a:xfrm>
+            <a:off x="7726680" y="3063240"/>
+            <a:ext cx="1783080" cy="585216"/>
+          </a:xfrm>
+          <a:prstGeom prst="rect">
+            <a:avLst/>
+          </a:prstGeom>
+          <a:noFill/>
+          <a:ln/>
+        </p:spPr>
+        <p:txBody>
+          <a:bodyPr wrap="square" lIns="0" tIns="0" rIns="0" bIns="0" rtlCol="0" anchor="ctr"/>
+          <a:lstStyle/>
+          <a:p>
+            <a:pPr indent="0" marL="0">
+              <a:buNone/>
+            </a:pPr>
+            <a:r>
+              <a:rPr lang="en-US" sz="1100" b="1" dirty="0">
+                <a:solidFill>
+                  <a:srgbClr val="16202A"/>
+                </a:solidFill>
+                <a:latin typeface="Courier New" pitchFamily="34" charset="0"/>
+                <a:ea typeface="Courier New" pitchFamily="34" charset="-122"/>
+                <a:cs typeface="Courier New" pitchFamily="34" charset="-120"/>
+              </a:rPr>
+              <a:t>EndpointDependent</a:t>
+            </a:r>
+            <a:endParaRPr lang="en-US" sz="1100" dirty="0"/>
+          </a:p>
+        </p:txBody>
+      </p:sp>
+      <p:sp>
+        <p:nvSpPr>
+          <p:cNvPr id="19" name="Text 17"/>
+          <p:cNvSpPr/>
+          <p:nvPr/>
+        </p:nvSpPr>
+        <p:spPr>
+          <a:xfrm>
+            <a:off x="9646920" y="3063240"/>
+            <a:ext cx="1828800" cy="585216"/>
+          </a:xfrm>
+          <a:prstGeom prst="rect">
+            <a:avLst/>
+          </a:prstGeom>
+          <a:noFill/>
+          <a:ln/>
+        </p:spPr>
+        <p:txBody>
+          <a:bodyPr wrap="square" lIns="0" tIns="0" rIns="0" bIns="0" rtlCol="0" anchor="ctr"/>
+          <a:lstStyle/>
+          <a:p>
+            <a:pPr indent="0" marL="0">
+              <a:buNone/>
+            </a:pPr>
+            <a:r>
+              <a:rPr lang="en-US" sz="1200" b="1" dirty="0">
+                <a:solidFill>
+                  <a:srgbClr val="16202A"/>
+                </a:solidFill>
+                <a:latin typeface="Calibri" pitchFamily="34" charset="0"/>
+                <a:ea typeface="Calibri" pitchFamily="34" charset="-122"/>
+                <a:cs typeface="Calibri" pitchFamily="34" charset="-120"/>
+              </a:rPr>
+              <a:t>Private</a:t>
+            </a:r>
+            <a:endParaRPr lang="en-US" sz="1200" dirty="0"/>
+          </a:p>
+        </p:txBody>
+      </p:sp>
+      <p:sp>
+        <p:nvSpPr>
+          <p:cNvPr id="20" name="Shape 18"/>
+          <p:cNvSpPr/>
+          <p:nvPr/>
+        </p:nvSpPr>
+        <p:spPr>
+          <a:xfrm>
+            <a:off x="548640" y="3749040"/>
+            <a:ext cx="11064240" cy="676656"/>
           </a:xfrm>
           <a:prstGeom prst="roundRect">
             <a:avLst>
-              <a:gd name="adj" fmla="val 7143"/>
+              <a:gd name="adj" fmla="val 8108"/>
             </a:avLst>
           </a:prstGeom>
           <a:solidFill>
@@ -3911,30 +2359,30 @@
       </p:sp>
       <p:sp>
         <p:nvSpPr>
-          <p:cNvPr id="15" name="Text 13"/>
-          <p:cNvSpPr/>
-          <p:nvPr/>
-        </p:nvSpPr>
-        <p:spPr>
-          <a:xfrm>
-            <a:off x="685800" y="4014216"/>
-            <a:ext cx="3474720" cy="658368"/>
-          </a:xfrm>
-          <a:prstGeom prst="rect">
-            <a:avLst/>
-          </a:prstGeom>
-          <a:noFill/>
-          <a:ln/>
-        </p:spPr>
-        <p:txBody>
-          <a:bodyPr wrap="square" lIns="0" tIns="0" rIns="0" bIns="0" rtlCol="0" anchor="ctr"/>
-          <a:lstStyle/>
-          <a:p>
-            <a:pPr indent="0" marL="0">
-              <a:buNone/>
-            </a:pPr>
-            <a:r>
-              <a:rPr lang="en-US" sz="1500" b="1" dirty="0">
+          <p:cNvPr id="21" name="Text 19"/>
+          <p:cNvSpPr/>
+          <p:nvPr/>
+        </p:nvSpPr>
+        <p:spPr>
+          <a:xfrm>
+            <a:off x="685800" y="3794760"/>
+            <a:ext cx="2377440" cy="585216"/>
+          </a:xfrm>
+          <a:prstGeom prst="rect">
+            <a:avLst/>
+          </a:prstGeom>
+          <a:noFill/>
+          <a:ln/>
+        </p:spPr>
+        <p:txBody>
+          <a:bodyPr wrap="square" lIns="0" tIns="0" rIns="0" bIns="0" rtlCol="0" anchor="ctr"/>
+          <a:lstStyle/>
+          <a:p>
+            <a:pPr indent="0" marL="0">
+              <a:buNone/>
+            </a:pPr>
+            <a:r>
+              <a:rPr lang="en-US" sz="1300" b="1" dirty="0">
                 <a:solidFill>
                   <a:srgbClr val="C25E28"/>
                 </a:solidFill>
@@ -3944,36 +2392,14 @@
               </a:rPr>
               <a:t>Address-and-port-dependent</a:t>
             </a:r>
-            <a:endParaRPr lang="en-US" sz="1500" dirty="0"/>
-          </a:p>
-        </p:txBody>
-      </p:sp>
-      <p:sp>
-        <p:nvSpPr>
-          <p:cNvPr id="16" name="Text 14"/>
-          <p:cNvSpPr/>
-          <p:nvPr/>
-        </p:nvSpPr>
-        <p:spPr>
-          <a:xfrm>
-            <a:off x="4343400" y="4014216"/>
-            <a:ext cx="2468880" cy="658368"/>
-          </a:xfrm>
-          <a:prstGeom prst="rect">
-            <a:avLst/>
-          </a:prstGeom>
-          <a:noFill/>
-          <a:ln/>
-        </p:spPr>
-        <p:txBody>
-          <a:bodyPr wrap="square" lIns="0" tIns="0" rIns="0" bIns="0" rtlCol="0" anchor="ctr"/>
-          <a:lstStyle/>
-          <a:p>
-            <a:pPr indent="0" marL="0">
-              <a:buNone/>
-            </a:pPr>
-            <a:r>
-              <a:rPr lang="en-US" sz="1300" i="1" dirty="0">
+            <a:endParaRPr lang="en-US" sz="1300" dirty="0"/>
+          </a:p>
+          <a:p>
+            <a:pPr indent="0" marL="0">
+              <a:buNone/>
+            </a:pPr>
+            <a:r>
+              <a:rPr lang="en-US" sz="1100" i="1" dirty="0">
                 <a:solidFill>
                   <a:srgbClr val="6E7F8B"/>
                 </a:solidFill>
@@ -3981,7 +2407,7 @@
                 <a:ea typeface="Calibri" pitchFamily="34" charset="-122"/>
                 <a:cs typeface="Calibri" pitchFamily="34" charset="-120"/>
               </a:rPr>
-              <a:t>many mobile carriers</a:t>
+              <a:t>formerly: symmetric</a:t>
             </a:r>
             <a:endParaRPr lang="en-US" sz="1300" dirty="0"/>
           </a:p>
@@ -3989,30 +2415,69 @@
       </p:sp>
       <p:sp>
         <p:nvSpPr>
-          <p:cNvPr id="17" name="Text 15"/>
-          <p:cNvSpPr/>
-          <p:nvPr/>
-        </p:nvSpPr>
-        <p:spPr>
-          <a:xfrm>
-            <a:off x="6995160" y="4014216"/>
-            <a:ext cx="4480560" cy="658368"/>
-          </a:xfrm>
-          <a:prstGeom prst="rect">
-            <a:avLst/>
-          </a:prstGeom>
-          <a:noFill/>
-          <a:ln/>
-        </p:spPr>
-        <p:txBody>
-          <a:bodyPr wrap="square" lIns="0" tIns="0" rIns="0" bIns="0" rtlCol="0" anchor="ctr"/>
-          <a:lstStyle/>
-          <a:p>
-            <a:pPr indent="0" marL="0">
-              <a:buNone/>
-            </a:pPr>
-            <a:r>
-              <a:rPr lang="en-US" sz="1450" dirty="0">
+          <p:cNvPr id="22" name="Text 20"/>
+          <p:cNvSpPr/>
+          <p:nvPr/>
+        </p:nvSpPr>
+        <p:spPr>
+          <a:xfrm>
+            <a:off x="3200400" y="3794760"/>
+            <a:ext cx="1417320" cy="585216"/>
+          </a:xfrm>
+          <a:prstGeom prst="rect">
+            <a:avLst/>
+          </a:prstGeom>
+          <a:noFill/>
+          <a:ln/>
+        </p:spPr>
+        <p:txBody>
+          <a:bodyPr wrap="square" lIns="0" tIns="0" rIns="0" bIns="0" rtlCol="0" anchor="ctr"/>
+          <a:lstStyle/>
+          <a:p>
+            <a:pPr indent="0" marL="0">
+              <a:buNone/>
+            </a:pPr>
+            <a:r>
+              <a:rPr lang="en-US" sz="1200" i="1" dirty="0">
+                <a:solidFill>
+                  <a:srgbClr val="6E7F8B"/>
+                </a:solidFill>
+                <a:latin typeface="Calibri" pitchFamily="34" charset="0"/>
+                <a:ea typeface="Calibri" pitchFamily="34" charset="-122"/>
+                <a:cs typeface="Calibri" pitchFamily="34" charset="-120"/>
+              </a:rPr>
+              <a:t>mobile carriers</a:t>
+            </a:r>
+            <a:endParaRPr lang="en-US" sz="1200" dirty="0"/>
+          </a:p>
+        </p:txBody>
+      </p:sp>
+      <p:sp>
+        <p:nvSpPr>
+          <p:cNvPr id="23" name="Text 21"/>
+          <p:cNvSpPr/>
+          <p:nvPr/>
+        </p:nvSpPr>
+        <p:spPr>
+          <a:xfrm>
+            <a:off x="4754880" y="3794760"/>
+            <a:ext cx="2788920" cy="585216"/>
+          </a:xfrm>
+          <a:prstGeom prst="rect">
+            <a:avLst/>
+          </a:prstGeom>
+          <a:noFill/>
+          <a:ln/>
+        </p:spPr>
+        <p:txBody>
+          <a:bodyPr wrap="square" lIns="0" tIns="0" rIns="0" bIns="0" rtlCol="0" anchor="ctr"/>
+          <a:lstStyle/>
+          <a:p>
+            <a:pPr indent="0" marL="0">
+              <a:buNone/>
+            </a:pPr>
+            <a:r>
+              <a:rPr lang="en-US" sz="1200" dirty="0">
                 <a:solidFill>
                   <a:srgbClr val="3E4C57"/>
                 </a:solidFill>
@@ -4022,36 +2487,114 @@
               </a:rPr>
               <a:t>A new port per endpoint. Punching fails without prediction.</a:t>
             </a:r>
-            <a:endParaRPr lang="en-US" sz="1450" dirty="0"/>
-          </a:p>
-        </p:txBody>
-      </p:sp>
-      <p:sp>
-        <p:nvSpPr>
-          <p:cNvPr id="18" name="Text 16"/>
-          <p:cNvSpPr/>
-          <p:nvPr/>
-        </p:nvSpPr>
-        <p:spPr>
-          <a:xfrm>
-            <a:off x="685800" y="4855464"/>
-            <a:ext cx="3474720" cy="658368"/>
-          </a:xfrm>
-          <a:prstGeom prst="rect">
-            <a:avLst/>
-          </a:prstGeom>
-          <a:noFill/>
-          <a:ln/>
-        </p:spPr>
-        <p:txBody>
-          <a:bodyPr wrap="square" lIns="0" tIns="0" rIns="0" bIns="0" rtlCol="0" anchor="ctr"/>
-          <a:lstStyle/>
-          <a:p>
-            <a:pPr indent="0" marL="0">
-              <a:buNone/>
-            </a:pPr>
-            <a:r>
-              <a:rPr lang="en-US" sz="1500" b="1" dirty="0">
+            <a:endParaRPr lang="en-US" sz="1200" dirty="0"/>
+          </a:p>
+        </p:txBody>
+      </p:sp>
+      <p:sp>
+        <p:nvSpPr>
+          <p:cNvPr id="24" name="Text 22"/>
+          <p:cNvSpPr/>
+          <p:nvPr/>
+        </p:nvSpPr>
+        <p:spPr>
+          <a:xfrm>
+            <a:off x="7726680" y="3794760"/>
+            <a:ext cx="1783080" cy="585216"/>
+          </a:xfrm>
+          <a:prstGeom prst="rect">
+            <a:avLst/>
+          </a:prstGeom>
+          <a:noFill/>
+          <a:ln/>
+        </p:spPr>
+        <p:txBody>
+          <a:bodyPr wrap="square" lIns="0" tIns="0" rIns="0" bIns="0" rtlCol="0" anchor="ctr"/>
+          <a:lstStyle/>
+          <a:p>
+            <a:pPr indent="0" marL="0">
+              <a:buNone/>
+            </a:pPr>
+            <a:r>
+              <a:rPr lang="en-US" sz="1100" b="1" dirty="0">
+                <a:solidFill>
+                  <a:srgbClr val="16202A"/>
+                </a:solidFill>
+                <a:latin typeface="Courier New" pitchFamily="34" charset="0"/>
+                <a:ea typeface="Courier New" pitchFamily="34" charset="-122"/>
+                <a:cs typeface="Courier New" pitchFamily="34" charset="-120"/>
+              </a:rPr>
+              <a:t>EndpointDependent</a:t>
+            </a:r>
+            <a:endParaRPr lang="en-US" sz="1100" dirty="0"/>
+          </a:p>
+        </p:txBody>
+      </p:sp>
+      <p:sp>
+        <p:nvSpPr>
+          <p:cNvPr id="25" name="Text 23"/>
+          <p:cNvSpPr/>
+          <p:nvPr/>
+        </p:nvSpPr>
+        <p:spPr>
+          <a:xfrm>
+            <a:off x="9646920" y="3794760"/>
+            <a:ext cx="1828800" cy="585216"/>
+          </a:xfrm>
+          <a:prstGeom prst="rect">
+            <a:avLst/>
+          </a:prstGeom>
+          <a:noFill/>
+          <a:ln/>
+        </p:spPr>
+        <p:txBody>
+          <a:bodyPr wrap="square" lIns="0" tIns="0" rIns="0" bIns="0" rtlCol="0" anchor="ctr"/>
+          <a:lstStyle/>
+          <a:p>
+            <a:pPr indent="0" marL="0">
+              <a:buNone/>
+            </a:pPr>
+            <a:r>
+              <a:rPr lang="en-US" sz="1200" b="1" dirty="0">
+                <a:solidFill>
+                  <a:srgbClr val="16202A"/>
+                </a:solidFill>
+                <a:latin typeface="Calibri" pitchFamily="34" charset="0"/>
+                <a:ea typeface="Calibri" pitchFamily="34" charset="-122"/>
+                <a:cs typeface="Calibri" pitchFamily="34" charset="-120"/>
+              </a:rPr>
+              <a:t>Private</a:t>
+            </a:r>
+            <a:endParaRPr lang="en-US" sz="1200" dirty="0"/>
+          </a:p>
+        </p:txBody>
+      </p:sp>
+      <p:sp>
+        <p:nvSpPr>
+          <p:cNvPr id="26" name="Text 24"/>
+          <p:cNvSpPr/>
+          <p:nvPr/>
+        </p:nvSpPr>
+        <p:spPr>
+          <a:xfrm>
+            <a:off x="685800" y="4526280"/>
+            <a:ext cx="2377440" cy="585216"/>
+          </a:xfrm>
+          <a:prstGeom prst="rect">
+            <a:avLst/>
+          </a:prstGeom>
+          <a:noFill/>
+          <a:ln/>
+        </p:spPr>
+        <p:txBody>
+          <a:bodyPr wrap="square" lIns="0" tIns="0" rIns="0" bIns="0" rtlCol="0" anchor="ctr"/>
+          <a:lstStyle/>
+          <a:p>
+            <a:pPr indent="0" marL="0">
+              <a:buNone/>
+            </a:pPr>
+            <a:r>
+              <a:rPr lang="en-US" sz="1300" b="1" dirty="0">
                 <a:solidFill>
                   <a:srgbClr val="C25E28"/>
                 </a:solidFill>
@@ -4061,36 +2604,36 @@
               </a:rPr>
               <a:t>Carrier-grade NAT</a:t>
             </a:r>
-            <a:endParaRPr lang="en-US" sz="1500" dirty="0"/>
-          </a:p>
-        </p:txBody>
-      </p:sp>
-      <p:sp>
-        <p:nvSpPr>
-          <p:cNvPr id="19" name="Text 17"/>
-          <p:cNvSpPr/>
-          <p:nvPr/>
-        </p:nvSpPr>
-        <p:spPr>
-          <a:xfrm>
-            <a:off x="4343400" y="4855464"/>
-            <a:ext cx="2468880" cy="658368"/>
-          </a:xfrm>
-          <a:prstGeom prst="rect">
-            <a:avLst/>
-          </a:prstGeom>
-          <a:noFill/>
-          <a:ln/>
-        </p:spPr>
-        <p:txBody>
-          <a:bodyPr wrap="square" lIns="0" tIns="0" rIns="0" bIns="0" rtlCol="0" anchor="ctr"/>
-          <a:lstStyle/>
-          <a:p>
-            <a:pPr indent="0" marL="0">
-              <a:buNone/>
-            </a:pPr>
-            <a:r>
-              <a:rPr lang="en-US" sz="1300" i="1" dirty="0">
+            <a:endParaRPr lang="en-US" sz="1300" dirty="0"/>
+          </a:p>
+        </p:txBody>
+      </p:sp>
+      <p:sp>
+        <p:nvSpPr>
+          <p:cNvPr id="27" name="Text 25"/>
+          <p:cNvSpPr/>
+          <p:nvPr/>
+        </p:nvSpPr>
+        <p:spPr>
+          <a:xfrm>
+            <a:off x="3200400" y="4526280"/>
+            <a:ext cx="1417320" cy="585216"/>
+          </a:xfrm>
+          <a:prstGeom prst="rect">
+            <a:avLst/>
+          </a:prstGeom>
+          <a:noFill/>
+          <a:ln/>
+        </p:spPr>
+        <p:txBody>
+          <a:bodyPr wrap="square" lIns="0" tIns="0" rIns="0" bIns="0" rtlCol="0" anchor="ctr"/>
+          <a:lstStyle/>
+          <a:p>
+            <a:pPr indent="0" marL="0">
+              <a:buNone/>
+            </a:pPr>
+            <a:r>
+              <a:rPr lang="en-US" sz="1200" i="1" dirty="0">
                 <a:solidFill>
                   <a:srgbClr val="6E7F8B"/>
                 </a:solidFill>
@@ -4098,38 +2641,38 @@
                 <a:ea typeface="Calibri" pitchFamily="34" charset="-122"/>
                 <a:cs typeface="Calibri" pitchFamily="34" charset="-120"/>
               </a:rPr>
-              <a:t>prepaid mobile data</a:t>
-            </a:r>
-            <a:endParaRPr lang="en-US" sz="1300" dirty="0"/>
-          </a:p>
-        </p:txBody>
-      </p:sp>
-      <p:sp>
-        <p:nvSpPr>
-          <p:cNvPr id="20" name="Text 18"/>
-          <p:cNvSpPr/>
-          <p:nvPr/>
-        </p:nvSpPr>
-        <p:spPr>
-          <a:xfrm>
-            <a:off x="6995160" y="4855464"/>
-            <a:ext cx="4480560" cy="658368"/>
-          </a:xfrm>
-          <a:prstGeom prst="rect">
-            <a:avLst/>
-          </a:prstGeom>
-          <a:noFill/>
-          <a:ln/>
-        </p:spPr>
-        <p:txBody>
-          <a:bodyPr wrap="square" lIns="0" tIns="0" rIns="0" bIns="0" rtlCol="0" anchor="ctr"/>
-          <a:lstStyle/>
-          <a:p>
-            <a:pPr indent="0" marL="0">
-              <a:buNone/>
-            </a:pPr>
-            <a:r>
-              <a:rPr lang="en-US" sz="1450" dirty="0">
+              <a:t>mobile carriers</a:t>
+            </a:r>
+            <a:endParaRPr lang="en-US" sz="1200" dirty="0"/>
+          </a:p>
+        </p:txBody>
+      </p:sp>
+      <p:sp>
+        <p:nvSpPr>
+          <p:cNvPr id="28" name="Text 26"/>
+          <p:cNvSpPr/>
+          <p:nvPr/>
+        </p:nvSpPr>
+        <p:spPr>
+          <a:xfrm>
+            <a:off x="4754880" y="4526280"/>
+            <a:ext cx="2788920" cy="585216"/>
+          </a:xfrm>
+          <a:prstGeom prst="rect">
+            <a:avLst/>
+          </a:prstGeom>
+          <a:noFill/>
+          <a:ln/>
+        </p:spPr>
+        <p:txBody>
+          <a:bodyPr wrap="square" lIns="0" tIns="0" rIns="0" bIns="0" rtlCol="0" anchor="ctr"/>
+          <a:lstStyle/>
+          <a:p>
+            <a:pPr indent="0" marL="0">
+              <a:buNone/>
+            </a:pPr>
+            <a:r>
+              <a:rPr lang="en-US" sz="1200" dirty="0">
                 <a:solidFill>
                   <a:srgbClr val="3E4C57"/>
                 </a:solidFill>
@@ -4137,38 +2680,116 @@
                 <a:ea typeface="Calibri" pitchFamily="34" charset="-122"/>
                 <a:cs typeface="Calibri" pitchFamily="34" charset="-120"/>
               </a:rPr>
-              <a:t>Stacked above all of it. No unsolicited inbound at all.</a:t>
-            </a:r>
-            <a:endParaRPr lang="en-US" sz="1450" dirty="0"/>
-          </a:p>
-        </p:txBody>
-      </p:sp>
-      <p:sp>
-        <p:nvSpPr>
-          <p:cNvPr id="21" name="Text 19"/>
-          <p:cNvSpPr/>
-          <p:nvPr/>
-        </p:nvSpPr>
-        <p:spPr>
-          <a:xfrm>
-            <a:off x="685800" y="5806440"/>
-            <a:ext cx="10789920" cy="365760"/>
-          </a:xfrm>
-          <a:prstGeom prst="rect">
-            <a:avLst/>
-          </a:prstGeom>
-          <a:noFill/>
-          <a:ln/>
-        </p:spPr>
-        <p:txBody>
-          <a:bodyPr wrap="square" lIns="0" tIns="0" rIns="0" bIns="0" rtlCol="0" anchor="ctr"/>
-          <a:lstStyle/>
-          <a:p>
-            <a:pPr indent="0" marL="0">
-              <a:buNone/>
-            </a:pPr>
-            <a:r>
-              <a:rPr lang="en-US" sz="1500" i="1" dirty="0">
+              <a:t>Sits on top of the others. Nothing unsolicited gets in.</a:t>
+            </a:r>
+            <a:endParaRPr lang="en-US" sz="1200" dirty="0"/>
+          </a:p>
+        </p:txBody>
+      </p:sp>
+      <p:sp>
+        <p:nvSpPr>
+          <p:cNvPr id="29" name="Text 27"/>
+          <p:cNvSpPr/>
+          <p:nvPr/>
+        </p:nvSpPr>
+        <p:spPr>
+          <a:xfrm>
+            <a:off x="7726680" y="4526280"/>
+            <a:ext cx="1783080" cy="585216"/>
+          </a:xfrm>
+          <a:prstGeom prst="rect">
+            <a:avLst/>
+          </a:prstGeom>
+          <a:noFill/>
+          <a:ln/>
+        </p:spPr>
+        <p:txBody>
+          <a:bodyPr wrap="square" lIns="0" tIns="0" rIns="0" bIns="0" rtlCol="0" anchor="ctr"/>
+          <a:lstStyle/>
+          <a:p>
+            <a:pPr indent="0" marL="0">
+              <a:buNone/>
+            </a:pPr>
+            <a:r>
+              <a:rPr lang="en-US" sz="1100" b="1" dirty="0">
+                <a:solidFill>
+                  <a:srgbClr val="16202A"/>
+                </a:solidFill>
+                <a:latin typeface="Courier New" pitchFamily="34" charset="0"/>
+                <a:ea typeface="Courier New" pitchFamily="34" charset="-122"/>
+                <a:cs typeface="Courier New" pitchFamily="34" charset="-120"/>
+              </a:rPr>
+              <a:t>no name</a:t>
+            </a:r>
+            <a:endParaRPr lang="en-US" sz="1100" dirty="0"/>
+          </a:p>
+        </p:txBody>
+      </p:sp>
+      <p:sp>
+        <p:nvSpPr>
+          <p:cNvPr id="30" name="Text 28"/>
+          <p:cNvSpPr/>
+          <p:nvPr/>
+        </p:nvSpPr>
+        <p:spPr>
+          <a:xfrm>
+            <a:off x="9646920" y="4526280"/>
+            <a:ext cx="1828800" cy="585216"/>
+          </a:xfrm>
+          <a:prstGeom prst="rect">
+            <a:avLst/>
+          </a:prstGeom>
+          <a:noFill/>
+          <a:ln/>
+        </p:spPr>
+        <p:txBody>
+          <a:bodyPr wrap="square" lIns="0" tIns="0" rIns="0" bIns="0" rtlCol="0" anchor="ctr"/>
+          <a:lstStyle/>
+          <a:p>
+            <a:pPr indent="0" marL="0">
+              <a:buNone/>
+            </a:pPr>
+            <a:r>
+              <a:rPr lang="en-US" sz="1200" b="1" dirty="0">
+                <a:solidFill>
+                  <a:srgbClr val="16202A"/>
+                </a:solidFill>
+                <a:latin typeface="Calibri" pitchFamily="34" charset="0"/>
+                <a:ea typeface="Calibri" pitchFamily="34" charset="-122"/>
+                <a:cs typeface="Calibri" pitchFamily="34" charset="-120"/>
+              </a:rPr>
+              <a:t>Private</a:t>
+            </a:r>
+            <a:endParaRPr lang="en-US" sz="1200" dirty="0"/>
+          </a:p>
+        </p:txBody>
+      </p:sp>
+      <p:sp>
+        <p:nvSpPr>
+          <p:cNvPr id="31" name="Text 29"/>
+          <p:cNvSpPr/>
+          <p:nvPr/>
+        </p:nvSpPr>
+        <p:spPr>
+          <a:xfrm>
+            <a:off x="685800" y="5349240"/>
+            <a:ext cx="10789920" cy="1188720"/>
+          </a:xfrm>
+          <a:prstGeom prst="rect">
+            <a:avLst/>
+          </a:prstGeom>
+          <a:noFill/>
+          <a:ln/>
+        </p:spPr>
+        <p:txBody>
+          <a:bodyPr wrap="square" lIns="0" tIns="0" rIns="0" bIns="0" rtlCol="0" anchor="t"/>
+          <a:lstStyle/>
+          <a:p>
+            <a:pPr indent="0" marL="0">
+              <a:buNone/>
+            </a:pPr>
+            <a:r>
+              <a:rPr lang="en-US" sz="1200" i="1" dirty="0">
                 <a:solidFill>
                   <a:srgbClr val="0A5A62"/>
                 </a:solidFill>
@@ -4176,9 +2797,94 @@
                 <a:ea typeface="Calibri" pitchFamily="34" charset="-122"/>
                 <a:cs typeface="Calibri" pitchFamily="34" charset="-120"/>
               </a:rPr>
-              <a:t>We measure the tuple — mapping, filtering, port preservation, lifetime — never a single type.</a:t>
-            </a:r>
-            <a:endParaRPr lang="en-US" sz="1500" dirty="0"/>
+              <a:t>We measure four properties: </a:t>
+            </a:r>
+            <a:endParaRPr lang="en-US" sz="1200" dirty="0"/>
+          </a:p>
+          <a:p>
+            <a:pPr indent="0" marL="0">
+              <a:buNone/>
+            </a:pPr>
+            <a:r>
+              <a:rPr lang="en-US" sz="1200" i="1" dirty="0">
+                <a:solidFill>
+                  <a:srgbClr val="0A5A62"/>
+                </a:solidFill>
+                <a:latin typeface="Calibri" pitchFamily="34" charset="0"/>
+                <a:ea typeface="Calibri" pitchFamily="34" charset="-122"/>
+                <a:cs typeface="Calibri" pitchFamily="34" charset="-120"/>
+              </a:rPr>
+              <a:t>1. Mapping: which external port the NAT assigns. </a:t>
+            </a:r>
+            <a:endParaRPr lang="en-US" sz="1200" dirty="0"/>
+          </a:p>
+          <a:p>
+            <a:pPr indent="0" marL="0">
+              <a:buNone/>
+            </a:pPr>
+            <a:r>
+              <a:rPr lang="en-US" sz="1200" i="1" dirty="0">
+                <a:solidFill>
+                  <a:srgbClr val="0A5A62"/>
+                </a:solidFill>
+                <a:latin typeface="Calibri" pitchFamily="34" charset="0"/>
+                <a:ea typeface="Calibri" pitchFamily="34" charset="-122"/>
+                <a:cs typeface="Calibri" pitchFamily="34" charset="-120"/>
+              </a:rPr>
+              <a:t>2. Filtering: which senders it lets in. </a:t>
+            </a:r>
+            <a:endParaRPr lang="en-US" sz="1200" dirty="0"/>
+          </a:p>
+          <a:p>
+            <a:pPr indent="0" marL="0">
+              <a:buNone/>
+            </a:pPr>
+            <a:r>
+              <a:rPr lang="en-US" sz="1200" i="1" dirty="0">
+                <a:solidFill>
+                  <a:srgbClr val="0A5A62"/>
+                </a:solidFill>
+                <a:latin typeface="Calibri" pitchFamily="34" charset="0"/>
+                <a:ea typeface="Calibri" pitchFamily="34" charset="-122"/>
+                <a:cs typeface="Calibri" pitchFamily="34" charset="-120"/>
+              </a:rPr>
+              <a:t>3. Port preservation: whether it keeps our own port.</a:t>
+            </a:r>
+            <a:endParaRPr lang="en-US" sz="1200" dirty="0"/>
+          </a:p>
+          <a:p>
+            <a:pPr indent="0" marL="0">
+              <a:buNone/>
+            </a:pPr>
+            <a:r>
+              <a:rPr lang="en-US" sz="1200" i="1" dirty="0">
+                <a:solidFill>
+                  <a:srgbClr val="0A5A62"/>
+                </a:solidFill>
+                <a:latin typeface="Calibri" pitchFamily="34" charset="0"/>
+                <a:ea typeface="Calibri" pitchFamily="34" charset="-122"/>
+                <a:cs typeface="Calibri" pitchFamily="34" charset="-120"/>
+              </a:rPr>
+              <a:t>4. Lifetime: how long it keeps an idle mapping. </a:t>
+            </a:r>
+            <a:endParaRPr lang="en-US" sz="1200" dirty="0"/>
+          </a:p>
+          <a:p>
+            <a:pPr indent="0" marL="0">
+              <a:buNone/>
+            </a:pPr>
+            <a:r>
+              <a:rPr lang="en-US" sz="1200" i="1" dirty="0">
+                <a:solidFill>
+                  <a:srgbClr val="0A5A62"/>
+                </a:solidFill>
+                <a:latin typeface="Calibri" pitchFamily="34" charset="0"/>
+                <a:ea typeface="Calibri" pitchFamily="34" charset="-122"/>
+                <a:cs typeface="Calibri" pitchFamily="34" charset="-120"/>
+              </a:rPr>
+              <a:t>AutoNAT also reports reachability (Public, Private or Unknown)</a:t>
+            </a:r>
+            <a:endParaRPr lang="en-US" sz="1200" dirty="0"/>
           </a:p>
         </p:txBody>
       </p:sp>
@@ -4247,7 +2953,7 @@
                 <a:ea typeface="Calibri" pitchFamily="34" charset="-122"/>
                 <a:cs typeface="Calibri" pitchFamily="34" charset="-120"/>
               </a:rPr>
-              <a:t>ONE BOOLEAN</a:t>
+              <a:t>AN ADDRESS RANGE TEST</a:t>
             </a:r>
             <a:endParaRPr lang="en-US" sz="1100" dirty="0"/>
           </a:p>
@@ -4344,7 +3050,7 @@
               <a:buNone/>
             </a:pPr>
             <a:r>
-              <a:rPr lang="en-US" sz="2000" b="1" dirty="0">
+              <a:rPr lang="en-US" sz="1400" b="1" dirty="0">
                 <a:solidFill>
                   <a:srgbClr val="FFFFFF"/>
                 </a:solidFill>
@@ -4352,9 +3058,9 @@
                 <a:ea typeface="Courier New" pitchFamily="34" charset="-122"/>
                 <a:cs typeface="Courier New" pitchFamily="34" charset="-120"/>
               </a:rPr>
-              <a:t>isWellConnected = true</a:t>
-            </a:r>
-            <a:endParaRPr lang="en-US" sz="2000" dirty="0"/>
+              <a:t>not 10.* | 192.168.* | ...</a:t>
+            </a:r>
+            <a:endParaRPr lang="en-US" sz="1400" dirty="0"/>
           </a:p>
         </p:txBody>
       </p:sp>
@@ -4367,16 +3073,16 @@
         <p:spPr>
           <a:xfrm>
             <a:off x="1051560" y="2788920"/>
-            <a:ext cx="4389120" cy="320040"/>
-          </a:xfrm>
-          <a:prstGeom prst="rect">
-            <a:avLst/>
-          </a:prstGeom>
-          <a:noFill/>
-          <a:ln/>
-        </p:spPr>
-        <p:txBody>
-          <a:bodyPr wrap="square" lIns="0" tIns="0" rIns="0" bIns="0" rtlCol="0" anchor="ctr"/>
+            <a:ext cx="4389120" cy="548640"/>
+          </a:xfrm>
+          <a:prstGeom prst="rect">
+            <a:avLst/>
+          </a:prstGeom>
+          <a:noFill/>
+          <a:ln/>
+        </p:spPr>
+        <p:txBody>
+          <a:bodyPr wrap="square" lIns="0" tIns="0" rIns="0" bIns="0" rtlCol="0" anchor="t"/>
           <a:lstStyle/>
           <a:p>
             <a:pPr indent="0" marL="0">
@@ -4391,7 +3097,7 @@
                 <a:ea typeface="Calibri" pitchFamily="34" charset="-122"/>
                 <a:cs typeface="Calibri" pitchFamily="34" charset="-120"/>
               </a:rPr>
-              <a:t>A routability test over the advertised string.</a:t>
+              <a:t>Well-connected if the advertised address is in none of the private or reserved ranges.</a:t>
             </a:r>
             <a:endParaRPr lang="en-US" sz="1300" dirty="0"/>
           </a:p>
@@ -4457,7 +3163,7 @@
                 <a:ea typeface="Cambria" pitchFamily="34" charset="-122"/>
                 <a:cs typeface="Cambria" pitchFamily="34" charset="-120"/>
               </a:rPr>
-              <a:t>A CGNAT handset passes it</a:t>
+              <a:t>A phone behind carrier NAT passes it</a:t>
             </a:r>
             <a:endParaRPr lang="en-US" sz="1700" dirty="0"/>
           </a:p>
@@ -4496,7 +3202,7 @@
                 <a:ea typeface="Calibri" pitchFamily="34" charset="-122"/>
                 <a:cs typeface="Calibri" pitchFamily="34" charset="-120"/>
               </a:rPr>
-              <a:t>It never sees its own inner address.</a:t>
+              <a:t>It advertises the carrier’s public address, so it looks reachable.</a:t>
             </a:r>
             <a:endParaRPr lang="en-US" sz="1300" dirty="0"/>
           </a:p>
@@ -4560,7 +3266,7 @@
                 <a:ea typeface="Calibri" pitchFamily="34" charset="-122"/>
                 <a:cs typeface="Calibri" pitchFamily="34" charset="-120"/>
               </a:rPr>
-              <a:t>The punch is then suppressed for the peers that need it.</a:t>
+              <a:t>Hole punching is skipped despite CGNAT not allowing unsolicited incoming requests.</a:t>
             </a:r>
             <a:endParaRPr lang="en-US" sz="1700" dirty="0"/>
           </a:p>
@@ -4624,7 +3330,7 @@
                 <a:ea typeface="Calibri" pitchFamily="34" charset="-122"/>
                 <a:cs typeface="Calibri" pitchFamily="34" charset="-120"/>
               </a:rPr>
-              <a:t>The device reflects addresses and mediates for its friends.</a:t>
+              <a:t>Peer is considered well-connected, although nobody can reach it.</a:t>
             </a:r>
             <a:endParaRPr lang="en-US" sz="1700" dirty="0"/>
           </a:p>
@@ -4688,7 +3394,7 @@
                 <a:ea typeface="Calibri" pitchFamily="34" charset="-122"/>
                 <a:cs typeface="Calibri" pitchFamily="34" charset="-120"/>
               </a:rPr>
-              <a:t>Having a public address is not being reachable at it.</a:t>
+              <a:t>A public address does not mean peer can be reached.</a:t>
             </a:r>
             <a:endParaRPr lang="en-US" sz="1700" dirty="0"/>
           </a:p>
@@ -4752,7 +3458,7 @@
                 <a:ea typeface="Calibri" pitchFamily="34" charset="-122"/>
                 <a:cs typeface="Calibri" pitchFamily="34" charset="-120"/>
               </a:rPr>
-              <a:t>THE IDEA</a:t>
+              <a:t>THE ALGORITHM</a:t>
             </a:r>
             <a:endParaRPr lang="en-US" sz="1100" dirty="0"/>
           </a:p>
@@ -4805,18 +3511,16 @@
         </p:nvSpPr>
         <p:spPr>
           <a:xfrm>
-            <a:off x="1051560" y="2880360"/>
-            <a:ext cx="2286000" cy="1005840"/>
-          </a:xfrm>
-          <a:prstGeom prst="roundRect">
-            <a:avLst>
-              <a:gd name="adj" fmla="val 5455"/>
-            </a:avLst>
-          </a:prstGeom>
-          <a:solidFill>
-            <a:srgbClr val="EEF3F4"/>
-          </a:solidFill>
-          <a:ln w="17780">
+            <a:off x="685800" y="2176272"/>
+            <a:ext cx="384048" cy="384048"/>
+          </a:xfrm>
+          <a:prstGeom prst="ellipse">
+            <a:avLst/>
+          </a:prstGeom>
+          <a:solidFill>
+            <a:srgbClr val="0E7C86"/>
+          </a:solidFill>
+          <a:ln w="12700">
             <a:solidFill>
               <a:srgbClr val="0E7C86"/>
             </a:solidFill>
@@ -4832,8 +3536,8 @@
         </p:nvSpPr>
         <p:spPr>
           <a:xfrm>
-            <a:off x="1051560" y="3063240"/>
-            <a:ext cx="2286000" cy="329184"/>
+            <a:off x="685800" y="2176272"/>
+            <a:ext cx="384048" cy="384048"/>
           </a:xfrm>
           <a:prstGeom prst="rect">
             <a:avLst/>
@@ -4849,17 +3553,17 @@
               <a:buNone/>
             </a:pPr>
             <a:r>
-              <a:rPr lang="en-US" sz="1700" b="1" dirty="0">
-                <a:solidFill>
-                  <a:srgbClr val="16202A"/>
+              <a:rPr lang="en-US" sz="1400" b="1" dirty="0">
+                <a:solidFill>
+                  <a:srgbClr val="FFFFFF"/>
                 </a:solidFill>
                 <a:latin typeface="Cambria" pitchFamily="34" charset="0"/>
                 <a:ea typeface="Cambria" pitchFamily="34" charset="-122"/>
                 <a:cs typeface="Cambria" pitchFamily="34" charset="-120"/>
               </a:rPr>
-              <a:t>Probe</a:t>
-            </a:r>
-            <a:endParaRPr lang="en-US" sz="1700" dirty="0"/>
+              <a:t>1</a:t>
+            </a:r>
+            <a:endParaRPr lang="en-US" sz="1400" dirty="0"/>
           </a:p>
         </p:txBody>
       </p:sp>
@@ -4871,8 +3575,72 @@
         </p:nvSpPr>
         <p:spPr>
           <a:xfrm>
-            <a:off x="1051560" y="3410712"/>
-            <a:ext cx="2286000" cy="274320"/>
+            <a:off x="1280160" y="2103120"/>
+            <a:ext cx="6172200" cy="548640"/>
+          </a:xfrm>
+          <a:prstGeom prst="rect">
+            <a:avLst/>
+          </a:prstGeom>
+          <a:noFill/>
+          <a:ln/>
+        </p:spPr>
+        <p:txBody>
+          <a:bodyPr wrap="square" lIns="0" tIns="0" rIns="0" bIns="0" rtlCol="0" anchor="ctr"/>
+          <a:lstStyle/>
+          <a:p>
+            <a:pPr indent="0" marL="0">
+              <a:buNone/>
+            </a:pPr>
+            <a:r>
+              <a:rPr lang="en-US" sz="1600" dirty="0">
+                <a:solidFill>
+                  <a:srgbClr val="3E4C57"/>
+                </a:solidFill>
+                <a:latin typeface="Calibri" pitchFamily="34" charset="0"/>
+                <a:ea typeface="Calibri" pitchFamily="34" charset="-122"/>
+                <a:cs typeface="Calibri" pitchFamily="34" charset="-120"/>
+              </a:rPr>
+              <a:t>Pick A, a well-connected friend we have a link to; B, a linked friend; C, a friend of A with no link to us.</a:t>
+            </a:r>
+            <a:endParaRPr lang="en-US" sz="1600" dirty="0"/>
+          </a:p>
+        </p:txBody>
+      </p:sp>
+      <p:sp>
+        <p:nvSpPr>
+          <p:cNvPr id="7" name="Shape 5"/>
+          <p:cNvSpPr/>
+          <p:nvPr/>
+        </p:nvSpPr>
+        <p:spPr>
+          <a:xfrm>
+            <a:off x="685800" y="3017520"/>
+            <a:ext cx="384048" cy="384048"/>
+          </a:xfrm>
+          <a:prstGeom prst="ellipse">
+            <a:avLst/>
+          </a:prstGeom>
+          <a:solidFill>
+            <a:srgbClr val="0E7C86"/>
+          </a:solidFill>
+          <a:ln w="12700">
+            <a:solidFill>
+              <a:srgbClr val="0E7C86"/>
+            </a:solidFill>
+            <a:prstDash val="solid"/>
+          </a:ln>
+        </p:spPr>
+      </p:sp>
+      <p:sp>
+        <p:nvSpPr>
+          <p:cNvPr id="8" name="Text 6"/>
+          <p:cNvSpPr/>
+          <p:nvPr/>
+        </p:nvSpPr>
+        <p:spPr>
+          <a:xfrm>
+            <a:off x="685800" y="3017520"/>
+            <a:ext cx="384048" cy="384048"/>
           </a:xfrm>
           <a:prstGeom prst="rect">
             <a:avLst/>
@@ -4888,34 +3656,487 @@
               <a:buNone/>
             </a:pPr>
             <a:r>
-              <a:rPr lang="en-US" sz="1200" dirty="0">
-                <a:solidFill>
-                  <a:srgbClr val="6E7F8B"/>
-                </a:solidFill>
-                <a:latin typeface="Calibri" pitchFamily="34" charset="0"/>
-                <a:ea typeface="Calibri" pitchFamily="34" charset="-122"/>
-                <a:cs typeface="Calibri" pitchFamily="34" charset="-120"/>
-              </a:rPr>
-              <a:t>the device</a:t>
-            </a:r>
-            <a:endParaRPr lang="en-US" sz="1200" dirty="0"/>
-          </a:p>
-        </p:txBody>
-      </p:sp>
-      <p:sp>
-        <p:nvSpPr>
-          <p:cNvPr id="7" name="Shape 5"/>
-          <p:cNvSpPr/>
-          <p:nvPr/>
-        </p:nvSpPr>
-        <p:spPr>
-          <a:xfrm>
-            <a:off x="8275320" y="1965960"/>
-            <a:ext cx="3017520" cy="868680"/>
+              <a:rPr lang="en-US" sz="1400" b="1" dirty="0">
+                <a:solidFill>
+                  <a:srgbClr val="FFFFFF"/>
+                </a:solidFill>
+                <a:latin typeface="Cambria" pitchFamily="34" charset="0"/>
+                <a:ea typeface="Cambria" pitchFamily="34" charset="-122"/>
+                <a:cs typeface="Cambria" pitchFamily="34" charset="-120"/>
+              </a:rPr>
+              <a:t>2</a:t>
+            </a:r>
+            <a:endParaRPr lang="en-US" sz="1400" dirty="0"/>
+          </a:p>
+        </p:txBody>
+      </p:sp>
+      <p:sp>
+        <p:nvSpPr>
+          <p:cNvPr id="9" name="Text 7"/>
+          <p:cNvSpPr/>
+          <p:nvPr/>
+        </p:nvSpPr>
+        <p:spPr>
+          <a:xfrm>
+            <a:off x="1280160" y="2944368"/>
+            <a:ext cx="6172200" cy="548640"/>
+          </a:xfrm>
+          <a:prstGeom prst="rect">
+            <a:avLst/>
+          </a:prstGeom>
+          <a:noFill/>
+          <a:ln/>
+        </p:spPr>
+        <p:txBody>
+          <a:bodyPr wrap="square" lIns="0" tIns="0" rIns="0" bIns="0" rtlCol="0" anchor="ctr"/>
+          <a:lstStyle/>
+          <a:p>
+            <a:pPr indent="0" marL="0">
+              <a:buNone/>
+            </a:pPr>
+            <a:r>
+              <a:rPr lang="en-US" sz="1600" dirty="0">
+                <a:solidFill>
+                  <a:srgbClr val="3E4C57"/>
+                </a:solidFill>
+                <a:latin typeface="Calibri" pitchFamily="34" charset="0"/>
+                <a:ea typeface="Calibri" pitchFamily="34" charset="-122"/>
+                <a:cs typeface="Calibri" pitchFamily="34" charset="-120"/>
+              </a:rPr>
+              <a:t>A and B report the address and port they see us at.</a:t>
+            </a:r>
+            <a:endParaRPr lang="en-US" sz="1600" dirty="0"/>
+          </a:p>
+        </p:txBody>
+      </p:sp>
+      <p:sp>
+        <p:nvSpPr>
+          <p:cNvPr id="10" name="Shape 8"/>
+          <p:cNvSpPr/>
+          <p:nvPr/>
+        </p:nvSpPr>
+        <p:spPr>
+          <a:xfrm>
+            <a:off x="685800" y="3858768"/>
+            <a:ext cx="384048" cy="384048"/>
+          </a:xfrm>
+          <a:prstGeom prst="ellipse">
+            <a:avLst/>
+          </a:prstGeom>
+          <a:solidFill>
+            <a:srgbClr val="0E7C86"/>
+          </a:solidFill>
+          <a:ln w="12700">
+            <a:solidFill>
+              <a:srgbClr val="0E7C86"/>
+            </a:solidFill>
+            <a:prstDash val="solid"/>
+          </a:ln>
+        </p:spPr>
+      </p:sp>
+      <p:sp>
+        <p:nvSpPr>
+          <p:cNvPr id="11" name="Text 9"/>
+          <p:cNvSpPr/>
+          <p:nvPr/>
+        </p:nvSpPr>
+        <p:spPr>
+          <a:xfrm>
+            <a:off x="685800" y="3858768"/>
+            <a:ext cx="384048" cy="384048"/>
+          </a:xfrm>
+          <a:prstGeom prst="rect">
+            <a:avLst/>
+          </a:prstGeom>
+          <a:noFill/>
+          <a:ln/>
+        </p:spPr>
+        <p:txBody>
+          <a:bodyPr wrap="square" lIns="0" tIns="0" rIns="0" bIns="0" rtlCol="0" anchor="ctr"/>
+          <a:lstStyle/>
+          <a:p>
+            <a:pPr algn="ctr" indent="0" marL="0">
+              <a:buNone/>
+            </a:pPr>
+            <a:r>
+              <a:rPr lang="en-US" sz="1400" b="1" dirty="0">
+                <a:solidFill>
+                  <a:srgbClr val="FFFFFF"/>
+                </a:solidFill>
+                <a:latin typeface="Cambria" pitchFamily="34" charset="0"/>
+                <a:ea typeface="Cambria" pitchFamily="34" charset="-122"/>
+                <a:cs typeface="Cambria" pitchFamily="34" charset="-120"/>
+              </a:rPr>
+              <a:t>3</a:t>
+            </a:r>
+            <a:endParaRPr lang="en-US" sz="1400" dirty="0"/>
+          </a:p>
+        </p:txBody>
+      </p:sp>
+      <p:sp>
+        <p:nvSpPr>
+          <p:cNvPr id="12" name="Text 10"/>
+          <p:cNvSpPr/>
+          <p:nvPr/>
+        </p:nvSpPr>
+        <p:spPr>
+          <a:xfrm>
+            <a:off x="1280160" y="3785616"/>
+            <a:ext cx="6172200" cy="548640"/>
+          </a:xfrm>
+          <a:prstGeom prst="rect">
+            <a:avLst/>
+          </a:prstGeom>
+          <a:noFill/>
+          <a:ln/>
+        </p:spPr>
+        <p:txBody>
+          <a:bodyPr wrap="square" lIns="0" tIns="0" rIns="0" bIns="0" rtlCol="0" anchor="ctr"/>
+          <a:lstStyle/>
+          <a:p>
+            <a:pPr indent="0" marL="0">
+              <a:buNone/>
+            </a:pPr>
+            <a:r>
+              <a:rPr lang="en-US" sz="1600" dirty="0">
+                <a:solidFill>
+                  <a:srgbClr val="3E4C57"/>
+                </a:solidFill>
+                <a:latin typeface="Calibri" pitchFamily="34" charset="0"/>
+                <a:ea typeface="Calibri" pitchFamily="34" charset="-122"/>
+                <a:cs typeface="Calibri" pitchFamily="34" charset="-120"/>
+              </a:rPr>
+              <a:t>Ask A to start a punch between us and C. A gives C our address as A saw it. We send nothing.</a:t>
+            </a:r>
+            <a:endParaRPr lang="en-US" sz="1600" dirty="0"/>
+          </a:p>
+        </p:txBody>
+      </p:sp>
+      <p:sp>
+        <p:nvSpPr>
+          <p:cNvPr id="13" name="Shape 11"/>
+          <p:cNvSpPr/>
+          <p:nvPr/>
+        </p:nvSpPr>
+        <p:spPr>
+          <a:xfrm>
+            <a:off x="685800" y="4700016"/>
+            <a:ext cx="384048" cy="384048"/>
+          </a:xfrm>
+          <a:prstGeom prst="ellipse">
+            <a:avLst/>
+          </a:prstGeom>
+          <a:solidFill>
+            <a:srgbClr val="C25E28"/>
+          </a:solidFill>
+          <a:ln w="12700">
+            <a:solidFill>
+              <a:srgbClr val="C25E28"/>
+            </a:solidFill>
+            <a:prstDash val="solid"/>
+          </a:ln>
+        </p:spPr>
+      </p:sp>
+      <p:sp>
+        <p:nvSpPr>
+          <p:cNvPr id="14" name="Text 12"/>
+          <p:cNvSpPr/>
+          <p:nvPr/>
+        </p:nvSpPr>
+        <p:spPr>
+          <a:xfrm>
+            <a:off x="685800" y="4700016"/>
+            <a:ext cx="384048" cy="384048"/>
+          </a:xfrm>
+          <a:prstGeom prst="rect">
+            <a:avLst/>
+          </a:prstGeom>
+          <a:noFill/>
+          <a:ln/>
+        </p:spPr>
+        <p:txBody>
+          <a:bodyPr wrap="square" lIns="0" tIns="0" rIns="0" bIns="0" rtlCol="0" anchor="ctr"/>
+          <a:lstStyle/>
+          <a:p>
+            <a:pPr algn="ctr" indent="0" marL="0">
+              <a:buNone/>
+            </a:pPr>
+            <a:r>
+              <a:rPr lang="en-US" sz="1400" b="1" dirty="0">
+                <a:solidFill>
+                  <a:srgbClr val="FFFFFF"/>
+                </a:solidFill>
+                <a:latin typeface="Cambria" pitchFamily="34" charset="0"/>
+                <a:ea typeface="Cambria" pitchFamily="34" charset="-122"/>
+                <a:cs typeface="Cambria" pitchFamily="34" charset="-120"/>
+              </a:rPr>
+              <a:t>4</a:t>
+            </a:r>
+            <a:endParaRPr lang="en-US" sz="1400" dirty="0"/>
+          </a:p>
+        </p:txBody>
+      </p:sp>
+      <p:sp>
+        <p:nvSpPr>
+          <p:cNvPr id="15" name="Text 13"/>
+          <p:cNvSpPr/>
+          <p:nvPr/>
+        </p:nvSpPr>
+        <p:spPr>
+          <a:xfrm>
+            <a:off x="1280160" y="4626864"/>
+            <a:ext cx="6172200" cy="548640"/>
+          </a:xfrm>
+          <a:prstGeom prst="rect">
+            <a:avLst/>
+          </a:prstGeom>
+          <a:noFill/>
+          <a:ln/>
+        </p:spPr>
+        <p:txBody>
+          <a:bodyPr wrap="square" lIns="0" tIns="0" rIns="0" bIns="0" rtlCol="0" anchor="ctr"/>
+          <a:lstStyle/>
+          <a:p>
+            <a:pPr indent="0" marL="0">
+              <a:buNone/>
+            </a:pPr>
+            <a:r>
+              <a:rPr lang="en-US" sz="1600" dirty="0">
+                <a:solidFill>
+                  <a:srgbClr val="3E4C57"/>
+                </a:solidFill>
+                <a:latin typeface="Calibri" pitchFamily="34" charset="0"/>
+                <a:ea typeface="Calibri" pitchFamily="34" charset="-122"/>
+                <a:cs typeface="Calibri" pitchFamily="34" charset="-120"/>
+              </a:rPr>
+              <a:t>C’s punch packets, carrying its key, arrive: anyone can reach us. Not after retries: filtering is endpoint-dependent.</a:t>
+            </a:r>
+            <a:endParaRPr lang="en-US" sz="1600" dirty="0"/>
+          </a:p>
+        </p:txBody>
+      </p:sp>
+      <p:sp>
+        <p:nvSpPr>
+          <p:cNvPr id="16" name="Shape 14"/>
+          <p:cNvSpPr/>
+          <p:nvPr/>
+        </p:nvSpPr>
+        <p:spPr>
+          <a:xfrm>
+            <a:off x="685800" y="5541264"/>
+            <a:ext cx="384048" cy="384048"/>
+          </a:xfrm>
+          <a:prstGeom prst="ellipse">
+            <a:avLst/>
+          </a:prstGeom>
+          <a:solidFill>
+            <a:srgbClr val="C25E28"/>
+          </a:solidFill>
+          <a:ln w="12700">
+            <a:solidFill>
+              <a:srgbClr val="C25E28"/>
+            </a:solidFill>
+            <a:prstDash val="solid"/>
+          </a:ln>
+        </p:spPr>
+      </p:sp>
+      <p:sp>
+        <p:nvSpPr>
+          <p:cNvPr id="17" name="Text 15"/>
+          <p:cNvSpPr/>
+          <p:nvPr/>
+        </p:nvSpPr>
+        <p:spPr>
+          <a:xfrm>
+            <a:off x="685800" y="5541264"/>
+            <a:ext cx="384048" cy="384048"/>
+          </a:xfrm>
+          <a:prstGeom prst="rect">
+            <a:avLst/>
+          </a:prstGeom>
+          <a:noFill/>
+          <a:ln/>
+        </p:spPr>
+        <p:txBody>
+          <a:bodyPr wrap="square" lIns="0" tIns="0" rIns="0" bIns="0" rtlCol="0" anchor="ctr"/>
+          <a:lstStyle/>
+          <a:p>
+            <a:pPr algn="ctr" indent="0" marL="0">
+              <a:buNone/>
+            </a:pPr>
+            <a:r>
+              <a:rPr lang="en-US" sz="1400" b="1" dirty="0">
+                <a:solidFill>
+                  <a:srgbClr val="FFFFFF"/>
+                </a:solidFill>
+                <a:latin typeface="Cambria" pitchFamily="34" charset="0"/>
+                <a:ea typeface="Cambria" pitchFamily="34" charset="-122"/>
+                <a:cs typeface="Cambria" pitchFamily="34" charset="-120"/>
+              </a:rPr>
+              <a:t>5</a:t>
+            </a:r>
+            <a:endParaRPr lang="en-US" sz="1400" dirty="0"/>
+          </a:p>
+        </p:txBody>
+      </p:sp>
+      <p:sp>
+        <p:nvSpPr>
+          <p:cNvPr id="18" name="Text 16"/>
+          <p:cNvSpPr/>
+          <p:nvPr/>
+        </p:nvSpPr>
+        <p:spPr>
+          <a:xfrm>
+            <a:off x="1280160" y="5468112"/>
+            <a:ext cx="6172200" cy="548640"/>
+          </a:xfrm>
+          <a:prstGeom prst="rect">
+            <a:avLst/>
+          </a:prstGeom>
+          <a:noFill/>
+          <a:ln/>
+        </p:spPr>
+        <p:txBody>
+          <a:bodyPr wrap="square" lIns="0" tIns="0" rIns="0" bIns="0" rtlCol="0" anchor="ctr"/>
+          <a:lstStyle/>
+          <a:p>
+            <a:pPr indent="0" marL="0">
+              <a:buNone/>
+            </a:pPr>
+            <a:r>
+              <a:rPr lang="en-US" sz="1600" dirty="0">
+                <a:solidFill>
+                  <a:srgbClr val="3E4C57"/>
+                </a:solidFill>
+                <a:latin typeface="Calibri" pitchFamily="34" charset="0"/>
+                <a:ea typeface="Calibri" pitchFamily="34" charset="-122"/>
+                <a:cs typeface="Calibri" pitchFamily="34" charset="-120"/>
+              </a:rPr>
+              <a:t>A and B saw one port: mapping is endpoint-independent. Two ports: endpoint-dependent.</a:t>
+            </a:r>
+            <a:endParaRPr lang="en-US" sz="1600" dirty="0"/>
+          </a:p>
+        </p:txBody>
+      </p:sp>
+      <p:sp>
+        <p:nvSpPr>
+          <p:cNvPr id="19" name="Shape 17"/>
+          <p:cNvSpPr/>
+          <p:nvPr/>
+        </p:nvSpPr>
+        <p:spPr>
+          <a:xfrm>
+            <a:off x="8275320" y="2103120"/>
+            <a:ext cx="3200400" cy="822960"/>
           </a:xfrm>
           <a:prstGeom prst="roundRect">
             <a:avLst>
-              <a:gd name="adj" fmla="val 6316"/>
+              <a:gd name="adj" fmla="val 6667"/>
+            </a:avLst>
+          </a:prstGeom>
+          <a:solidFill>
+            <a:srgbClr val="EEF3F4"/>
+          </a:solidFill>
+          <a:ln w="16510">
+            <a:solidFill>
+              <a:srgbClr val="25323F"/>
+            </a:solidFill>
+            <a:prstDash val="solid"/>
+          </a:ln>
+        </p:spPr>
+      </p:sp>
+      <p:sp>
+        <p:nvSpPr>
+          <p:cNvPr id="20" name="Text 18"/>
+          <p:cNvSpPr/>
+          <p:nvPr/>
+        </p:nvSpPr>
+        <p:spPr>
+          <a:xfrm>
+            <a:off x="8412480" y="2212848"/>
+            <a:ext cx="2926080" cy="292608"/>
+          </a:xfrm>
+          <a:prstGeom prst="rect">
+            <a:avLst/>
+          </a:prstGeom>
+          <a:noFill/>
+          <a:ln/>
+        </p:spPr>
+        <p:txBody>
+          <a:bodyPr wrap="square" lIns="0" tIns="0" rIns="0" bIns="0" rtlCol="0" anchor="ctr"/>
+          <a:lstStyle/>
+          <a:p>
+            <a:pPr indent="0" marL="0">
+              <a:buNone/>
+            </a:pPr>
+            <a:r>
+              <a:rPr lang="en-US" sz="1500" b="1" dirty="0">
+                <a:solidFill>
+                  <a:srgbClr val="16202A"/>
+                </a:solidFill>
+                <a:latin typeface="Cambria" pitchFamily="34" charset="0"/>
+                <a:ea typeface="Cambria" pitchFamily="34" charset="-122"/>
+                <a:cs typeface="Cambria" pitchFamily="34" charset="-120"/>
+              </a:rPr>
+              <a:t>Probe</a:t>
+            </a:r>
+            <a:endParaRPr lang="en-US" sz="1500" dirty="0"/>
+          </a:p>
+        </p:txBody>
+      </p:sp>
+      <p:sp>
+        <p:nvSpPr>
+          <p:cNvPr id="21" name="Text 19"/>
+          <p:cNvSpPr/>
+          <p:nvPr/>
+        </p:nvSpPr>
+        <p:spPr>
+          <a:xfrm>
+            <a:off x="8412480" y="2523744"/>
+            <a:ext cx="2926080" cy="274320"/>
+          </a:xfrm>
+          <a:prstGeom prst="rect">
+            <a:avLst/>
+          </a:prstGeom>
+          <a:noFill/>
+          <a:ln/>
+        </p:spPr>
+        <p:txBody>
+          <a:bodyPr wrap="square" lIns="0" tIns="0" rIns="0" bIns="0" rtlCol="0" anchor="ctr"/>
+          <a:lstStyle/>
+          <a:p>
+            <a:pPr indent="0" marL="0">
+              <a:buNone/>
+            </a:pPr>
+            <a:r>
+              <a:rPr lang="en-US" sz="1150" dirty="0">
+                <a:solidFill>
+                  <a:srgbClr val="25323F"/>
+                </a:solidFill>
+                <a:latin typeface="Calibri" pitchFamily="34" charset="0"/>
+                <a:ea typeface="Calibri" pitchFamily="34" charset="-122"/>
+                <a:cs typeface="Calibri" pitchFamily="34" charset="-120"/>
+              </a:rPr>
+              <a:t>the phone under test</a:t>
+            </a:r>
+            <a:endParaRPr lang="en-US" sz="1150" dirty="0"/>
+          </a:p>
+        </p:txBody>
+      </p:sp>
+      <p:sp>
+        <p:nvSpPr>
+          <p:cNvPr id="22" name="Shape 20"/>
+          <p:cNvSpPr/>
+          <p:nvPr/>
+        </p:nvSpPr>
+        <p:spPr>
+          <a:xfrm>
+            <a:off x="8275320" y="3154680"/>
+            <a:ext cx="3200400" cy="822960"/>
+          </a:xfrm>
+          <a:prstGeom prst="roundRect">
+            <a:avLst>
+              <a:gd name="adj" fmla="val 6667"/>
             </a:avLst>
           </a:prstGeom>
           <a:solidFill>
@@ -4931,14 +4152,14 @@
       </p:sp>
       <p:sp>
         <p:nvSpPr>
-          <p:cNvPr id="8" name="Text 6"/>
-          <p:cNvSpPr/>
-          <p:nvPr/>
-        </p:nvSpPr>
-        <p:spPr>
-          <a:xfrm>
-            <a:off x="8412480" y="2093976"/>
-            <a:ext cx="2743200" cy="292608"/>
+          <p:cNvPr id="23" name="Text 21"/>
+          <p:cNvSpPr/>
+          <p:nvPr/>
+        </p:nvSpPr>
+        <p:spPr>
+          <a:xfrm>
+            <a:off x="8412480" y="3264408"/>
+            <a:ext cx="2926080" cy="292608"/>
           </a:xfrm>
           <a:prstGeom prst="rect">
             <a:avLst/>
@@ -4970,14 +4191,14 @@
       </p:sp>
       <p:sp>
         <p:nvSpPr>
-          <p:cNvPr id="9" name="Text 7"/>
-          <p:cNvSpPr/>
-          <p:nvPr/>
-        </p:nvSpPr>
-        <p:spPr>
-          <a:xfrm>
-            <a:off x="8412480" y="2404872"/>
-            <a:ext cx="2743200" cy="274320"/>
+          <p:cNvPr id="24" name="Text 22"/>
+          <p:cNvSpPr/>
+          <p:nvPr/>
+        </p:nvSpPr>
+        <p:spPr>
+          <a:xfrm>
+            <a:off x="8412480" y="3575304"/>
+            <a:ext cx="2926080" cy="274320"/>
           </a:xfrm>
           <a:prstGeom prst="rect">
             <a:avLst/>
@@ -5001,7 +4222,7 @@
                 <a:ea typeface="Calibri" pitchFamily="34" charset="-122"/>
                 <a:cs typeface="Calibri" pitchFamily="34" charset="-120"/>
               </a:rPr>
-              <a:t>session open</a:t>
+              <a:t>linked, well-connected; reports, signals</a:t>
             </a:r>
             <a:endParaRPr lang="en-US" sz="1150" dirty="0"/>
           </a:p>
@@ -5009,42 +4230,18 @@
       </p:sp>
       <p:sp>
         <p:nvSpPr>
-          <p:cNvPr id="10" name="Shape 8"/>
-          <p:cNvSpPr/>
-          <p:nvPr/>
-        </p:nvSpPr>
-        <p:spPr>
-          <a:xfrm flipV="1">
-            <a:off x="3337560" y="2400300"/>
-            <a:ext cx="4937760" cy="982980"/>
-          </a:xfrm>
-          <a:prstGeom prst="line">
-            <a:avLst/>
-          </a:prstGeom>
-          <a:noFill/>
-          <a:ln w="17780">
-            <a:solidFill>
-              <a:srgbClr val="0E7C86"/>
-            </a:solidFill>
-            <a:prstDash val="solid"/>
-            <a:headEnd type="triangle"/>
-          </a:ln>
-        </p:spPr>
-      </p:sp>
-      <p:sp>
-        <p:nvSpPr>
-          <p:cNvPr id="11" name="Shape 9"/>
-          <p:cNvSpPr/>
-          <p:nvPr/>
-        </p:nvSpPr>
-        <p:spPr>
-          <a:xfrm>
-            <a:off x="8275320" y="3063240"/>
-            <a:ext cx="3017520" cy="868680"/>
+          <p:cNvPr id="25" name="Shape 23"/>
+          <p:cNvSpPr/>
+          <p:nvPr/>
+        </p:nvSpPr>
+        <p:spPr>
+          <a:xfrm>
+            <a:off x="8275320" y="4206240"/>
+            <a:ext cx="3200400" cy="822960"/>
           </a:xfrm>
           <a:prstGeom prst="roundRect">
             <a:avLst>
-              <a:gd name="adj" fmla="val 6316"/>
+              <a:gd name="adj" fmla="val 6667"/>
             </a:avLst>
           </a:prstGeom>
           <a:solidFill>
@@ -5060,14 +4257,14 @@
       </p:sp>
       <p:sp>
         <p:nvSpPr>
-          <p:cNvPr id="12" name="Text 10"/>
-          <p:cNvSpPr/>
-          <p:nvPr/>
-        </p:nvSpPr>
-        <p:spPr>
-          <a:xfrm>
-            <a:off x="8412480" y="3191256"/>
-            <a:ext cx="2743200" cy="292608"/>
+          <p:cNvPr id="26" name="Text 24"/>
+          <p:cNvSpPr/>
+          <p:nvPr/>
+        </p:nvSpPr>
+        <p:spPr>
+          <a:xfrm>
+            <a:off x="8412480" y="4315968"/>
+            <a:ext cx="2926080" cy="292608"/>
           </a:xfrm>
           <a:prstGeom prst="rect">
             <a:avLst/>
@@ -5099,14 +4296,14 @@
       </p:sp>
       <p:sp>
         <p:nvSpPr>
-          <p:cNvPr id="13" name="Text 11"/>
-          <p:cNvSpPr/>
-          <p:nvPr/>
-        </p:nvSpPr>
-        <p:spPr>
-          <a:xfrm>
-            <a:off x="8412480" y="3502152"/>
-            <a:ext cx="2743200" cy="274320"/>
+          <p:cNvPr id="27" name="Text 25"/>
+          <p:cNvSpPr/>
+          <p:nvPr/>
+        </p:nvSpPr>
+        <p:spPr>
+          <a:xfrm>
+            <a:off x="8412480" y="4626864"/>
+            <a:ext cx="2926080" cy="274320"/>
           </a:xfrm>
           <a:prstGeom prst="rect">
             <a:avLst/>
@@ -5130,7 +4327,7 @@
                 <a:ea typeface="Calibri" pitchFamily="34" charset="-122"/>
                 <a:cs typeface="Calibri" pitchFamily="34" charset="-120"/>
               </a:rPr>
-              <a:t>new source port</a:t>
+              <a:t>linked, another address; reports</a:t>
             </a:r>
             <a:endParaRPr lang="en-US" sz="1150" dirty="0"/>
           </a:p>
@@ -5138,42 +4335,18 @@
       </p:sp>
       <p:sp>
         <p:nvSpPr>
-          <p:cNvPr id="14" name="Shape 12"/>
-          <p:cNvSpPr/>
-          <p:nvPr/>
-        </p:nvSpPr>
-        <p:spPr>
-          <a:xfrm>
-            <a:off x="3337560" y="3383280"/>
-            <a:ext cx="4937760" cy="114300"/>
-          </a:xfrm>
-          <a:prstGeom prst="line">
-            <a:avLst/>
-          </a:prstGeom>
-          <a:noFill/>
-          <a:ln w="17780">
-            <a:solidFill>
-              <a:srgbClr val="0E7C86"/>
-            </a:solidFill>
-            <a:prstDash val="solid"/>
-            <a:headEnd type="triangle"/>
-          </a:ln>
-        </p:spPr>
-      </p:sp>
-      <p:sp>
-        <p:nvSpPr>
-          <p:cNvPr id="15" name="Shape 13"/>
-          <p:cNvSpPr/>
-          <p:nvPr/>
-        </p:nvSpPr>
-        <p:spPr>
-          <a:xfrm>
-            <a:off x="8275320" y="4160520"/>
-            <a:ext cx="3017520" cy="868680"/>
+          <p:cNvPr id="28" name="Shape 26"/>
+          <p:cNvSpPr/>
+          <p:nvPr/>
+        </p:nvSpPr>
+        <p:spPr>
+          <a:xfrm>
+            <a:off x="8275320" y="5257800"/>
+            <a:ext cx="3200400" cy="822960"/>
           </a:xfrm>
           <a:prstGeom prst="roundRect">
             <a:avLst>
-              <a:gd name="adj" fmla="val 6316"/>
+              <a:gd name="adj" fmla="val 6667"/>
             </a:avLst>
           </a:prstGeom>
           <a:solidFill>
@@ -5189,14 +4362,14 @@
       </p:sp>
       <p:sp>
         <p:nvSpPr>
-          <p:cNvPr id="16" name="Text 14"/>
-          <p:cNvSpPr/>
-          <p:nvPr/>
-        </p:nvSpPr>
-        <p:spPr>
-          <a:xfrm>
-            <a:off x="8412480" y="4288536"/>
-            <a:ext cx="2743200" cy="292608"/>
+          <p:cNvPr id="29" name="Text 27"/>
+          <p:cNvSpPr/>
+          <p:nvPr/>
+        </p:nvSpPr>
+        <p:spPr>
+          <a:xfrm>
+            <a:off x="8412480" y="5367528"/>
+            <a:ext cx="2926080" cy="292608"/>
           </a:xfrm>
           <a:prstGeom prst="rect">
             <a:avLst/>
@@ -5228,14 +4401,14 @@
       </p:sp>
       <p:sp>
         <p:nvSpPr>
-          <p:cNvPr id="17" name="Text 15"/>
-          <p:cNvSpPr/>
-          <p:nvPr/>
-        </p:nvSpPr>
-        <p:spPr>
-          <a:xfrm>
-            <a:off x="8412480" y="4599432"/>
-            <a:ext cx="2743200" cy="274320"/>
+          <p:cNvPr id="30" name="Text 28"/>
+          <p:cNvSpPr/>
+          <p:nvPr/>
+        </p:nvSpPr>
+        <p:spPr>
+          <a:xfrm>
+            <a:off x="8412480" y="5678424"/>
+            <a:ext cx="2926080" cy="274320"/>
           </a:xfrm>
           <a:prstGeom prst="rect">
             <a:avLst/>
@@ -5259,264 +4432,9 @@
                 <a:ea typeface="Calibri" pitchFamily="34" charset="-122"/>
                 <a:cs typeface="Calibri" pitchFamily="34" charset="-120"/>
               </a:rPr>
-              <a:t>never contacted</a:t>
+              <a:t>no link; punches toward us</a:t>
             </a:r>
             <a:endParaRPr lang="en-US" sz="1150" dirty="0"/>
-          </a:p>
-        </p:txBody>
-      </p:sp>
-      <p:sp>
-        <p:nvSpPr>
-          <p:cNvPr id="18" name="Shape 16"/>
-          <p:cNvSpPr/>
-          <p:nvPr/>
-        </p:nvSpPr>
-        <p:spPr>
-          <a:xfrm>
-            <a:off x="3337560" y="3383280"/>
-            <a:ext cx="4937760" cy="1211580"/>
-          </a:xfrm>
-          <a:prstGeom prst="line">
-            <a:avLst/>
-          </a:prstGeom>
-          <a:noFill/>
-          <a:ln w="17780">
-            <a:solidFill>
-              <a:srgbClr val="C25E28"/>
-            </a:solidFill>
-            <a:prstDash val="solid"/>
-            <a:headEnd type="triangle"/>
-          </a:ln>
-        </p:spPr>
-      </p:sp>
-      <p:sp>
-        <p:nvSpPr>
-          <p:cNvPr id="19" name="Text 17"/>
-          <p:cNvSpPr/>
-          <p:nvPr/>
-        </p:nvSpPr>
-        <p:spPr>
-          <a:xfrm>
-            <a:off x="1051560" y="4069080"/>
-            <a:ext cx="2286000" cy="274320"/>
-          </a:xfrm>
-          <a:prstGeom prst="rect">
-            <a:avLst/>
-          </a:prstGeom>
-          <a:noFill/>
-          <a:ln/>
-        </p:spPr>
-        <p:txBody>
-          <a:bodyPr wrap="square" lIns="0" tIns="0" rIns="0" bIns="0" rtlCol="0" anchor="ctr"/>
-          <a:lstStyle/>
-          <a:p>
-            <a:pPr algn="ctr" indent="0" marL="0">
-              <a:buNone/>
-            </a:pPr>
-            <a:r>
-              <a:rPr lang="en-US" sz="1150" dirty="0">
-                <a:solidFill>
-                  <a:srgbClr val="6E7F8B"/>
-                </a:solidFill>
-                <a:latin typeface="Calibri" pitchFamily="34" charset="0"/>
-                <a:ea typeface="Calibri" pitchFamily="34" charset="-122"/>
-                <a:cs typeface="Calibri" pitchFamily="34" charset="-120"/>
-              </a:rPr>
-              <a:t>each dial-back carries the nonce</a:t>
-            </a:r>
-            <a:endParaRPr lang="en-US" sz="1150" dirty="0"/>
-          </a:p>
-        </p:txBody>
-      </p:sp>
-      <p:sp>
-        <p:nvSpPr>
-          <p:cNvPr id="20" name="Shape 18"/>
-          <p:cNvSpPr/>
-          <p:nvPr/>
-        </p:nvSpPr>
-        <p:spPr>
-          <a:xfrm>
-            <a:off x="685800" y="5376672"/>
-            <a:ext cx="118872" cy="118872"/>
-          </a:xfrm>
-          <a:prstGeom prst="ellipse">
-            <a:avLst/>
-          </a:prstGeom>
-          <a:solidFill>
-            <a:srgbClr val="0E7C86"/>
-          </a:solidFill>
-          <a:ln w="12700">
-            <a:solidFill>
-              <a:srgbClr val="0E7C86"/>
-            </a:solidFill>
-            <a:prstDash val="solid"/>
-          </a:ln>
-        </p:spPr>
-      </p:sp>
-      <p:sp>
-        <p:nvSpPr>
-          <p:cNvPr id="21" name="Text 19"/>
-          <p:cNvSpPr/>
-          <p:nvPr/>
-        </p:nvSpPr>
-        <p:spPr>
-          <a:xfrm>
-            <a:off x="1005840" y="5257800"/>
-            <a:ext cx="10469880" cy="384048"/>
-          </a:xfrm>
-          <a:prstGeom prst="rect">
-            <a:avLst/>
-          </a:prstGeom>
-          <a:noFill/>
-          <a:ln/>
-        </p:spPr>
-        <p:txBody>
-          <a:bodyPr wrap="square" lIns="0" tIns="0" rIns="0" bIns="0" rtlCol="0" anchor="ctr"/>
-          <a:lstStyle/>
-          <a:p>
-            <a:pPr indent="0" marL="0">
-              <a:buNone/>
-            </a:pPr>
-            <a:r>
-              <a:rPr lang="en-US" sz="1650" dirty="0">
-                <a:solidFill>
-                  <a:srgbClr val="3E4C57"/>
-                </a:solidFill>
-                <a:latin typeface="Calibri" pitchFamily="34" charset="0"/>
-                <a:ea typeface="Calibri" pitchFamily="34" charset="-122"/>
-                <a:cs typeface="Calibri" pitchFamily="34" charset="-120"/>
-              </a:rPr>
-              <a:t>Only friends. The probe asks each of them directly.</a:t>
-            </a:r>
-            <a:endParaRPr lang="en-US" sz="1650" dirty="0"/>
-          </a:p>
-        </p:txBody>
-      </p:sp>
-      <p:sp>
-        <p:nvSpPr>
-          <p:cNvPr id="22" name="Shape 20"/>
-          <p:cNvSpPr/>
-          <p:nvPr/>
-        </p:nvSpPr>
-        <p:spPr>
-          <a:xfrm>
-            <a:off x="685800" y="5779008"/>
-            <a:ext cx="118872" cy="118872"/>
-          </a:xfrm>
-          <a:prstGeom prst="ellipse">
-            <a:avLst/>
-          </a:prstGeom>
-          <a:solidFill>
-            <a:srgbClr val="0E7C86"/>
-          </a:solidFill>
-          <a:ln w="12700">
-            <a:solidFill>
-              <a:srgbClr val="0E7C86"/>
-            </a:solidFill>
-            <a:prstDash val="solid"/>
-          </a:ln>
-        </p:spPr>
-      </p:sp>
-      <p:sp>
-        <p:nvSpPr>
-          <p:cNvPr id="23" name="Text 21"/>
-          <p:cNvSpPr/>
-          <p:nvPr/>
-        </p:nvSpPr>
-        <p:spPr>
-          <a:xfrm>
-            <a:off x="1005840" y="5660136"/>
-            <a:ext cx="10469880" cy="384048"/>
-          </a:xfrm>
-          <a:prstGeom prst="rect">
-            <a:avLst/>
-          </a:prstGeom>
-          <a:noFill/>
-          <a:ln/>
-        </p:spPr>
-        <p:txBody>
-          <a:bodyPr wrap="square" lIns="0" tIns="0" rIns="0" bIns="0" rtlCol="0" anchor="ctr"/>
-          <a:lstStyle/>
-          <a:p>
-            <a:pPr indent="0" marL="0">
-              <a:buNone/>
-            </a:pPr>
-            <a:r>
-              <a:rPr lang="en-US" sz="1650" dirty="0">
-                <a:solidFill>
-                  <a:srgbClr val="3E4C57"/>
-                </a:solidFill>
-                <a:latin typeface="Calibri" pitchFamily="34" charset="0"/>
-                <a:ea typeface="Calibri" pitchFamily="34" charset="-122"/>
-                <a:cs typeface="Calibri" pitchFamily="34" charset="-120"/>
-              </a:rPr>
-              <a:t>They dial back from different addresses and ports.</a:t>
-            </a:r>
-            <a:endParaRPr lang="en-US" sz="1650" dirty="0"/>
-          </a:p>
-        </p:txBody>
-      </p:sp>
-      <p:sp>
-        <p:nvSpPr>
-          <p:cNvPr id="24" name="Shape 22"/>
-          <p:cNvSpPr/>
-          <p:nvPr/>
-        </p:nvSpPr>
-        <p:spPr>
-          <a:xfrm>
-            <a:off x="685800" y="6181344"/>
-            <a:ext cx="118872" cy="118872"/>
-          </a:xfrm>
-          <a:prstGeom prst="ellipse">
-            <a:avLst/>
-          </a:prstGeom>
-          <a:solidFill>
-            <a:srgbClr val="0E7C86"/>
-          </a:solidFill>
-          <a:ln w="12700">
-            <a:solidFill>
-              <a:srgbClr val="0E7C86"/>
-            </a:solidFill>
-            <a:prstDash val="solid"/>
-          </a:ln>
-        </p:spPr>
-      </p:sp>
-      <p:sp>
-        <p:nvSpPr>
-          <p:cNvPr id="25" name="Text 23"/>
-          <p:cNvSpPr/>
-          <p:nvPr/>
-        </p:nvSpPr>
-        <p:spPr>
-          <a:xfrm>
-            <a:off x="1005840" y="6062472"/>
-            <a:ext cx="10469880" cy="384048"/>
-          </a:xfrm>
-          <a:prstGeom prst="rect">
-            <a:avLst/>
-          </a:prstGeom>
-          <a:noFill/>
-          <a:ln/>
-        </p:spPr>
-        <p:txBody>
-          <a:bodyPr wrap="square" lIns="0" tIns="0" rIns="0" bIns="0" rtlCol="0" anchor="ctr"/>
-          <a:lstStyle/>
-          <a:p>
-            <a:pPr indent="0" marL="0">
-              <a:buNone/>
-            </a:pPr>
-            <a:r>
-              <a:rPr lang="en-US" sz="1650" dirty="0">
-                <a:solidFill>
-                  <a:srgbClr val="3E4C57"/>
-                </a:solidFill>
-                <a:latin typeface="Calibri" pitchFamily="34" charset="0"/>
-                <a:ea typeface="Calibri" pitchFamily="34" charset="-122"/>
-                <a:cs typeface="Calibri" pitchFamily="34" charset="-120"/>
-              </a:rPr>
-              <a:t>A nonce in each reply makes a fabricated dial-back impossible.</a:t>
-            </a:r>
-            <a:endParaRPr lang="en-US" sz="1650" dirty="0"/>
           </a:p>
         </p:txBody>
       </p:sp>
@@ -5631,7 +4549,7 @@
         </p:nvSpPr>
         <p:spPr>
           <a:xfrm>
-            <a:off x="685800" y="1965960"/>
+            <a:off x="6446520" y="1965960"/>
             <a:ext cx="5029200" cy="320040"/>
           </a:xfrm>
           <a:prstGeom prst="rect">
@@ -5656,7 +4574,7 @@
                 <a:ea typeface="Cambria" pitchFamily="34" charset="-122"/>
                 <a:cs typeface="Cambria" pitchFamily="34" charset="-120"/>
               </a:rPr>
-              <a:t>Reflect</a:t>
+              <a:t>Dial back</a:t>
             </a:r>
             <a:endParaRPr lang="en-US" sz="1900" dirty="0"/>
           </a:p>
@@ -5670,7 +4588,7 @@
         </p:nvSpPr>
         <p:spPr>
           <a:xfrm>
-            <a:off x="685800" y="2304288"/>
+            <a:off x="6446520" y="2304288"/>
             <a:ext cx="5029200" cy="274320"/>
           </a:xfrm>
           <a:prstGeom prst="rect">
@@ -5695,7 +4613,7 @@
                 <a:ea typeface="Calibri" pitchFamily="34" charset="-122"/>
                 <a:cs typeface="Calibri" pitchFamily="34" charset="-120"/>
               </a:rPr>
-              <a:t>each friend reports the source it observed</a:t>
+              <a:t>filtering: A tells C to punch toward us; we send nothing</a:t>
             </a:r>
             <a:endParaRPr lang="en-US" sz="1250" dirty="0"/>
           </a:p>
@@ -5709,7 +4627,7 @@
         </p:nvSpPr>
         <p:spPr>
           <a:xfrm>
-            <a:off x="548640" y="2715768"/>
+            <a:off x="6309360" y="2715768"/>
             <a:ext cx="5303520" cy="786384"/>
           </a:xfrm>
           <a:prstGeom prst="roundRect">
@@ -5736,7 +4654,7 @@
         </p:nvSpPr>
         <p:spPr>
           <a:xfrm>
-            <a:off x="685800" y="2788920"/>
+            <a:off x="6446520" y="2788920"/>
             <a:ext cx="2816352" cy="640080"/>
           </a:xfrm>
           <a:prstGeom prst="rect">
@@ -5761,7 +4679,7 @@
                 <a:ea typeface="Calibri" pitchFamily="34" charset="-122"/>
                 <a:cs typeface="Calibri" pitchFamily="34" charset="-120"/>
               </a:rPr>
-              <a:t>Same tuple from every friend</a:t>
+              <a:t>C’s packets arrive: anyone can reach us</a:t>
             </a:r>
             <a:endParaRPr lang="en-US" sz="1300" dirty="0"/>
           </a:p>
@@ -5775,7 +4693,7 @@
         </p:nvSpPr>
         <p:spPr>
           <a:xfrm>
-            <a:off x="3602736" y="2788920"/>
+            <a:off x="9363456" y="2788920"/>
             <a:ext cx="2112264" cy="640080"/>
           </a:xfrm>
           <a:prstGeom prst="rect">
@@ -5794,7 +4712,7 @@
             <a:r>
               <a:rPr lang="en-US" sz="1300" b="1" dirty="0">
                 <a:solidFill>
-                  <a:srgbClr val="0E7C86"/>
+                  <a:srgbClr val="C25E28"/>
                 </a:solidFill>
                 <a:latin typeface="Cambria" pitchFamily="34" charset="0"/>
                 <a:ea typeface="Cambria" pitchFamily="34" charset="-122"/>
@@ -5814,7 +4732,7 @@
         </p:nvSpPr>
         <p:spPr>
           <a:xfrm>
-            <a:off x="685800" y="3630168"/>
+            <a:off x="6446520" y="3630168"/>
             <a:ext cx="2816352" cy="640080"/>
           </a:xfrm>
           <a:prstGeom prst="rect">
@@ -5839,7 +4757,7 @@
                 <a:ea typeface="Calibri" pitchFamily="34" charset="-122"/>
                 <a:cs typeface="Calibri" pitchFamily="34" charset="-120"/>
               </a:rPr>
-              <a:t>Differs by friend address</a:t>
+              <a:t>They do not, after retries via more friends</a:t>
             </a:r>
             <a:endParaRPr lang="en-US" sz="1300" dirty="0"/>
           </a:p>
@@ -5853,7 +4771,7 @@
         </p:nvSpPr>
         <p:spPr>
           <a:xfrm>
-            <a:off x="3602736" y="3630168"/>
+            <a:off x="9363456" y="3630168"/>
             <a:ext cx="2112264" cy="640080"/>
           </a:xfrm>
           <a:prstGeom prst="rect">
@@ -5872,13 +4790,13 @@
             <a:r>
               <a:rPr lang="en-US" sz="1300" b="1" dirty="0">
                 <a:solidFill>
-                  <a:srgbClr val="0E7C86"/>
+                  <a:srgbClr val="C25E28"/>
                 </a:solidFill>
                 <a:latin typeface="Cambria" pitchFamily="34" charset="0"/>
                 <a:ea typeface="Cambria" pitchFamily="34" charset="-122"/>
                 <a:cs typeface="Cambria" pitchFamily="34" charset="-120"/>
               </a:rPr>
-              <a:t>address-dependent</a:t>
+              <a:t>endpoint-dependent</a:t>
             </a:r>
             <a:endParaRPr lang="en-US" sz="1300" dirty="0"/>
           </a:p>
@@ -5892,7 +4810,7 @@
         </p:nvSpPr>
         <p:spPr>
           <a:xfrm>
-            <a:off x="548640" y="4398264"/>
+            <a:off x="6309360" y="4398264"/>
             <a:ext cx="5303520" cy="786384"/>
           </a:xfrm>
           <a:prstGeom prst="roundRect">
@@ -5919,7 +4837,7 @@
         </p:nvSpPr>
         <p:spPr>
           <a:xfrm>
-            <a:off x="685800" y="4471416"/>
+            <a:off x="6446520" y="4471416"/>
             <a:ext cx="2816352" cy="640080"/>
           </a:xfrm>
           <a:prstGeom prst="rect">
@@ -5944,7 +4862,7 @@
                 <a:ea typeface="Calibri" pitchFamily="34" charset="-122"/>
                 <a:cs typeface="Calibri" pitchFamily="34" charset="-120"/>
               </a:rPr>
-              <a:t>Differs across two ports of one friend</a:t>
+              <a:t>A’s packet always arrives; it proves only the link</a:t>
             </a:r>
             <a:endParaRPr lang="en-US" sz="1300" dirty="0"/>
           </a:p>
@@ -5958,7 +4876,7 @@
         </p:nvSpPr>
         <p:spPr>
           <a:xfrm>
-            <a:off x="3602736" y="4471416"/>
+            <a:off x="9363456" y="4471416"/>
             <a:ext cx="2112264" cy="640080"/>
           </a:xfrm>
           <a:prstGeom prst="rect">
@@ -5977,13 +4895,13 @@
             <a:r>
               <a:rPr lang="en-US" sz="1300" b="1" dirty="0">
                 <a:solidFill>
-                  <a:srgbClr val="0E7C86"/>
+                  <a:srgbClr val="C25E28"/>
                 </a:solidFill>
                 <a:latin typeface="Cambria" pitchFamily="34" charset="0"/>
                 <a:ea typeface="Cambria" pitchFamily="34" charset="-122"/>
                 <a:cs typeface="Cambria" pitchFamily="34" charset="-120"/>
               </a:rPr>
-              <a:t>address-and-port-dependent</a:t>
+              <a:t>no verdict</a:t>
             </a:r>
             <a:endParaRPr lang="en-US" sz="1300" dirty="0"/>
           </a:p>
@@ -5997,7 +4915,7 @@
         </p:nvSpPr>
         <p:spPr>
           <a:xfrm>
-            <a:off x="6446520" y="1965960"/>
+            <a:off x="685800" y="1965960"/>
             <a:ext cx="5029200" cy="320040"/>
           </a:xfrm>
           <a:prstGeom prst="rect">
@@ -6022,7 +4940,7 @@
                 <a:ea typeface="Cambria" pitchFamily="34" charset="-122"/>
                 <a:cs typeface="Cambria" pitchFamily="34" charset="-120"/>
               </a:rPr>
-              <a:t>Dial back</a:t>
+              <a:t>Reflect</a:t>
             </a:r>
             <a:endParaRPr lang="en-US" sz="1900" dirty="0"/>
           </a:p>
@@ -6036,7 +4954,7 @@
         </p:nvSpPr>
         <p:spPr>
           <a:xfrm>
-            <a:off x="6446520" y="2304288"/>
+            <a:off x="685800" y="2304288"/>
             <a:ext cx="5029200" cy="274320"/>
           </a:xfrm>
           <a:prstGeom prst="rect">
@@ -6061,7 +4979,7 @@
                 <a:ea typeface="Calibri" pitchFamily="34" charset="-122"/>
                 <a:cs typeface="Calibri" pitchFamily="34" charset="-120"/>
               </a:rPr>
-              <a:t>three sources, each carrying the nonce</a:t>
+              <a:t>mapping: A and B report the port they saw us at</a:t>
             </a:r>
             <a:endParaRPr lang="en-US" sz="1250" dirty="0"/>
           </a:p>
@@ -6075,7 +4993,7 @@
         </p:nvSpPr>
         <p:spPr>
           <a:xfrm>
-            <a:off x="6309360" y="2715768"/>
+            <a:off x="548640" y="2715768"/>
             <a:ext cx="5303520" cy="786384"/>
           </a:xfrm>
           <a:prstGeom prst="roundRect">
@@ -6102,7 +5020,7 @@
         </p:nvSpPr>
         <p:spPr>
           <a:xfrm>
-            <a:off x="6446520" y="2788920"/>
+            <a:off x="685800" y="2788920"/>
             <a:ext cx="2816352" cy="640080"/>
           </a:xfrm>
           <a:prstGeom prst="rect">
@@ -6127,7 +5045,7 @@
                 <a:ea typeface="Calibri" pitchFamily="34" charset="-122"/>
                 <a:cs typeface="Calibri" pitchFamily="34" charset="-120"/>
               </a:rPr>
-              <a:t>Arrives from an uncontacted address</a:t>
+              <a:t>Both saw the same port</a:t>
             </a:r>
             <a:endParaRPr lang="en-US" sz="1300" dirty="0"/>
           </a:p>
@@ -6141,7 +5059,7 @@
         </p:nvSpPr>
         <p:spPr>
           <a:xfrm>
-            <a:off x="9363456" y="2788920"/>
+            <a:off x="3602736" y="2788920"/>
             <a:ext cx="2112264" cy="640080"/>
           </a:xfrm>
           <a:prstGeom prst="rect">
@@ -6160,7 +5078,7 @@
             <a:r>
               <a:rPr lang="en-US" sz="1300" b="1" dirty="0">
                 <a:solidFill>
-                  <a:srgbClr val="C25E28"/>
+                  <a:srgbClr val="0E7C86"/>
                 </a:solidFill>
                 <a:latin typeface="Cambria" pitchFamily="34" charset="0"/>
                 <a:ea typeface="Cambria" pitchFamily="34" charset="-122"/>
@@ -6180,7 +5098,7 @@
         </p:nvSpPr>
         <p:spPr>
           <a:xfrm>
-            <a:off x="6446520" y="3630168"/>
+            <a:off x="685800" y="3630168"/>
             <a:ext cx="2816352" cy="640080"/>
           </a:xfrm>
           <a:prstGeom prst="rect">
@@ -6205,7 +5123,7 @@
                 <a:ea typeface="Calibri" pitchFamily="34" charset="-122"/>
                 <a:cs typeface="Calibri" pitchFamily="34" charset="-120"/>
               </a:rPr>
-              <a:t>Only from a contacted address, new port</a:t>
+              <a:t>They saw different ports</a:t>
             </a:r>
             <a:endParaRPr lang="en-US" sz="1300" dirty="0"/>
           </a:p>
@@ -6219,7 +5137,7 @@
         </p:nvSpPr>
         <p:spPr>
           <a:xfrm>
-            <a:off x="9363456" y="3630168"/>
+            <a:off x="3602736" y="3630168"/>
             <a:ext cx="2112264" cy="640080"/>
           </a:xfrm>
           <a:prstGeom prst="rect">
@@ -6238,13 +5156,13 @@
             <a:r>
               <a:rPr lang="en-US" sz="1300" b="1" dirty="0">
                 <a:solidFill>
-                  <a:srgbClr val="C25E28"/>
+                  <a:srgbClr val="0E7C86"/>
                 </a:solidFill>
                 <a:latin typeface="Cambria" pitchFamily="34" charset="0"/>
                 <a:ea typeface="Cambria" pitchFamily="34" charset="-122"/>
                 <a:cs typeface="Cambria" pitchFamily="34" charset="-120"/>
               </a:rPr>
-              <a:t>address-dependent</a:t>
+              <a:t>endpoint-dependent</a:t>
             </a:r>
             <a:endParaRPr lang="en-US" sz="1300" dirty="0"/>
           </a:p>
@@ -6258,7 +5176,7 @@
         </p:nvSpPr>
         <p:spPr>
           <a:xfrm>
-            <a:off x="6309360" y="4398264"/>
+            <a:off x="548640" y="4398264"/>
             <a:ext cx="5303520" cy="786384"/>
           </a:xfrm>
           <a:prstGeom prst="roundRect">
@@ -6285,7 +5203,7 @@
         </p:nvSpPr>
         <p:spPr>
           <a:xfrm>
-            <a:off x="6446520" y="4471416"/>
+            <a:off x="685800" y="4471416"/>
             <a:ext cx="2816352" cy="640080"/>
           </a:xfrm>
           <a:prstGeom prst="rect">
@@ -6310,7 +5228,7 @@
                 <a:ea typeface="Calibri" pitchFamily="34" charset="-122"/>
                 <a:cs typeface="Calibri" pitchFamily="34" charset="-120"/>
               </a:rPr>
-              <a:t>Only from the contacted endpoint</a:t>
+              <a:t>Address- or port-dependent? One source per friend cannot tell</a:t>
             </a:r>
             <a:endParaRPr lang="en-US" sz="1300" dirty="0"/>
           </a:p>
@@ -6324,7 +5242,7 @@
         </p:nvSpPr>
         <p:spPr>
           <a:xfrm>
-            <a:off x="9363456" y="4471416"/>
+            <a:off x="3602736" y="4471416"/>
             <a:ext cx="2112264" cy="640080"/>
           </a:xfrm>
           <a:prstGeom prst="rect">
@@ -6343,13 +5261,13 @@
             <a:r>
               <a:rPr lang="en-US" sz="1300" b="1" dirty="0">
                 <a:solidFill>
-                  <a:srgbClr val="C25E28"/>
+                  <a:srgbClr val="0E7C86"/>
                 </a:solidFill>
                 <a:latin typeface="Cambria" pitchFamily="34" charset="0"/>
                 <a:ea typeface="Cambria" pitchFamily="34" charset="-122"/>
                 <a:cs typeface="Cambria" pitchFamily="34" charset="-120"/>
               </a:rPr>
-              <a:t>address-and-port-dependent</a:t>
+              <a:t>oracle only</a:t>
             </a:r>
             <a:endParaRPr lang="en-US" sz="1300" dirty="0"/>
           </a:p>
@@ -6364,16 +5282,16 @@
         <p:spPr>
           <a:xfrm>
             <a:off x="685800" y="5669280"/>
-            <a:ext cx="10789920" cy="365760"/>
-          </a:xfrm>
-          <a:prstGeom prst="rect">
-            <a:avLst/>
-          </a:prstGeom>
-          <a:noFill/>
-          <a:ln/>
-        </p:spPr>
-        <p:txBody>
-          <a:bodyPr wrap="square" lIns="0" tIns="0" rIns="0" bIns="0" rtlCol="0" anchor="ctr"/>
+            <a:ext cx="10789920" cy="548640"/>
+          </a:xfrm>
+          <a:prstGeom prst="rect">
+            <a:avLst/>
+          </a:prstGeom>
+          <a:noFill/>
+          <a:ln/>
+        </p:spPr>
+        <p:txBody>
+          <a:bodyPr wrap="square" lIns="0" tIns="0" rIns="0" bIns="0" rtlCol="0" anchor="t"/>
           <a:lstStyle/>
           <a:p>
             <a:pPr indent="0" marL="0">
@@ -6388,7 +5306,7 @@
                 <a:ea typeface="Calibri" pitchFamily="34" charset="-122"/>
                 <a:cs typeface="Calibri" pitchFamily="34" charset="-120"/>
               </a:rPr>
-              <a:t>Three friends with the right vantage points separate every class. More buy confidence against loss, not resolution.</a:t>
+              <a:t>Friends separate independent from dependent, the split autoNAT reports. The finer split needs the oracle.</a:t>
             </a:r>
             <a:endParaRPr lang="en-US" sz="1450" dirty="0"/>
           </a:p>
@@ -6452,7 +5370,7 @@
                 <a:ea typeface="Calibri" pitchFamily="34" charset="-122"/>
                 <a:cs typeface="Calibri" pitchFamily="34" charset="-120"/>
               </a:rPr>
-              <a:t>UNDER HONEST PEERS</a:t>
+              <a:t>A FALSE YES AND A FALSE NO</a:t>
             </a:r>
             <a:endParaRPr lang="en-US" sz="1100" dirty="0"/>
           </a:p>
@@ -6582,7 +5500,7 @@
                 <a:ea typeface="Cambria" pitchFamily="34" charset="-122"/>
                 <a:cs typeface="Cambria" pitchFamily="34" charset="-120"/>
               </a:rPr>
-              <a:t>Contamination</a:t>
+              <a:t>False yes: contamination</a:t>
             </a:r>
             <a:endParaRPr lang="en-US" sz="2000" dirty="0"/>
           </a:p>
@@ -6646,7 +5564,7 @@
                 <a:ea typeface="Calibri" pitchFamily="34" charset="-122"/>
                 <a:cs typeface="Calibri" pitchFamily="34" charset="-120"/>
               </a:rPr>
-              <a:t>Witnesses are the peers we already transmit to.</a:t>
+              <a:t>If we ever sent to C, our packets opened the hole.</a:t>
             </a:r>
             <a:endParaRPr lang="en-US" sz="1350" dirty="0"/>
           </a:p>
@@ -6710,7 +5628,7 @@
                 <a:ea typeface="Calibri" pitchFamily="34" charset="-122"/>
                 <a:cs typeface="Calibri" pitchFamily="34" charset="-120"/>
               </a:rPr>
-              <a:t>It measures our own mapping, not the NAT rule.</a:t>
+              <a:t>The normal punch sends from both sides. We send nothing.</a:t>
             </a:r>
             <a:endParaRPr lang="en-US" sz="1350" dirty="0"/>
           </a:p>
@@ -6774,7 +5692,7 @@
                 <a:ea typeface="Calibri" pitchFamily="34" charset="-122"/>
                 <a:cs typeface="Calibri" pitchFamily="34" charset="-120"/>
               </a:rPr>
-              <a:t>Guard: a per-test send history discards contacted sources.</a:t>
+              <a:t>Guard: log where we sent; ignore punches from there.</a:t>
             </a:r>
             <a:endParaRPr lang="en-US" sz="1350" dirty="0"/>
           </a:p>
@@ -6865,7 +5783,7 @@
                 <a:ea typeface="Cambria" pitchFamily="34" charset="-122"/>
                 <a:cs typeface="Cambria" pitchFamily="34" charset="-120"/>
               </a:rPr>
-              <a:t>Absent dial-backs</a:t>
+              <a:t>False no: loss</a:t>
             </a:r>
             <a:endParaRPr lang="en-US" sz="2000" dirty="0"/>
           </a:p>
@@ -6929,7 +5847,7 @@
                 <a:ea typeface="Calibri" pitchFamily="34" charset="-122"/>
                 <a:cs typeface="Calibri" pitchFamily="34" charset="-120"/>
               </a:rPr>
-              <a:t>An arriving dial-back is definitive: the path exists.</a:t>
+              <a:t>Arrival is proof. Absence is not: the packet may be lost.</a:t>
             </a:r>
             <a:endParaRPr lang="en-US" sz="1350" dirty="0"/>
           </a:p>
@@ -6993,7 +5911,7 @@
                 <a:ea typeface="Calibri" pitchFamily="34" charset="-122"/>
                 <a:cs typeface="Calibri" pitchFamily="34" charset="-120"/>
               </a:rPr>
-              <a:t>An absent one is filtering, or simply loss.</a:t>
+              <a:t>Or C was offline, or A did not pass the request on.</a:t>
             </a:r>
             <a:endParaRPr lang="en-US" sz="1350" dirty="0"/>
           </a:p>
@@ -7057,48 +5975,9 @@
                 <a:ea typeface="Calibri" pitchFamily="34" charset="-122"/>
                 <a:cs typeface="Calibri" pitchFamily="34" charset="-120"/>
               </a:rPr>
-              <a:t>Negative verdicts need retries and k witnesses.</a:t>
+              <a:t>Retry, then ask A for another C, before recording no.</a:t>
             </a:r>
             <a:endParaRPr lang="en-US" sz="1350" dirty="0"/>
-          </a:p>
-        </p:txBody>
-      </p:sp>
-      <p:sp>
-        <p:nvSpPr>
-          <p:cNvPr id="22" name="Text 20"/>
-          <p:cNvSpPr/>
-          <p:nvPr/>
-        </p:nvSpPr>
-        <p:spPr>
-          <a:xfrm>
-            <a:off x="685800" y="5120640"/>
-            <a:ext cx="10789920" cy="365760"/>
-          </a:xfrm>
-          <a:prstGeom prst="rect">
-            <a:avLst/>
-          </a:prstGeom>
-          <a:noFill/>
-          <a:ln/>
-        </p:spPr>
-        <p:txBody>
-          <a:bodyPr wrap="square" lIns="0" tIns="0" rIns="0" bIns="0" rtlCol="0" anchor="ctr"/>
-          <a:lstStyle/>
-          <a:p>
-            <a:pPr indent="0" marL="0">
-              <a:buNone/>
-            </a:pPr>
-            <a:r>
-              <a:rPr lang="en-US" sz="1500" i="1" dirty="0">
-                <a:solidFill>
-                  <a:srgbClr val="0A5A62"/>
-                </a:solidFill>
-                <a:latin typeface="Calibri" pitchFamily="34" charset="0"/>
-                <a:ea typeface="Calibri" pitchFamily="34" charset="-122"/>
-                <a:cs typeface="Calibri" pitchFamily="34" charset="-120"/>
-              </a:rPr>
-              <a:t>We assume peers are honest. Relaxing that assumption is follow-on work.</a:t>
-            </a:r>
-            <a:endParaRPr lang="en-US" sz="1500" dirty="0"/>
           </a:p>
         </p:txBody>
       </p:sp>
@@ -7329,7 +6208,7 @@
                 <a:ea typeface="Calibri" pitchFamily="34" charset="-122"/>
                 <a:cs typeface="Calibri" pitchFamily="34" charset="-120"/>
               </a:rPr>
-              <a:t>Our own handsets, on carrier and home paths.</a:t>
+              <a:t>Our own smartphones, on carrier and home paths.</a:t>
             </a:r>
             <a:endParaRPr lang="en-US" sz="1350" dirty="0"/>
           </a:p>
@@ -7393,7 +6272,7 @@
                 <a:ea typeface="Calibri" pitchFamily="34" charset="-122"/>
                 <a:cs typeface="Calibri" pitchFamily="34" charset="-120"/>
               </a:rPr>
-              <a:t>A stratum: one carrier, APN and PDN type.</a:t>
+              <a:t>A group: one carrier, one kind of plan.</a:t>
             </a:r>
             <a:endParaRPr lang="en-US" sz="1350" dirty="0"/>
           </a:p>
@@ -7457,7 +6336,7 @@
                 <a:ea typeface="Calibri" pitchFamily="34" charset="-122"/>
                 <a:cs typeface="Calibri" pitchFamily="34" charset="-120"/>
               </a:rPr>
-              <a:t>Two SIMs and two handset stacks per carrier.</a:t>
+              <a:t>Two SIMs and Android plus iOS per carrier.</a:t>
             </a:r>
             <a:endParaRPr lang="en-US" sz="1350" dirty="0"/>
           </a:p>
@@ -7587,7 +6466,7 @@
                 <a:ea typeface="Calibri" pitchFamily="34" charset="-122"/>
                 <a:cs typeface="Calibri" pitchFamily="34" charset="-120"/>
               </a:rPr>
-              <a:t>Oracle: two addresses, two ports, inbound UDP.</a:t>
+              <a:t>Oracle: a reference NAT-test server.</a:t>
             </a:r>
             <a:endParaRPr lang="en-US" sz="1350" dirty="0"/>
           </a:p>
@@ -7651,7 +6530,7 @@
                 <a:ea typeface="Calibri" pitchFamily="34" charset="-122"/>
                 <a:cs typeface="Calibri" pitchFamily="34" charset="-120"/>
               </a:rPr>
-              <a:t>Witnesses: small hosts on separate subnets.</a:t>
+              <a:t>Witnesses: small hosts, different networks.</a:t>
             </a:r>
             <a:endParaRPr lang="en-US" sz="1350" dirty="0"/>
           </a:p>
@@ -7715,661 +6594,9 @@
                 <a:ea typeface="Calibri" pitchFamily="34" charset="-122"/>
                 <a:cs typeface="Calibri" pitchFamily="34" charset="-120"/>
               </a:rPr>
-              <a:t>Bench: netfilter inside network namespaces.</a:t>
+              <a:t>Bench: fake NATs built on one Linux machine.</a:t>
             </a:r>
             <a:endParaRPr lang="en-US" sz="1350" dirty="0"/>
-          </a:p>
-        </p:txBody>
-      </p:sp>
-      <p:sp>
-        <p:nvSpPr>
-          <p:cNvPr id="20" name="Text 18"/>
-          <p:cNvSpPr/>
-          <p:nvPr/>
-        </p:nvSpPr>
-        <p:spPr>
-          <a:xfrm>
-            <a:off x="685800" y="5212080"/>
-            <a:ext cx="10789920" cy="365760"/>
-          </a:xfrm>
-          <a:prstGeom prst="rect">
-            <a:avLst/>
-          </a:prstGeom>
-          <a:noFill/>
-          <a:ln/>
-        </p:spPr>
-        <p:txBody>
-          <a:bodyPr wrap="square" lIns="0" tIns="0" rIns="0" bIns="0" rtlCol="0" anchor="ctr"/>
-          <a:lstStyle/>
-          <a:p>
-            <a:pPr indent="0" marL="0">
-              <a:buNone/>
-            </a:pPr>
-            <a:r>
-              <a:rPr lang="en-US" sz="1500" i="1" dirty="0">
-                <a:solidFill>
-                  <a:srgbClr val="0A5A62"/>
-                </a:solidFill>
-                <a:latin typeface="Calibri" pitchFamily="34" charset="0"/>
-                <a:ea typeface="Calibri" pitchFamily="34" charset="-122"/>
-                <a:cs typeface="Calibri" pitchFamily="34" charset="-120"/>
-              </a:rPr>
-              <a:t>A campus is a good place to stand outside a NAT and a poor subject to measure.</a:t>
-            </a:r>
-            <a:endParaRPr lang="en-US" sz="1500" dirty="0"/>
-          </a:p>
-        </p:txBody>
-      </p:sp>
-    </p:spTree>
-  </p:cSld>
-  <p:clrMapOvr>
-    <a:masterClrMapping/>
-  </p:clrMapOvr>
-</p:sld>
-</file>
-
-<file path=ppt/slides/slide9.xml><?xml version="1.0" encoding="utf-8"?>
-<p:sld xmlns:a="http://schemas.openxmlformats.org/drawingml/2006/main" xmlns:r="http://schemas.openxmlformats.org/officeDocument/2006/relationships" xmlns:p="http://schemas.openxmlformats.org/presentationml/2006/main">
-  <p:cSld name="Slide 9">
-    <p:spTree>
-      <p:nvGrpSpPr>
-        <p:cNvPr id="1" name=""/>
-        <p:cNvGrpSpPr/>
-        <p:nvPr/>
-      </p:nvGrpSpPr>
-      <p:grpSpPr>
-        <a:xfrm>
-          <a:off x="0" y="0"/>
-          <a:ext cx="0" cy="0"/>
-          <a:chOff x="0" y="0"/>
-          <a:chExt cx="0" cy="0"/>
-        </a:xfrm>
-      </p:grpSpPr>
-      <p:sp>
-        <p:nvSpPr>
-          <p:cNvPr id="2" name="Text 0"/>
-          <p:cNvSpPr/>
-          <p:nvPr/>
-        </p:nvSpPr>
-        <p:spPr>
-          <a:xfrm>
-            <a:off x="685800" y="502920"/>
-            <a:ext cx="10789920" cy="274320"/>
-          </a:xfrm>
-          <a:prstGeom prst="rect">
-            <a:avLst/>
-          </a:prstGeom>
-          <a:noFill/>
-          <a:ln/>
-        </p:spPr>
-        <p:txBody>
-          <a:bodyPr wrap="square" lIns="0" tIns="0" rIns="0" bIns="0" rtlCol="0" anchor="ctr"/>
-          <a:lstStyle/>
-          <a:p>
-            <a:pPr indent="0" marL="0">
-              <a:buNone/>
-            </a:pPr>
-            <a:r>
-              <a:rPr lang="en-US" sz="1100" b="1" spc="200" kern="0" dirty="0">
-                <a:solidFill>
-                  <a:srgbClr val="0E7C86"/>
-                </a:solidFill>
-                <a:latin typeface="Calibri" pitchFamily="34" charset="0"/>
-                <a:ea typeface="Calibri" pitchFamily="34" charset="-122"/>
-                <a:cs typeface="Calibri" pitchFamily="34" charset="-120"/>
-              </a:rPr>
-              <a:t>SEQUENCE</a:t>
-            </a:r>
-            <a:endParaRPr lang="en-US" sz="1100" dirty="0"/>
-          </a:p>
-        </p:txBody>
-      </p:sp>
-      <p:sp>
-        <p:nvSpPr>
-          <p:cNvPr id="3" name="Text 1"/>
-          <p:cNvSpPr/>
-          <p:nvPr/>
-        </p:nvSpPr>
-        <p:spPr>
-          <a:xfrm>
-            <a:off x="685800" y="804672"/>
-            <a:ext cx="10789920" cy="822960"/>
-          </a:xfrm>
-          <a:prstGeom prst="rect">
-            <a:avLst/>
-          </a:prstGeom>
-          <a:noFill/>
-          <a:ln/>
-        </p:spPr>
-        <p:txBody>
-          <a:bodyPr wrap="square" lIns="0" tIns="0" rIns="0" bIns="0" rtlCol="0" anchor="ctr"/>
-          <a:lstStyle/>
-          <a:p>
-            <a:pPr indent="0" marL="0">
-              <a:buNone/>
-            </a:pPr>
-            <a:r>
-              <a:rPr lang="en-US" sz="3600" b="1" dirty="0">
-                <a:solidFill>
-                  <a:srgbClr val="16202A"/>
-                </a:solidFill>
-                <a:latin typeface="Cambria" pitchFamily="34" charset="0"/>
-                <a:ea typeface="Cambria" pitchFamily="34" charset="-122"/>
-                <a:cs typeface="Cambria" pitchFamily="34" charset="-120"/>
-              </a:rPr>
-              <a:t>One semester</a:t>
-            </a:r>
-            <a:endParaRPr lang="en-US" sz="3600" dirty="0"/>
-          </a:p>
-        </p:txBody>
-      </p:sp>
-      <p:sp>
-        <p:nvSpPr>
-          <p:cNvPr id="4" name="Shape 2"/>
-          <p:cNvSpPr/>
-          <p:nvPr/>
-        </p:nvSpPr>
-        <p:spPr>
-          <a:xfrm>
-            <a:off x="685800" y="2377440"/>
-            <a:ext cx="2286000" cy="914400"/>
-          </a:xfrm>
-          <a:prstGeom prst="roundRect">
-            <a:avLst>
-              <a:gd name="adj" fmla="val 6000"/>
-            </a:avLst>
-          </a:prstGeom>
-          <a:solidFill>
-            <a:srgbClr val="0E7C86"/>
-          </a:solidFill>
-          <a:ln w="12700">
-            <a:solidFill>
-              <a:srgbClr val="0E7C86"/>
-            </a:solidFill>
-            <a:prstDash val="solid"/>
-          </a:ln>
-        </p:spPr>
-      </p:sp>
-      <p:sp>
-        <p:nvSpPr>
-          <p:cNvPr id="5" name="Text 3"/>
-          <p:cNvSpPr/>
-          <p:nvPr/>
-        </p:nvSpPr>
-        <p:spPr>
-          <a:xfrm>
-            <a:off x="685800" y="2377440"/>
-            <a:ext cx="2286000" cy="914400"/>
-          </a:xfrm>
-          <a:prstGeom prst="rect">
-            <a:avLst/>
-          </a:prstGeom>
-          <a:noFill/>
-          <a:ln/>
-        </p:spPr>
-        <p:txBody>
-          <a:bodyPr wrap="square" lIns="0" tIns="0" rIns="0" bIns="0" rtlCol="0" anchor="ctr"/>
-          <a:lstStyle/>
-          <a:p>
-            <a:pPr algn="ctr" indent="0" marL="0">
-              <a:buNone/>
-            </a:pPr>
-            <a:r>
-              <a:rPr lang="en-US" sz="1600" b="1" dirty="0">
-                <a:solidFill>
-                  <a:srgbClr val="FFFFFF"/>
-                </a:solidFill>
-                <a:latin typeface="Cambria" pitchFamily="34" charset="0"/>
-                <a:ea typeface="Cambria" pitchFamily="34" charset="-122"/>
-                <a:cs typeface="Cambria" pitchFamily="34" charset="-120"/>
-              </a:rPr>
-              <a:t>Weeks 1–3</a:t>
-            </a:r>
-            <a:endParaRPr lang="en-US" sz="1600" dirty="0"/>
-          </a:p>
-        </p:txBody>
-      </p:sp>
-      <p:sp>
-        <p:nvSpPr>
-          <p:cNvPr id="6" name="Text 4"/>
-          <p:cNvSpPr/>
-          <p:nvPr/>
-        </p:nvSpPr>
-        <p:spPr>
-          <a:xfrm>
-            <a:off x="3337560" y="2377440"/>
-            <a:ext cx="5669280" cy="914400"/>
-          </a:xfrm>
-          <a:prstGeom prst="rect">
-            <a:avLst/>
-          </a:prstGeom>
-          <a:noFill/>
-          <a:ln/>
-        </p:spPr>
-        <p:txBody>
-          <a:bodyPr wrap="square" lIns="0" tIns="0" rIns="0" bIns="0" rtlCol="0" anchor="ctr"/>
-          <a:lstStyle/>
-          <a:p>
-            <a:pPr indent="0" marL="0">
-              <a:buNone/>
-            </a:pPr>
-            <a:r>
-              <a:rPr lang="en-US" sz="1600" dirty="0">
-                <a:solidFill>
-                  <a:srgbClr val="3E4C57"/>
-                </a:solidFill>
-                <a:latin typeface="Calibri" pitchFamily="34" charset="0"/>
-                <a:ea typeface="Calibri" pitchFamily="34" charset="-122"/>
-                <a:cs typeface="Calibri" pitchFamily="34" charset="-120"/>
-              </a:rPr>
-              <a:t>Onboarding; a STUN client on the transport’s own socket.</a:t>
-            </a:r>
-            <a:endParaRPr lang="en-US" sz="1600" dirty="0"/>
-          </a:p>
-        </p:txBody>
-      </p:sp>
-      <p:sp>
-        <p:nvSpPr>
-          <p:cNvPr id="7" name="Text 5"/>
-          <p:cNvSpPr/>
-          <p:nvPr/>
-        </p:nvSpPr>
-        <p:spPr>
-          <a:xfrm>
-            <a:off x="9189720" y="2377440"/>
-            <a:ext cx="2286000" cy="914400"/>
-          </a:xfrm>
-          <a:prstGeom prst="rect">
-            <a:avLst/>
-          </a:prstGeom>
-          <a:noFill/>
-          <a:ln/>
-        </p:spPr>
-        <p:txBody>
-          <a:bodyPr wrap="square" lIns="0" tIns="0" rIns="0" bIns="0" rtlCol="0" anchor="ctr"/>
-          <a:lstStyle/>
-          <a:p>
-            <a:pPr algn="r" indent="0" marL="0">
-              <a:buNone/>
-            </a:pPr>
-            <a:r>
-              <a:rPr lang="en-US" sz="1300" i="1" dirty="0">
-                <a:solidFill>
-                  <a:srgbClr val="6E7F8B"/>
-                </a:solidFill>
-                <a:latin typeface="Calibri" pitchFamily="34" charset="0"/>
-                <a:ea typeface="Calibri" pitchFamily="34" charset="-122"/>
-                <a:cs typeface="Calibri" pitchFamily="34" charset="-120"/>
-              </a:rPr>
-              <a:t>go/no-go checkpoint</a:t>
-            </a:r>
-            <a:endParaRPr lang="en-US" sz="1300" dirty="0"/>
-          </a:p>
-        </p:txBody>
-      </p:sp>
-      <p:sp>
-        <p:nvSpPr>
-          <p:cNvPr id="8" name="Shape 6"/>
-          <p:cNvSpPr/>
-          <p:nvPr/>
-        </p:nvSpPr>
-        <p:spPr>
-          <a:xfrm>
-            <a:off x="685800" y="3566160"/>
-            <a:ext cx="2286000" cy="914400"/>
-          </a:xfrm>
-          <a:prstGeom prst="roundRect">
-            <a:avLst>
-              <a:gd name="adj" fmla="val 6000"/>
-            </a:avLst>
-          </a:prstGeom>
-          <a:solidFill>
-            <a:srgbClr val="0E7C86"/>
-          </a:solidFill>
-          <a:ln w="12700">
-            <a:solidFill>
-              <a:srgbClr val="0E7C86"/>
-            </a:solidFill>
-            <a:prstDash val="solid"/>
-          </a:ln>
-        </p:spPr>
-      </p:sp>
-      <p:sp>
-        <p:nvSpPr>
-          <p:cNvPr id="9" name="Text 7"/>
-          <p:cNvSpPr/>
-          <p:nvPr/>
-        </p:nvSpPr>
-        <p:spPr>
-          <a:xfrm>
-            <a:off x="685800" y="3566160"/>
-            <a:ext cx="2286000" cy="914400"/>
-          </a:xfrm>
-          <a:prstGeom prst="rect">
-            <a:avLst/>
-          </a:prstGeom>
-          <a:noFill/>
-          <a:ln/>
-        </p:spPr>
-        <p:txBody>
-          <a:bodyPr wrap="square" lIns="0" tIns="0" rIns="0" bIns="0" rtlCol="0" anchor="ctr"/>
-          <a:lstStyle/>
-          <a:p>
-            <a:pPr algn="ctr" indent="0" marL="0">
-              <a:buNone/>
-            </a:pPr>
-            <a:r>
-              <a:rPr lang="en-US" sz="1600" b="1" dirty="0">
-                <a:solidFill>
-                  <a:srgbClr val="FFFFFF"/>
-                </a:solidFill>
-                <a:latin typeface="Cambria" pitchFamily="34" charset="0"/>
-                <a:ea typeface="Cambria" pitchFamily="34" charset="-122"/>
-                <a:cs typeface="Cambria" pitchFamily="34" charset="-120"/>
-              </a:rPr>
-              <a:t>Weeks 4–10</a:t>
-            </a:r>
-            <a:endParaRPr lang="en-US" sz="1600" dirty="0"/>
-          </a:p>
-        </p:txBody>
-      </p:sp>
-      <p:sp>
-        <p:nvSpPr>
-          <p:cNvPr id="10" name="Text 8"/>
-          <p:cNvSpPr/>
-          <p:nvPr/>
-        </p:nvSpPr>
-        <p:spPr>
-          <a:xfrm>
-            <a:off x="3337560" y="3566160"/>
-            <a:ext cx="5669280" cy="914400"/>
-          </a:xfrm>
-          <a:prstGeom prst="rect">
-            <a:avLst/>
-          </a:prstGeom>
-          <a:noFill/>
-          <a:ln/>
-        </p:spPr>
-        <p:txBody>
-          <a:bodyPr wrap="square" lIns="0" tIns="0" rIns="0" bIns="0" rtlCol="0" anchor="ctr"/>
-          <a:lstStyle/>
-          <a:p>
-            <a:pPr indent="0" marL="0">
-              <a:buNone/>
-            </a:pPr>
-            <a:r>
-              <a:rPr lang="en-US" sz="1600" dirty="0">
-                <a:solidFill>
-                  <a:srgbClr val="3E4C57"/>
-                </a:solidFill>
-                <a:latin typeface="Calibri" pitchFamily="34" charset="0"/>
-                <a:ea typeface="Calibri" pitchFamily="34" charset="-122"/>
-                <a:cs typeface="Calibri" pitchFamily="34" charset="-120"/>
-              </a:rPr>
-              <a:t>The oracle and labeled bench; then the protocol and its classifier.</a:t>
-            </a:r>
-            <a:endParaRPr lang="en-US" sz="1600" dirty="0"/>
-          </a:p>
-        </p:txBody>
-      </p:sp>
-      <p:sp>
-        <p:nvSpPr>
-          <p:cNvPr id="11" name="Text 9"/>
-          <p:cNvSpPr/>
-          <p:nvPr/>
-        </p:nvSpPr>
-        <p:spPr>
-          <a:xfrm>
-            <a:off x="9189720" y="3566160"/>
-            <a:ext cx="2286000" cy="914400"/>
-          </a:xfrm>
-          <a:prstGeom prst="rect">
-            <a:avLst/>
-          </a:prstGeom>
-          <a:noFill/>
-          <a:ln/>
-        </p:spPr>
-        <p:txBody>
-          <a:bodyPr wrap="square" lIns="0" tIns="0" rIns="0" bIns="0" rtlCol="0" anchor="ctr"/>
-          <a:lstStyle/>
-          <a:p>
-            <a:pPr algn="r" indent="0" marL="0">
-              <a:buNone/>
-            </a:pPr>
-            <a:r>
-              <a:rPr lang="en-US" sz="1300" i="1" dirty="0">
-                <a:solidFill>
-                  <a:srgbClr val="6E7F8B"/>
-                </a:solidFill>
-                <a:latin typeface="Calibri" pitchFamily="34" charset="0"/>
-                <a:ea typeface="Calibri" pitchFamily="34" charset="-122"/>
-                <a:cs typeface="Calibri" pitchFamily="34" charset="-120"/>
-              </a:rPr>
-              <a:t>labels known by construction</a:t>
-            </a:r>
-            <a:endParaRPr lang="en-US" sz="1300" dirty="0"/>
-          </a:p>
-        </p:txBody>
-      </p:sp>
-      <p:sp>
-        <p:nvSpPr>
-          <p:cNvPr id="12" name="Shape 10"/>
-          <p:cNvSpPr/>
-          <p:nvPr/>
-        </p:nvSpPr>
-        <p:spPr>
-          <a:xfrm>
-            <a:off x="685800" y="4754880"/>
-            <a:ext cx="2286000" cy="914400"/>
-          </a:xfrm>
-          <a:prstGeom prst="roundRect">
-            <a:avLst>
-              <a:gd name="adj" fmla="val 6000"/>
-            </a:avLst>
-          </a:prstGeom>
-          <a:solidFill>
-            <a:srgbClr val="C25E28"/>
-          </a:solidFill>
-          <a:ln w="12700">
-            <a:solidFill>
-              <a:srgbClr val="C25E28"/>
-            </a:solidFill>
-            <a:prstDash val="solid"/>
-          </a:ln>
-        </p:spPr>
-      </p:sp>
-      <p:sp>
-        <p:nvSpPr>
-          <p:cNvPr id="13" name="Text 11"/>
-          <p:cNvSpPr/>
-          <p:nvPr/>
-        </p:nvSpPr>
-        <p:spPr>
-          <a:xfrm>
-            <a:off x="685800" y="4754880"/>
-            <a:ext cx="2286000" cy="914400"/>
-          </a:xfrm>
-          <a:prstGeom prst="rect">
-            <a:avLst/>
-          </a:prstGeom>
-          <a:noFill/>
-          <a:ln/>
-        </p:spPr>
-        <p:txBody>
-          <a:bodyPr wrap="square" lIns="0" tIns="0" rIns="0" bIns="0" rtlCol="0" anchor="ctr"/>
-          <a:lstStyle/>
-          <a:p>
-            <a:pPr algn="ctr" indent="0" marL="0">
-              <a:buNone/>
-            </a:pPr>
-            <a:r>
-              <a:rPr lang="en-US" sz="1600" b="1" dirty="0">
-                <a:solidFill>
-                  <a:srgbClr val="FFFFFF"/>
-                </a:solidFill>
-                <a:latin typeface="Cambria" pitchFamily="34" charset="0"/>
-                <a:ea typeface="Cambria" pitchFamily="34" charset="-122"/>
-                <a:cs typeface="Cambria" pitchFamily="34" charset="-120"/>
-              </a:rPr>
-              <a:t>Weeks 11–15</a:t>
-            </a:r>
-            <a:endParaRPr lang="en-US" sz="1600" dirty="0"/>
-          </a:p>
-        </p:txBody>
-      </p:sp>
-      <p:sp>
-        <p:nvSpPr>
-          <p:cNvPr id="14" name="Text 12"/>
-          <p:cNvSpPr/>
-          <p:nvPr/>
-        </p:nvSpPr>
-        <p:spPr>
-          <a:xfrm>
-            <a:off x="3337560" y="4754880"/>
-            <a:ext cx="5669280" cy="914400"/>
-          </a:xfrm>
-          <a:prstGeom prst="rect">
-            <a:avLst/>
-          </a:prstGeom>
-          <a:noFill/>
-          <a:ln/>
-        </p:spPr>
-        <p:txBody>
-          <a:bodyPr wrap="square" lIns="0" tIns="0" rIns="0" bIns="0" rtlCol="0" anchor="ctr"/>
-          <a:lstStyle/>
-          <a:p>
-            <a:pPr indent="0" marL="0">
-              <a:buNone/>
-            </a:pPr>
-            <a:r>
-              <a:rPr lang="en-US" sz="1600" dirty="0">
-                <a:solidFill>
-                  <a:srgbClr val="3E4C57"/>
-                </a:solidFill>
-                <a:latin typeface="Calibri" pitchFamily="34" charset="0"/>
-                <a:ea typeface="Calibri" pitchFamily="34" charset="-122"/>
-                <a:cs typeface="Calibri" pitchFamily="34" charset="-120"/>
-              </a:rPr>
-              <a:t>Measurement across the networks we can reach; write-up.</a:t>
-            </a:r>
-            <a:endParaRPr lang="en-US" sz="1600" dirty="0"/>
-          </a:p>
-        </p:txBody>
-      </p:sp>
-      <p:sp>
-        <p:nvSpPr>
-          <p:cNvPr id="15" name="Text 13"/>
-          <p:cNvSpPr/>
-          <p:nvPr/>
-        </p:nvSpPr>
-        <p:spPr>
-          <a:xfrm>
-            <a:off x="9189720" y="4754880"/>
-            <a:ext cx="2286000" cy="914400"/>
-          </a:xfrm>
-          <a:prstGeom prst="rect">
-            <a:avLst/>
-          </a:prstGeom>
-          <a:noFill/>
-          <a:ln/>
-        </p:spPr>
-        <p:txBody>
-          <a:bodyPr wrap="square" lIns="0" tIns="0" rIns="0" bIns="0" rtlCol="0" anchor="ctr"/>
-          <a:lstStyle/>
-          <a:p>
-            <a:pPr algn="r" indent="0" marL="0">
-              <a:buNone/>
-            </a:pPr>
-            <a:r>
-              <a:rPr lang="en-US" sz="1300" i="1" dirty="0">
-                <a:solidFill>
-                  <a:srgbClr val="6E7F8B"/>
-                </a:solidFill>
-                <a:latin typeface="Calibri" pitchFamily="34" charset="0"/>
-                <a:ea typeface="Calibri" pitchFamily="34" charset="-122"/>
-                <a:cs typeface="Calibri" pitchFamily="34" charset="-120"/>
-              </a:rPr>
-              <a:t>agreement, never accuracy</a:t>
-            </a:r>
-            <a:endParaRPr lang="en-US" sz="1300" dirty="0"/>
-          </a:p>
-        </p:txBody>
-      </p:sp>
-      <p:sp>
-        <p:nvSpPr>
-          <p:cNvPr id="16" name="Text 14"/>
-          <p:cNvSpPr/>
-          <p:nvPr/>
-        </p:nvSpPr>
-        <p:spPr>
-          <a:xfrm>
-            <a:off x="685800" y="5870448"/>
-            <a:ext cx="10789920" cy="292608"/>
-          </a:xfrm>
-          <a:prstGeom prst="rect">
-            <a:avLst/>
-          </a:prstGeom>
-          <a:noFill/>
-          <a:ln/>
-        </p:spPr>
-        <p:txBody>
-          <a:bodyPr wrap="square" lIns="0" tIns="0" rIns="0" bIns="0" rtlCol="0" anchor="ctr"/>
-          <a:lstStyle/>
-          <a:p>
-            <a:pPr indent="0" marL="0">
-              <a:buNone/>
-            </a:pPr>
-            <a:r>
-              <a:rPr lang="en-US" sz="1400" i="1" dirty="0">
-                <a:solidFill>
-                  <a:srgbClr val="0A5A62"/>
-                </a:solidFill>
-                <a:latin typeface="Calibri" pitchFamily="34" charset="0"/>
-                <a:ea typeface="Calibri" pitchFamily="34" charset="-122"/>
-                <a:cs typeface="Calibri" pitchFamily="34" charset="-120"/>
-              </a:rPr>
-              <a:t>Address-dependent mapping is built deliberately; no netfilter flag produces it.</a:t>
-            </a:r>
-            <a:endParaRPr lang="en-US" sz="1400" dirty="0"/>
-          </a:p>
-        </p:txBody>
-      </p:sp>
-      <p:sp>
-        <p:nvSpPr>
-          <p:cNvPr id="17" name="Text 15"/>
-          <p:cNvSpPr/>
-          <p:nvPr/>
-        </p:nvSpPr>
-        <p:spPr>
-          <a:xfrm>
-            <a:off x="685800" y="6199632"/>
-            <a:ext cx="10789920" cy="292608"/>
-          </a:xfrm>
-          <a:prstGeom prst="rect">
-            <a:avLst/>
-          </a:prstGeom>
-          <a:noFill/>
-          <a:ln/>
-        </p:spPr>
-        <p:txBody>
-          <a:bodyPr wrap="square" lIns="0" tIns="0" rIns="0" bIns="0" rtlCol="0" anchor="ctr"/>
-          <a:lstStyle/>
-          <a:p>
-            <a:pPr indent="0" marL="0">
-              <a:buNone/>
-            </a:pPr>
-            <a:r>
-              <a:rPr lang="en-US" sz="1400" i="1" dirty="0">
-                <a:solidFill>
-                  <a:srgbClr val="C25E28"/>
-                </a:solidFill>
-                <a:latin typeface="Calibri" pitchFamily="34" charset="0"/>
-                <a:ea typeface="Calibri" pitchFamily="34" charset="-122"/>
-                <a:cs typeface="Calibri" pitchFamily="34" charset="-120"/>
-              </a:rPr>
-              <a:t>Week one: addresses, firewall rules, SIMs and handsets. They gate week four.</a:t>
-            </a:r>
-            <a:endParaRPr lang="en-US" sz="1400" dirty="0"/>
           </a:p>
         </p:txBody>
       </p:sp>
